--- a/Documentation/Slides/Week_20.pptx
+++ b/Documentation/Slides/Week_20.pptx
@@ -5,49 +5,51 @@
     <p:sldMasterId id="2147483648" r:id="rId4"/>
   </p:sldMasterIdLst>
   <p:notesMasterIdLst>
-    <p:notesMasterId r:id="rId16"/>
+    <p:notesMasterId r:id="rId18"/>
   </p:notesMasterIdLst>
   <p:sldIdLst>
     <p:sldId id="267" r:id="rId5"/>
     <p:sldId id="279" r:id="rId6"/>
-    <p:sldId id="288" r:id="rId7"/>
-    <p:sldId id="300" r:id="rId8"/>
-    <p:sldId id="301" r:id="rId9"/>
-    <p:sldId id="302" r:id="rId10"/>
-    <p:sldId id="303" r:id="rId11"/>
-    <p:sldId id="304" r:id="rId12"/>
-    <p:sldId id="305" r:id="rId13"/>
-    <p:sldId id="299" r:id="rId14"/>
-    <p:sldId id="277" r:id="rId15"/>
+    <p:sldId id="306" r:id="rId7"/>
+    <p:sldId id="309" r:id="rId8"/>
+    <p:sldId id="300" r:id="rId9"/>
+    <p:sldId id="301" r:id="rId10"/>
+    <p:sldId id="302" r:id="rId11"/>
+    <p:sldId id="303" r:id="rId12"/>
+    <p:sldId id="307" r:id="rId13"/>
+    <p:sldId id="304" r:id="rId14"/>
+    <p:sldId id="305" r:id="rId15"/>
+    <p:sldId id="299" r:id="rId16"/>
+    <p:sldId id="277" r:id="rId17"/>
   </p:sldIdLst>
   <p:sldSz cx="9144000" cy="6858000" type="screen4x3"/>
   <p:notesSz cx="6858000" cy="9144000"/>
   <p:embeddedFontLst>
     <p:embeddedFont>
-      <p:font typeface="Acumin Pro Condensed Semibold" panose="020B0706020202020204" pitchFamily="34" charset="77"/>
-      <p:regular r:id="rId17"/>
-      <p:bold r:id="rId18"/>
-      <p:italic r:id="rId19"/>
-      <p:boldItalic r:id="rId20"/>
+      <p:font typeface="Acumin Pro Condensed Semibold" panose="020B0706020202020204"/>
+      <p:regular r:id="rId19"/>
+      <p:bold r:id="rId20"/>
+      <p:italic r:id="rId21"/>
+      <p:boldItalic r:id="rId22"/>
     </p:embeddedFont>
     <p:embeddedFont>
       <p:font typeface="Acumin Pro Medium" panose="020B0604020202020204" pitchFamily="34" charset="77"/>
-      <p:regular r:id="rId21"/>
-      <p:italic r:id="rId22"/>
-    </p:embeddedFont>
-    <p:embeddedFont>
-      <p:font typeface="Franklin Gothic Book" panose="020B0503020102020204" pitchFamily="34" charset="0"/>
       <p:regular r:id="rId23"/>
       <p:italic r:id="rId24"/>
     </p:embeddedFont>
     <p:embeddedFont>
-      <p:font typeface="Franklin Gothic Medium" panose="020B0603020102020204" pitchFamily="34" charset="0"/>
+      <p:font typeface="Franklin Gothic Book" panose="020B0503020102020204" pitchFamily="34" charset="0"/>
       <p:regular r:id="rId25"/>
       <p:italic r:id="rId26"/>
     </p:embeddedFont>
     <p:embeddedFont>
+      <p:font typeface="Franklin Gothic Medium" panose="020B0603020102020204" pitchFamily="34" charset="0"/>
+      <p:regular r:id="rId27"/>
+      <p:italic r:id="rId28"/>
+    </p:embeddedFont>
+    <p:embeddedFont>
       <p:font typeface="Franklin Gothic Medium Cond" panose="020B0606030402020204" pitchFamily="34" charset="0"/>
-      <p:regular r:id="rId27"/>
+      <p:regular r:id="rId29"/>
     </p:embeddedFont>
   </p:embeddedFontLst>
   <p:defaultTextStyle>
@@ -716,7 +718,7 @@
           <a:p>
             <a:fld id="{237BF745-0557-B241-863F-056113C7032A}" type="slidenum">
               <a:rPr lang="en-US" smtClean="0"/>
-              <a:t>10</a:t>
+              <a:t>12</a:t>
             </a:fld>
             <a:endParaRPr lang="en-US"/>
           </a:p>
@@ -824,109 +826,6 @@
   <p:cSld>
     <p:spTree>
       <p:nvGrpSpPr>
-        <p:cNvPr id="1" name=""/>
-        <p:cNvGrpSpPr/>
-        <p:nvPr/>
-      </p:nvGrpSpPr>
-      <p:grpSpPr>
-        <a:xfrm>
-          <a:off x="0" y="0"/>
-          <a:ext cx="0" cy="0"/>
-          <a:chOff x="0" y="0"/>
-          <a:chExt cx="0" cy="0"/>
-        </a:xfrm>
-      </p:grpSpPr>
-      <p:sp>
-        <p:nvSpPr>
-          <p:cNvPr id="2" name="Slide Image Placeholder 1"/>
-          <p:cNvSpPr>
-            <a:spLocks noGrp="1" noRot="1" noChangeAspect="1"/>
-          </p:cNvSpPr>
-          <p:nvPr>
-            <p:ph type="sldImg"/>
-          </p:nvPr>
-        </p:nvSpPr>
-        <p:spPr/>
-      </p:sp>
-      <p:sp>
-        <p:nvSpPr>
-          <p:cNvPr id="3" name="Notes Placeholder 2"/>
-          <p:cNvSpPr>
-            <a:spLocks noGrp="1"/>
-          </p:cNvSpPr>
-          <p:nvPr>
-            <p:ph type="body" idx="1"/>
-          </p:nvPr>
-        </p:nvSpPr>
-        <p:spPr/>
-        <p:txBody>
-          <a:bodyPr/>
-          <a:lstStyle/>
-          <a:p>
-            <a:r>
-              <a:rPr lang="en-US" dirty="0" err="1"/>
-              <a:t>Sabattical</a:t>
-            </a:r>
-            <a:r>
-              <a:rPr lang="en-US" dirty="0"/>
-              <a:t>?</a:t>
-            </a:r>
-          </a:p>
-          <a:p>
-            <a:r>
-              <a:rPr lang="en-US" dirty="0"/>
-              <a:t>Leon Salas Weekly Meetings</a:t>
-            </a:r>
-          </a:p>
-          <a:p>
-            <a:r>
-              <a:rPr lang="en-US" dirty="0"/>
-              <a:t>Meeting Time</a:t>
-            </a:r>
-          </a:p>
-        </p:txBody>
-      </p:sp>
-      <p:sp>
-        <p:nvSpPr>
-          <p:cNvPr id="4" name="Slide Number Placeholder 3"/>
-          <p:cNvSpPr>
-            <a:spLocks noGrp="1"/>
-          </p:cNvSpPr>
-          <p:nvPr>
-            <p:ph type="sldNum" sz="quarter" idx="5"/>
-          </p:nvPr>
-        </p:nvSpPr>
-        <p:spPr/>
-        <p:txBody>
-          <a:bodyPr/>
-          <a:lstStyle/>
-          <a:p>
-            <a:fld id="{237BF745-0557-B241-863F-056113C7032A}" type="slidenum">
-              <a:rPr lang="en-US" smtClean="0"/>
-              <a:t>3</a:t>
-            </a:fld>
-            <a:endParaRPr lang="en-US"/>
-          </a:p>
-        </p:txBody>
-      </p:sp>
-    </p:spTree>
-    <p:extLst>
-      <p:ext uri="{BB962C8B-B14F-4D97-AF65-F5344CB8AC3E}">
-        <p14:creationId xmlns:p14="http://schemas.microsoft.com/office/powerpoint/2010/main" val="833689646"/>
-      </p:ext>
-    </p:extLst>
-  </p:cSld>
-  <p:clrMapOvr>
-    <a:masterClrMapping/>
-  </p:clrMapOvr>
-</p:notes>
-</file>
-
-<file path=ppt/notesSlides/notesSlide4.xml><?xml version="1.0" encoding="utf-8"?>
-<p:notes xmlns:a="http://schemas.openxmlformats.org/drawingml/2006/main" xmlns:r="http://schemas.openxmlformats.org/officeDocument/2006/relationships" xmlns:p="http://schemas.openxmlformats.org/presentationml/2006/main">
-  <p:cSld>
-    <p:spTree>
-      <p:nvGrpSpPr>
         <p:cNvPr id="1" name="">
           <a:extLst>
             <a:ext uri="{FF2B5EF4-FFF2-40B4-BE49-F238E27FC236}">
@@ -1030,7 +929,7 @@
           <a:p>
             <a:fld id="{237BF745-0557-B241-863F-056113C7032A}" type="slidenum">
               <a:rPr lang="en-US" smtClean="0"/>
-              <a:t>4</a:t>
+              <a:t>5</a:t>
             </a:fld>
             <a:endParaRPr lang="en-US"/>
           </a:p>
@@ -1049,7 +948,7 @@
 </p:notes>
 </file>
 
-<file path=ppt/notesSlides/notesSlide5.xml><?xml version="1.0" encoding="utf-8"?>
+<file path=ppt/notesSlides/notesSlide4.xml><?xml version="1.0" encoding="utf-8"?>
 <p:notes xmlns:a="http://schemas.openxmlformats.org/drawingml/2006/main" xmlns:r="http://schemas.openxmlformats.org/officeDocument/2006/relationships" xmlns:p="http://schemas.openxmlformats.org/presentationml/2006/main">
   <p:cSld>
     <p:spTree>
@@ -1157,7 +1056,7 @@
           <a:p>
             <a:fld id="{237BF745-0557-B241-863F-056113C7032A}" type="slidenum">
               <a:rPr lang="en-US" smtClean="0"/>
-              <a:t>5</a:t>
+              <a:t>6</a:t>
             </a:fld>
             <a:endParaRPr lang="en-US"/>
           </a:p>
@@ -1176,7 +1075,7 @@
 </p:notes>
 </file>
 
-<file path=ppt/notesSlides/notesSlide6.xml><?xml version="1.0" encoding="utf-8"?>
+<file path=ppt/notesSlides/notesSlide5.xml><?xml version="1.0" encoding="utf-8"?>
 <p:notes xmlns:a="http://schemas.openxmlformats.org/drawingml/2006/main" xmlns:r="http://schemas.openxmlformats.org/officeDocument/2006/relationships" xmlns:p="http://schemas.openxmlformats.org/presentationml/2006/main">
   <p:cSld>
     <p:spTree>
@@ -1284,7 +1183,7 @@
           <a:p>
             <a:fld id="{237BF745-0557-B241-863F-056113C7032A}" type="slidenum">
               <a:rPr lang="en-US" smtClean="0"/>
-              <a:t>6</a:t>
+              <a:t>7</a:t>
             </a:fld>
             <a:endParaRPr lang="en-US"/>
           </a:p>
@@ -1303,7 +1202,7 @@
 </p:notes>
 </file>
 
-<file path=ppt/notesSlides/notesSlide7.xml><?xml version="1.0" encoding="utf-8"?>
+<file path=ppt/notesSlides/notesSlide6.xml><?xml version="1.0" encoding="utf-8"?>
 <p:notes xmlns:a="http://schemas.openxmlformats.org/drawingml/2006/main" xmlns:r="http://schemas.openxmlformats.org/officeDocument/2006/relationships" xmlns:p="http://schemas.openxmlformats.org/presentationml/2006/main">
   <p:cSld>
     <p:spTree>
@@ -1411,7 +1310,7 @@
           <a:p>
             <a:fld id="{237BF745-0557-B241-863F-056113C7032A}" type="slidenum">
               <a:rPr lang="en-US" smtClean="0"/>
-              <a:t>7</a:t>
+              <a:t>8</a:t>
             </a:fld>
             <a:endParaRPr lang="en-US"/>
           </a:p>
@@ -1421,6 +1320,133 @@
     <p:extLst>
       <p:ext uri="{BB962C8B-B14F-4D97-AF65-F5344CB8AC3E}">
         <p14:creationId xmlns:p14="http://schemas.microsoft.com/office/powerpoint/2010/main" val="1534740504"/>
+      </p:ext>
+    </p:extLst>
+  </p:cSld>
+  <p:clrMapOvr>
+    <a:masterClrMapping/>
+  </p:clrMapOvr>
+</p:notes>
+</file>
+
+<file path=ppt/notesSlides/notesSlide7.xml><?xml version="1.0" encoding="utf-8"?>
+<p:notes xmlns:a="http://schemas.openxmlformats.org/drawingml/2006/main" xmlns:r="http://schemas.openxmlformats.org/officeDocument/2006/relationships" xmlns:p="http://schemas.openxmlformats.org/presentationml/2006/main">
+  <p:cSld>
+    <p:spTree>
+      <p:nvGrpSpPr>
+        <p:cNvPr id="1" name="">
+          <a:extLst>
+            <a:ext uri="{FF2B5EF4-FFF2-40B4-BE49-F238E27FC236}">
+              <a16:creationId xmlns:a16="http://schemas.microsoft.com/office/drawing/2014/main" id="{E6C87682-D270-41B3-1C7C-D66BED1CFB3E}"/>
+            </a:ext>
+          </a:extLst>
+        </p:cNvPr>
+        <p:cNvGrpSpPr/>
+        <p:nvPr/>
+      </p:nvGrpSpPr>
+      <p:grpSpPr>
+        <a:xfrm>
+          <a:off x="0" y="0"/>
+          <a:ext cx="0" cy="0"/>
+          <a:chOff x="0" y="0"/>
+          <a:chExt cx="0" cy="0"/>
+        </a:xfrm>
+      </p:grpSpPr>
+      <p:sp>
+        <p:nvSpPr>
+          <p:cNvPr id="2" name="Slide Image Placeholder 1">
+            <a:extLst>
+              <a:ext uri="{FF2B5EF4-FFF2-40B4-BE49-F238E27FC236}">
+                <a16:creationId xmlns:a16="http://schemas.microsoft.com/office/drawing/2014/main" id="{55FFF2DD-050B-AE1F-1EB6-1D542973A58A}"/>
+              </a:ext>
+            </a:extLst>
+          </p:cNvPr>
+          <p:cNvSpPr>
+            <a:spLocks noGrp="1" noRot="1" noChangeAspect="1"/>
+          </p:cNvSpPr>
+          <p:nvPr>
+            <p:ph type="sldImg"/>
+          </p:nvPr>
+        </p:nvSpPr>
+        <p:spPr/>
+      </p:sp>
+      <p:sp>
+        <p:nvSpPr>
+          <p:cNvPr id="3" name="Notes Placeholder 2">
+            <a:extLst>
+              <a:ext uri="{FF2B5EF4-FFF2-40B4-BE49-F238E27FC236}">
+                <a16:creationId xmlns:a16="http://schemas.microsoft.com/office/drawing/2014/main" id="{19B30F63-7900-48A2-1434-9B71088D64AD}"/>
+              </a:ext>
+            </a:extLst>
+          </p:cNvPr>
+          <p:cNvSpPr>
+            <a:spLocks noGrp="1"/>
+          </p:cNvSpPr>
+          <p:nvPr>
+            <p:ph type="body" idx="1"/>
+          </p:nvPr>
+        </p:nvSpPr>
+        <p:spPr/>
+        <p:txBody>
+          <a:bodyPr/>
+          <a:lstStyle/>
+          <a:p>
+            <a:r>
+              <a:rPr lang="en-US" dirty="0" err="1"/>
+              <a:t>Sabattical</a:t>
+            </a:r>
+            <a:r>
+              <a:rPr lang="en-US" dirty="0"/>
+              <a:t>?</a:t>
+            </a:r>
+          </a:p>
+          <a:p>
+            <a:r>
+              <a:rPr lang="en-US" dirty="0"/>
+              <a:t>Leon Salas Weekly Meetings</a:t>
+            </a:r>
+          </a:p>
+          <a:p>
+            <a:r>
+              <a:rPr lang="en-US" dirty="0"/>
+              <a:t>Meeting Time</a:t>
+            </a:r>
+          </a:p>
+        </p:txBody>
+      </p:sp>
+      <p:sp>
+        <p:nvSpPr>
+          <p:cNvPr id="4" name="Slide Number Placeholder 3">
+            <a:extLst>
+              <a:ext uri="{FF2B5EF4-FFF2-40B4-BE49-F238E27FC236}">
+                <a16:creationId xmlns:a16="http://schemas.microsoft.com/office/drawing/2014/main" id="{E42B2F58-01C0-09C6-BE7D-2AEF4E32D7DA}"/>
+              </a:ext>
+            </a:extLst>
+          </p:cNvPr>
+          <p:cNvSpPr>
+            <a:spLocks noGrp="1"/>
+          </p:cNvSpPr>
+          <p:nvPr>
+            <p:ph type="sldNum" sz="quarter" idx="5"/>
+          </p:nvPr>
+        </p:nvSpPr>
+        <p:spPr/>
+        <p:txBody>
+          <a:bodyPr/>
+          <a:lstStyle/>
+          <a:p>
+            <a:fld id="{237BF745-0557-B241-863F-056113C7032A}" type="slidenum">
+              <a:rPr lang="en-US" smtClean="0"/>
+              <a:t>9</a:t>
+            </a:fld>
+            <a:endParaRPr lang="en-US"/>
+          </a:p>
+        </p:txBody>
+      </p:sp>
+    </p:spTree>
+    <p:extLst>
+      <p:ext uri="{BB962C8B-B14F-4D97-AF65-F5344CB8AC3E}">
+        <p14:creationId xmlns:p14="http://schemas.microsoft.com/office/powerpoint/2010/main" val="1585396343"/>
       </p:ext>
     </p:extLst>
   </p:cSld>
@@ -1538,7 +1564,7 @@
           <a:p>
             <a:fld id="{237BF745-0557-B241-863F-056113C7032A}" type="slidenum">
               <a:rPr lang="en-US" smtClean="0"/>
-              <a:t>8</a:t>
+              <a:t>10</a:t>
             </a:fld>
             <a:endParaRPr lang="en-US"/>
           </a:p>
@@ -1665,7 +1691,7 @@
           <a:p>
             <a:fld id="{237BF745-0557-B241-863F-056113C7032A}" type="slidenum">
               <a:rPr lang="en-US" smtClean="0"/>
-              <a:t>9</a:t>
+              <a:t>11</a:t>
             </a:fld>
             <a:endParaRPr lang="en-US"/>
           </a:p>
@@ -14674,6 +14700,463 @@
         <p:cNvPr id="1" name="">
           <a:extLst>
             <a:ext uri="{FF2B5EF4-FFF2-40B4-BE49-F238E27FC236}">
+              <a16:creationId xmlns:a16="http://schemas.microsoft.com/office/drawing/2014/main" id="{0F9A802B-6069-FC86-8CDE-6BE49EF688AE}"/>
+            </a:ext>
+          </a:extLst>
+        </p:cNvPr>
+        <p:cNvGrpSpPr/>
+        <p:nvPr/>
+      </p:nvGrpSpPr>
+      <p:grpSpPr>
+        <a:xfrm>
+          <a:off x="0" y="0"/>
+          <a:ext cx="0" cy="0"/>
+          <a:chOff x="0" y="0"/>
+          <a:chExt cx="0" cy="0"/>
+        </a:xfrm>
+      </p:grpSpPr>
+      <p:sp>
+        <p:nvSpPr>
+          <p:cNvPr id="2" name="Text Placeholder 1">
+            <a:extLst>
+              <a:ext uri="{FF2B5EF4-FFF2-40B4-BE49-F238E27FC236}">
+                <a16:creationId xmlns:a16="http://schemas.microsoft.com/office/drawing/2014/main" id="{9A255753-C073-0BEF-F44D-2C7D209C06B7}"/>
+              </a:ext>
+            </a:extLst>
+          </p:cNvPr>
+          <p:cNvSpPr>
+            <a:spLocks noGrp="1"/>
+          </p:cNvSpPr>
+          <p:nvPr>
+            <p:ph type="body" sz="quarter" idx="11"/>
+          </p:nvPr>
+        </p:nvSpPr>
+        <p:spPr>
+          <a:xfrm>
+            <a:off x="342900" y="954291"/>
+            <a:ext cx="8458200" cy="365760"/>
+          </a:xfrm>
+        </p:spPr>
+        <p:txBody>
+          <a:bodyPr>
+            <a:normAutofit lnSpcReduction="10000"/>
+          </a:bodyPr>
+          <a:lstStyle/>
+          <a:p>
+            <a:r>
+              <a:rPr lang="en-US" dirty="0"/>
+              <a:t>Sensor form 12(s)</a:t>
+            </a:r>
+          </a:p>
+        </p:txBody>
+      </p:sp>
+      <p:sp>
+        <p:nvSpPr>
+          <p:cNvPr id="14" name="Text Placeholder 2">
+            <a:extLst>
+              <a:ext uri="{FF2B5EF4-FFF2-40B4-BE49-F238E27FC236}">
+                <a16:creationId xmlns:a16="http://schemas.microsoft.com/office/drawing/2014/main" id="{2AD3CEDE-45B1-B6B8-36DF-F4F0AC0D4286}"/>
+              </a:ext>
+            </a:extLst>
+          </p:cNvPr>
+          <p:cNvSpPr>
+            <a:spLocks noGrp="1"/>
+          </p:cNvSpPr>
+          <p:nvPr>
+            <p:ph type="body" sz="quarter" idx="10"/>
+          </p:nvPr>
+        </p:nvSpPr>
+        <p:spPr>
+          <a:xfrm>
+            <a:off x="334735" y="3652273"/>
+            <a:ext cx="4102307" cy="2345757"/>
+          </a:xfrm>
+        </p:spPr>
+        <p:txBody>
+          <a:bodyPr/>
+          <a:lstStyle/>
+          <a:p>
+            <a:r>
+              <a:rPr lang="en-US" dirty="0"/>
+              <a:t>Form 12 for strain gauge</a:t>
+            </a:r>
+          </a:p>
+        </p:txBody>
+      </p:sp>
+      <p:sp>
+        <p:nvSpPr>
+          <p:cNvPr id="4" name="Title 3">
+            <a:extLst>
+              <a:ext uri="{FF2B5EF4-FFF2-40B4-BE49-F238E27FC236}">
+                <a16:creationId xmlns:a16="http://schemas.microsoft.com/office/drawing/2014/main" id="{3D014B7D-6644-711A-3443-C61B809B35E2}"/>
+              </a:ext>
+            </a:extLst>
+          </p:cNvPr>
+          <p:cNvSpPr>
+            <a:spLocks noGrp="1"/>
+          </p:cNvSpPr>
+          <p:nvPr>
+            <p:ph type="title"/>
+          </p:nvPr>
+        </p:nvSpPr>
+        <p:spPr>
+          <a:xfrm>
+            <a:off x="351064" y="385004"/>
+            <a:ext cx="8450036" cy="589032"/>
+          </a:xfrm>
+        </p:spPr>
+        <p:txBody>
+          <a:bodyPr anchor="ctr">
+            <a:normAutofit/>
+          </a:bodyPr>
+          <a:lstStyle/>
+          <a:p>
+            <a:r>
+              <a:rPr lang="en-US" dirty="0"/>
+              <a:t>Purchase Reports</a:t>
+            </a:r>
+          </a:p>
+        </p:txBody>
+      </p:sp>
+      <p:pic>
+        <p:nvPicPr>
+          <p:cNvPr id="7" name="Picture 6" descr="A screenshot of a document&#10;&#10;AI-generated content may be incorrect.">
+            <a:extLst>
+              <a:ext uri="{FF2B5EF4-FFF2-40B4-BE49-F238E27FC236}">
+                <a16:creationId xmlns:a16="http://schemas.microsoft.com/office/drawing/2014/main" id="{973F3AE1-7004-9405-078A-2080ED0E6177}"/>
+              </a:ext>
+            </a:extLst>
+          </p:cNvPr>
+          <p:cNvPicPr>
+            <a:picLocks noChangeAspect="1"/>
+          </p:cNvPicPr>
+          <p:nvPr/>
+        </p:nvPicPr>
+        <p:blipFill>
+          <a:blip r:embed="rId3"/>
+          <a:srcRect r="2" b="12447"/>
+          <a:stretch>
+            <a:fillRect/>
+          </a:stretch>
+        </p:blipFill>
+        <p:spPr>
+          <a:xfrm>
+            <a:off x="334734" y="1543324"/>
+            <a:ext cx="4102309" cy="1885677"/>
+          </a:xfrm>
+          <a:prstGeom prst="rect">
+            <a:avLst/>
+          </a:prstGeom>
+          <a:noFill/>
+        </p:spPr>
+      </p:pic>
+      <p:pic>
+        <p:nvPicPr>
+          <p:cNvPr id="9" name="Picture 8" descr="A close-up of a blank form&#10;&#10;AI-generated content may be incorrect.">
+            <a:extLst>
+              <a:ext uri="{FF2B5EF4-FFF2-40B4-BE49-F238E27FC236}">
+                <a16:creationId xmlns:a16="http://schemas.microsoft.com/office/drawing/2014/main" id="{B5AD7235-FA73-252D-28A9-F69C4E9B5F36}"/>
+              </a:ext>
+            </a:extLst>
+          </p:cNvPr>
+          <p:cNvPicPr>
+            <a:picLocks noChangeAspect="1"/>
+          </p:cNvPicPr>
+          <p:nvPr/>
+        </p:nvPicPr>
+        <p:blipFill>
+          <a:blip r:embed="rId4"/>
+          <a:srcRect l="20211" r="2" b="2"/>
+          <a:stretch>
+            <a:fillRect/>
+          </a:stretch>
+        </p:blipFill>
+        <p:spPr>
+          <a:xfrm>
+            <a:off x="4706959" y="1543324"/>
+            <a:ext cx="4094045" cy="1885677"/>
+          </a:xfrm>
+          <a:prstGeom prst="rect">
+            <a:avLst/>
+          </a:prstGeom>
+          <a:noFill/>
+        </p:spPr>
+      </p:pic>
+      <p:sp>
+        <p:nvSpPr>
+          <p:cNvPr id="16" name="Text Placeholder 6">
+            <a:extLst>
+              <a:ext uri="{FF2B5EF4-FFF2-40B4-BE49-F238E27FC236}">
+                <a16:creationId xmlns:a16="http://schemas.microsoft.com/office/drawing/2014/main" id="{E5010B8D-BB83-7836-3324-C976CA3285BC}"/>
+              </a:ext>
+            </a:extLst>
+          </p:cNvPr>
+          <p:cNvSpPr>
+            <a:spLocks noGrp="1"/>
+          </p:cNvSpPr>
+          <p:nvPr>
+            <p:ph type="body" sz="quarter" idx="15"/>
+          </p:nvPr>
+        </p:nvSpPr>
+        <p:spPr>
+          <a:xfrm>
+            <a:off x="4698697" y="3652272"/>
+            <a:ext cx="4102307" cy="2345757"/>
+          </a:xfrm>
+        </p:spPr>
+        <p:txBody>
+          <a:bodyPr/>
+          <a:lstStyle/>
+          <a:p>
+            <a:r>
+              <a:rPr lang="en-US" dirty="0"/>
+              <a:t>Form 12 for force sensor</a:t>
+            </a:r>
+          </a:p>
+        </p:txBody>
+      </p:sp>
+      <p:sp>
+        <p:nvSpPr>
+          <p:cNvPr id="5" name="Footer Placeholder 4">
+            <a:extLst>
+              <a:ext uri="{FF2B5EF4-FFF2-40B4-BE49-F238E27FC236}">
+                <a16:creationId xmlns:a16="http://schemas.microsoft.com/office/drawing/2014/main" id="{235C4917-5D37-9A22-B309-4FC307FCFCAC}"/>
+              </a:ext>
+            </a:extLst>
+          </p:cNvPr>
+          <p:cNvSpPr>
+            <a:spLocks noGrp="1"/>
+          </p:cNvSpPr>
+          <p:nvPr>
+            <p:ph type="ftr" sz="quarter" idx="16"/>
+          </p:nvPr>
+        </p:nvSpPr>
+        <p:spPr>
+          <a:xfrm>
+            <a:off x="7461174" y="6295058"/>
+            <a:ext cx="1339925" cy="323970"/>
+          </a:xfrm>
+        </p:spPr>
+        <p:txBody>
+          <a:bodyPr anchor="ctr">
+            <a:normAutofit/>
+          </a:bodyPr>
+          <a:lstStyle/>
+          <a:p>
+            <a:pPr algn="r">
+              <a:spcAft>
+                <a:spcPts val="600"/>
+              </a:spcAft>
+            </a:pPr>
+            <a:r>
+              <a:rPr lang="en-US" dirty="0"/>
+              <a:t>8/11</a:t>
+            </a:r>
+            <a:endParaRPr lang="en-US"/>
+          </a:p>
+        </p:txBody>
+      </p:sp>
+    </p:spTree>
+    <p:extLst>
+      <p:ext uri="{BB962C8B-B14F-4D97-AF65-F5344CB8AC3E}">
+        <p14:creationId xmlns:p14="http://schemas.microsoft.com/office/powerpoint/2010/main" val="1932811717"/>
+      </p:ext>
+    </p:extLst>
+  </p:cSld>
+  <p:clrMapOvr>
+    <a:masterClrMapping/>
+  </p:clrMapOvr>
+</p:sld>
+</file>
+
+<file path=ppt/slides/slide11.xml><?xml version="1.0" encoding="utf-8"?>
+<p:sld xmlns:a="http://schemas.openxmlformats.org/drawingml/2006/main" xmlns:r="http://schemas.openxmlformats.org/officeDocument/2006/relationships" xmlns:p="http://schemas.openxmlformats.org/presentationml/2006/main">
+  <p:cSld>
+    <p:spTree>
+      <p:nvGrpSpPr>
+        <p:cNvPr id="1" name="">
+          <a:extLst>
+            <a:ext uri="{FF2B5EF4-FFF2-40B4-BE49-F238E27FC236}">
+              <a16:creationId xmlns:a16="http://schemas.microsoft.com/office/drawing/2014/main" id="{04776F36-879E-6BF4-4677-6E9C9FBCA377}"/>
+            </a:ext>
+          </a:extLst>
+        </p:cNvPr>
+        <p:cNvGrpSpPr/>
+        <p:nvPr/>
+      </p:nvGrpSpPr>
+      <p:grpSpPr>
+        <a:xfrm>
+          <a:off x="0" y="0"/>
+          <a:ext cx="0" cy="0"/>
+          <a:chOff x="0" y="0"/>
+          <a:chExt cx="0" cy="0"/>
+        </a:xfrm>
+      </p:grpSpPr>
+      <p:sp>
+        <p:nvSpPr>
+          <p:cNvPr id="2" name="Text Placeholder 1">
+            <a:extLst>
+              <a:ext uri="{FF2B5EF4-FFF2-40B4-BE49-F238E27FC236}">
+                <a16:creationId xmlns:a16="http://schemas.microsoft.com/office/drawing/2014/main" id="{D06FE3C5-89AD-E3D0-CD5E-FD7333DD4FB2}"/>
+              </a:ext>
+            </a:extLst>
+          </p:cNvPr>
+          <p:cNvSpPr>
+            <a:spLocks noGrp="1"/>
+          </p:cNvSpPr>
+          <p:nvPr>
+            <p:ph type="body" sz="quarter" idx="11"/>
+          </p:nvPr>
+        </p:nvSpPr>
+        <p:spPr/>
+        <p:txBody>
+          <a:bodyPr/>
+          <a:lstStyle/>
+          <a:p>
+            <a:r>
+              <a:rPr lang="en-US" dirty="0" err="1"/>
+              <a:t>DigiKey</a:t>
+            </a:r>
+            <a:r>
+              <a:rPr lang="en-US" dirty="0"/>
+              <a:t>/Mouser/Vendor purchase orders</a:t>
+            </a:r>
+          </a:p>
+        </p:txBody>
+      </p:sp>
+      <p:sp>
+        <p:nvSpPr>
+          <p:cNvPr id="3" name="Text Placeholder 2">
+            <a:extLst>
+              <a:ext uri="{FF2B5EF4-FFF2-40B4-BE49-F238E27FC236}">
+                <a16:creationId xmlns:a16="http://schemas.microsoft.com/office/drawing/2014/main" id="{711699F4-B212-0FDC-0F24-02EDFC33389C}"/>
+              </a:ext>
+            </a:extLst>
+          </p:cNvPr>
+          <p:cNvSpPr>
+            <a:spLocks noGrp="1"/>
+          </p:cNvSpPr>
+          <p:nvPr>
+            <p:ph type="body" sz="quarter" idx="10"/>
+          </p:nvPr>
+        </p:nvSpPr>
+        <p:spPr/>
+        <p:txBody>
+          <a:bodyPr/>
+          <a:lstStyle/>
+          <a:p>
+            <a:pPr marL="285750" indent="-285750">
+              <a:buFont typeface="Arial" panose="020B0604020202020204" pitchFamily="34" charset="0"/>
+              <a:buChar char="•"/>
+            </a:pPr>
+            <a:r>
+              <a:rPr lang="en-US" dirty="0"/>
+              <a:t>According to purchasing office, common vendors can be ordered from </a:t>
+            </a:r>
+            <a:r>
+              <a:rPr lang="en-US" dirty="0" err="1"/>
+              <a:t>one.purdue.edu</a:t>
+            </a:r>
+            <a:endParaRPr lang="en-US" dirty="0"/>
+          </a:p>
+          <a:p>
+            <a:pPr marL="285750" indent="-285750">
+              <a:buFont typeface="Arial" panose="020B0604020202020204" pitchFamily="34" charset="0"/>
+              <a:buChar char="•"/>
+            </a:pPr>
+            <a:r>
+              <a:rPr lang="en-US" dirty="0"/>
+              <a:t>Will try to put in requests for common vendors (</a:t>
+            </a:r>
+            <a:r>
+              <a:rPr lang="en-US" dirty="0" err="1"/>
+              <a:t>DigiKey</a:t>
+            </a:r>
+            <a:r>
+              <a:rPr lang="en-US" dirty="0"/>
+              <a:t>) to get components without having to get a Form 12</a:t>
+            </a:r>
+          </a:p>
+        </p:txBody>
+      </p:sp>
+      <p:sp>
+        <p:nvSpPr>
+          <p:cNvPr id="4" name="Title 3">
+            <a:extLst>
+              <a:ext uri="{FF2B5EF4-FFF2-40B4-BE49-F238E27FC236}">
+                <a16:creationId xmlns:a16="http://schemas.microsoft.com/office/drawing/2014/main" id="{4BE6A22C-BF1C-6392-CDC8-D15D5D07648E}"/>
+              </a:ext>
+            </a:extLst>
+          </p:cNvPr>
+          <p:cNvSpPr>
+            <a:spLocks noGrp="1"/>
+          </p:cNvSpPr>
+          <p:nvPr>
+            <p:ph type="title"/>
+          </p:nvPr>
+        </p:nvSpPr>
+        <p:spPr/>
+        <p:txBody>
+          <a:bodyPr/>
+          <a:lstStyle/>
+          <a:p>
+            <a:r>
+              <a:rPr lang="en-US" dirty="0"/>
+              <a:t>Purchase Reports</a:t>
+            </a:r>
+          </a:p>
+        </p:txBody>
+      </p:sp>
+      <p:sp>
+        <p:nvSpPr>
+          <p:cNvPr id="5" name="Footer Placeholder 4">
+            <a:extLst>
+              <a:ext uri="{FF2B5EF4-FFF2-40B4-BE49-F238E27FC236}">
+                <a16:creationId xmlns:a16="http://schemas.microsoft.com/office/drawing/2014/main" id="{E21E4B51-8C00-7CF9-B170-99CA359E2846}"/>
+              </a:ext>
+            </a:extLst>
+          </p:cNvPr>
+          <p:cNvSpPr>
+            <a:spLocks noGrp="1"/>
+          </p:cNvSpPr>
+          <p:nvPr>
+            <p:ph type="ftr" sz="quarter" idx="12"/>
+          </p:nvPr>
+        </p:nvSpPr>
+        <p:spPr/>
+        <p:txBody>
+          <a:bodyPr/>
+          <a:lstStyle/>
+          <a:p>
+            <a:pPr algn="r"/>
+            <a:r>
+              <a:rPr lang="en-US" dirty="0"/>
+              <a:t>9/11</a:t>
+            </a:r>
+          </a:p>
+        </p:txBody>
+      </p:sp>
+    </p:spTree>
+    <p:extLst>
+      <p:ext uri="{BB962C8B-B14F-4D97-AF65-F5344CB8AC3E}">
+        <p14:creationId xmlns:p14="http://schemas.microsoft.com/office/powerpoint/2010/main" val="1106423586"/>
+      </p:ext>
+    </p:extLst>
+  </p:cSld>
+  <p:clrMapOvr>
+    <a:masterClrMapping/>
+  </p:clrMapOvr>
+</p:sld>
+</file>
+
+<file path=ppt/slides/slide12.xml><?xml version="1.0" encoding="utf-8"?>
+<p:sld xmlns:a="http://schemas.openxmlformats.org/drawingml/2006/main" xmlns:r="http://schemas.openxmlformats.org/officeDocument/2006/relationships" xmlns:p="http://schemas.openxmlformats.org/presentationml/2006/main">
+  <p:cSld>
+    <p:spTree>
+      <p:nvGrpSpPr>
+        <p:cNvPr id="1" name="">
+          <a:extLst>
+            <a:ext uri="{FF2B5EF4-FFF2-40B4-BE49-F238E27FC236}">
               <a16:creationId xmlns:a16="http://schemas.microsoft.com/office/drawing/2014/main" id="{0233EE2C-E869-EFCD-766A-B2EE7BADA3E8}"/>
             </a:ext>
           </a:extLst>
@@ -14744,7 +15227,35 @@
             </a:pPr>
             <a:r>
               <a:rPr lang="en-US" dirty="0"/>
-              <a:t>[Action Items for Next Week]</a:t>
+              <a:t>More Data Analysis of IMU</a:t>
+            </a:r>
+          </a:p>
+          <a:p>
+            <a:pPr marL="285750" indent="-285750">
+              <a:buFont typeface="Arial" panose="020B0604020202020204" pitchFamily="34" charset="0"/>
+              <a:buChar char="•"/>
+            </a:pPr>
+            <a:r>
+              <a:rPr lang="en-US" dirty="0"/>
+              <a:t>Obtain </a:t>
+            </a:r>
+            <a:r>
+              <a:rPr lang="en-US" dirty="0" err="1"/>
+              <a:t>Powercast</a:t>
+            </a:r>
+            <a:r>
+              <a:rPr lang="en-US" dirty="0"/>
+              <a:t> RFID -&gt; DC Converters from Agriculture</a:t>
+            </a:r>
+          </a:p>
+          <a:p>
+            <a:pPr marL="285750" indent="-285750">
+              <a:buFont typeface="Arial" panose="020B0604020202020204" pitchFamily="34" charset="0"/>
+              <a:buChar char="•"/>
+            </a:pPr>
+            <a:r>
+              <a:rPr lang="en-US" dirty="0"/>
+              <a:t>Play around with circuits on breadboard</a:t>
             </a:r>
           </a:p>
         </p:txBody>
@@ -14819,7 +15330,7 @@
 </p:sld>
 </file>
 
-<file path=ppt/slides/slide11.xml><?xml version="1.0" encoding="utf-8"?>
+<file path=ppt/slides/slide13.xml><?xml version="1.0" encoding="utf-8"?>
 <p:sld xmlns:a="http://schemas.openxmlformats.org/drawingml/2006/main" xmlns:r="http://schemas.openxmlformats.org/officeDocument/2006/relationships" xmlns:p="http://schemas.openxmlformats.org/presentationml/2006/main">
   <p:cSld>
     <p:spTree>
@@ -15201,13 +15712,7 @@
   <p:cSld>
     <p:spTree>
       <p:nvGrpSpPr>
-        <p:cNvPr id="1" name="">
-          <a:extLst>
-            <a:ext uri="{FF2B5EF4-FFF2-40B4-BE49-F238E27FC236}">
-              <a16:creationId xmlns:a16="http://schemas.microsoft.com/office/drawing/2014/main" id="{505BF36D-4A0A-35E0-585D-81C728698A0C}"/>
-            </a:ext>
-          </a:extLst>
-        </p:cNvPr>
+        <p:cNvPr id="1" name=""/>
         <p:cNvGrpSpPr/>
         <p:nvPr/>
       </p:nvGrpSpPr>
@@ -15224,15 +15729,15 @@
           <p:cNvPr id="2" name="Text Placeholder 1">
             <a:extLst>
               <a:ext uri="{FF2B5EF4-FFF2-40B4-BE49-F238E27FC236}">
-                <a16:creationId xmlns:a16="http://schemas.microsoft.com/office/drawing/2014/main" id="{EA89B3BC-0C54-E2F6-2DAC-AEC39FB579C4}"/>
-              </a:ext>
-            </a:extLst>
-          </p:cNvPr>
-          <p:cNvSpPr>
-            <a:spLocks noGrp="1"/>
-          </p:cNvSpPr>
-          <p:nvPr>
-            <p:ph type="body" sz="quarter" idx="11"/>
+                <a16:creationId xmlns:a16="http://schemas.microsoft.com/office/drawing/2014/main" id="{834CAAF5-830E-C675-4FCD-BFED86C543AB}"/>
+              </a:ext>
+            </a:extLst>
+          </p:cNvPr>
+          <p:cNvSpPr>
+            <a:spLocks noGrp="1"/>
+          </p:cNvSpPr>
+          <p:nvPr>
+            <p:ph type="body" sz="half" idx="2"/>
           </p:nvPr>
         </p:nvSpPr>
         <p:spPr/>
@@ -15242,25 +15747,25 @@
           <a:p>
             <a:r>
               <a:rPr lang="en-US" dirty="0"/>
-              <a:t>Devices all successfully flashed</a:t>
-            </a:r>
-          </a:p>
-        </p:txBody>
-      </p:sp>
-      <p:sp>
-        <p:nvSpPr>
-          <p:cNvPr id="3" name="Text Placeholder 2">
-            <a:extLst>
-              <a:ext uri="{FF2B5EF4-FFF2-40B4-BE49-F238E27FC236}">
-                <a16:creationId xmlns:a16="http://schemas.microsoft.com/office/drawing/2014/main" id="{2906847D-6C77-2972-16ED-9D5EDF24A589}"/>
-              </a:ext>
-            </a:extLst>
-          </p:cNvPr>
-          <p:cNvSpPr>
-            <a:spLocks noGrp="1"/>
-          </p:cNvSpPr>
-          <p:nvPr>
-            <p:ph type="body" sz="quarter" idx="10"/>
+              <a:t>10 Hz</a:t>
+            </a:r>
+          </a:p>
+        </p:txBody>
+      </p:sp>
+      <p:sp>
+        <p:nvSpPr>
+          <p:cNvPr id="3" name="Title 2">
+            <a:extLst>
+              <a:ext uri="{FF2B5EF4-FFF2-40B4-BE49-F238E27FC236}">
+                <a16:creationId xmlns:a16="http://schemas.microsoft.com/office/drawing/2014/main" id="{3FD2FC61-FEAC-AAEC-7318-98A496541791}"/>
+              </a:ext>
+            </a:extLst>
+          </p:cNvPr>
+          <p:cNvSpPr>
+            <a:spLocks noGrp="1"/>
+          </p:cNvSpPr>
+          <p:nvPr>
+            <p:ph type="title"/>
           </p:nvPr>
         </p:nvSpPr>
         <p:spPr/>
@@ -15268,31 +15773,57 @@
           <a:bodyPr/>
           <a:lstStyle/>
           <a:p>
-            <a:pPr marL="285750" indent="-285750">
-              <a:buFont typeface="Arial" panose="020B0604020202020204" pitchFamily="34" charset="0"/>
-              <a:buChar char="•"/>
-            </a:pPr>
-            <a:r>
-              <a:rPr lang="en-US" dirty="0"/>
-              <a:t>[Image of 5x Differing Sampling Rates] </a:t>
-            </a:r>
-          </a:p>
-        </p:txBody>
-      </p:sp>
-      <p:sp>
-        <p:nvSpPr>
-          <p:cNvPr id="4" name="Title 3">
-            <a:extLst>
-              <a:ext uri="{FF2B5EF4-FFF2-40B4-BE49-F238E27FC236}">
-                <a16:creationId xmlns:a16="http://schemas.microsoft.com/office/drawing/2014/main" id="{8D16378A-3B82-C468-F62D-21497ABF27E4}"/>
-              </a:ext>
-            </a:extLst>
-          </p:cNvPr>
-          <p:cNvSpPr>
-            <a:spLocks noGrp="1"/>
-          </p:cNvSpPr>
-          <p:nvPr>
-            <p:ph type="title"/>
+            <a:r>
+              <a:rPr lang="en-US" dirty="0"/>
+              <a:t>Devices Prepared</a:t>
+            </a:r>
+          </a:p>
+        </p:txBody>
+      </p:sp>
+      <p:pic>
+        <p:nvPicPr>
+          <p:cNvPr id="18" name="Picture Placeholder 17" descr="A screenshot of a computer&#10;&#10;AI-generated content may be incorrect.">
+            <a:extLst>
+              <a:ext uri="{FF2B5EF4-FFF2-40B4-BE49-F238E27FC236}">
+                <a16:creationId xmlns:a16="http://schemas.microsoft.com/office/drawing/2014/main" id="{33186B9F-F7D7-6F67-9C67-1AAF352CD5A6}"/>
+              </a:ext>
+            </a:extLst>
+          </p:cNvPr>
+          <p:cNvPicPr>
+            <a:picLocks noGrp="1" noChangeAspect="1"/>
+          </p:cNvPicPr>
+          <p:nvPr>
+            <p:ph type="pic" idx="14"/>
+          </p:nvPr>
+        </p:nvPicPr>
+        <p:blipFill>
+          <a:blip r:embed="rId2"/>
+          <a:srcRect l="31988" r="20591"/>
+          <a:stretch>
+            <a:fillRect/>
+          </a:stretch>
+        </p:blipFill>
+        <p:spPr>
+          <a:xfrm>
+            <a:off x="574176" y="1430814"/>
+            <a:ext cx="2128476" cy="1750458"/>
+          </a:xfrm>
+        </p:spPr>
+      </p:pic>
+      <p:sp>
+        <p:nvSpPr>
+          <p:cNvPr id="5" name="Picture Placeholder 4">
+            <a:extLst>
+              <a:ext uri="{FF2B5EF4-FFF2-40B4-BE49-F238E27FC236}">
+                <a16:creationId xmlns:a16="http://schemas.microsoft.com/office/drawing/2014/main" id="{238764F3-E455-E1D6-1635-CD517F57D9A0}"/>
+              </a:ext>
+            </a:extLst>
+          </p:cNvPr>
+          <p:cNvSpPr>
+            <a:spLocks noGrp="1"/>
+          </p:cNvSpPr>
+          <p:nvPr>
+            <p:ph type="pic" idx="16"/>
           </p:nvPr>
         </p:nvSpPr>
         <p:spPr/>
@@ -15300,27 +15831,24 @@
           <a:bodyPr/>
           <a:lstStyle/>
           <a:p>
-            <a:r>
-              <a:rPr lang="en-US" dirty="0"/>
-              <a:t>Devices Prepared</a:t>
-            </a:r>
-          </a:p>
-        </p:txBody>
-      </p:sp>
-      <p:sp>
-        <p:nvSpPr>
-          <p:cNvPr id="5" name="Footer Placeholder 4">
-            <a:extLst>
-              <a:ext uri="{FF2B5EF4-FFF2-40B4-BE49-F238E27FC236}">
-                <a16:creationId xmlns:a16="http://schemas.microsoft.com/office/drawing/2014/main" id="{6DF1CFDE-90B7-B6A6-C8CB-3D4D4E5BC6D3}"/>
-              </a:ext>
-            </a:extLst>
-          </p:cNvPr>
-          <p:cNvSpPr>
-            <a:spLocks noGrp="1"/>
-          </p:cNvSpPr>
-          <p:nvPr>
-            <p:ph type="ftr" sz="quarter" idx="12"/>
+            <a:endParaRPr lang="en-US"/>
+          </a:p>
+        </p:txBody>
+      </p:sp>
+      <p:sp>
+        <p:nvSpPr>
+          <p:cNvPr id="6" name="Picture Placeholder 5">
+            <a:extLst>
+              <a:ext uri="{FF2B5EF4-FFF2-40B4-BE49-F238E27FC236}">
+                <a16:creationId xmlns:a16="http://schemas.microsoft.com/office/drawing/2014/main" id="{DB03F6A4-6521-1162-10F9-4E73B6BA3A13}"/>
+              </a:ext>
+            </a:extLst>
+          </p:cNvPr>
+          <p:cNvSpPr>
+            <a:spLocks noGrp="1"/>
+          </p:cNvSpPr>
+          <p:nvPr>
+            <p:ph type="pic" idx="17"/>
           </p:nvPr>
         </p:nvSpPr>
         <p:spPr/>
@@ -15328,6 +15856,193 @@
           <a:bodyPr/>
           <a:lstStyle/>
           <a:p>
+            <a:endParaRPr lang="en-US"/>
+          </a:p>
+        </p:txBody>
+      </p:sp>
+      <p:sp>
+        <p:nvSpPr>
+          <p:cNvPr id="7" name="Text Placeholder 6">
+            <a:extLst>
+              <a:ext uri="{FF2B5EF4-FFF2-40B4-BE49-F238E27FC236}">
+                <a16:creationId xmlns:a16="http://schemas.microsoft.com/office/drawing/2014/main" id="{8043183B-E168-D370-042A-D6102FC5FA31}"/>
+              </a:ext>
+            </a:extLst>
+          </p:cNvPr>
+          <p:cNvSpPr>
+            <a:spLocks noGrp="1"/>
+          </p:cNvSpPr>
+          <p:nvPr>
+            <p:ph type="body" sz="half" idx="18"/>
+          </p:nvPr>
+        </p:nvSpPr>
+        <p:spPr/>
+        <p:txBody>
+          <a:bodyPr/>
+          <a:lstStyle/>
+          <a:p>
+            <a:r>
+              <a:rPr lang="en-US" dirty="0"/>
+              <a:t>25 Hz</a:t>
+            </a:r>
+          </a:p>
+        </p:txBody>
+      </p:sp>
+      <p:sp>
+        <p:nvSpPr>
+          <p:cNvPr id="8" name="Text Placeholder 7">
+            <a:extLst>
+              <a:ext uri="{FF2B5EF4-FFF2-40B4-BE49-F238E27FC236}">
+                <a16:creationId xmlns:a16="http://schemas.microsoft.com/office/drawing/2014/main" id="{4BACD74D-912B-5562-4E52-C8E55EE826AA}"/>
+              </a:ext>
+            </a:extLst>
+          </p:cNvPr>
+          <p:cNvSpPr>
+            <a:spLocks noGrp="1"/>
+          </p:cNvSpPr>
+          <p:nvPr>
+            <p:ph type="body" sz="half" idx="19"/>
+          </p:nvPr>
+        </p:nvSpPr>
+        <p:spPr/>
+        <p:txBody>
+          <a:bodyPr/>
+          <a:lstStyle/>
+          <a:p>
+            <a:r>
+              <a:rPr lang="en-US" dirty="0"/>
+              <a:t>50 Hz</a:t>
+            </a:r>
+          </a:p>
+        </p:txBody>
+      </p:sp>
+      <p:sp>
+        <p:nvSpPr>
+          <p:cNvPr id="9" name="Text Placeholder 8">
+            <a:extLst>
+              <a:ext uri="{FF2B5EF4-FFF2-40B4-BE49-F238E27FC236}">
+                <a16:creationId xmlns:a16="http://schemas.microsoft.com/office/drawing/2014/main" id="{B43E4F4A-22F5-0ED3-735E-858F415180BD}"/>
+              </a:ext>
+            </a:extLst>
+          </p:cNvPr>
+          <p:cNvSpPr>
+            <a:spLocks noGrp="1"/>
+          </p:cNvSpPr>
+          <p:nvPr>
+            <p:ph type="body" sz="half" idx="20"/>
+          </p:nvPr>
+        </p:nvSpPr>
+        <p:spPr/>
+        <p:txBody>
+          <a:bodyPr/>
+          <a:lstStyle/>
+          <a:p>
+            <a:r>
+              <a:rPr lang="en-US" dirty="0"/>
+              <a:t>100 Hz</a:t>
+            </a:r>
+          </a:p>
+        </p:txBody>
+      </p:sp>
+      <p:sp>
+        <p:nvSpPr>
+          <p:cNvPr id="10" name="Picture Placeholder 9">
+            <a:extLst>
+              <a:ext uri="{FF2B5EF4-FFF2-40B4-BE49-F238E27FC236}">
+                <a16:creationId xmlns:a16="http://schemas.microsoft.com/office/drawing/2014/main" id="{DAEA61C1-3FF5-5632-57A5-823C665382AB}"/>
+              </a:ext>
+            </a:extLst>
+          </p:cNvPr>
+          <p:cNvSpPr>
+            <a:spLocks noGrp="1"/>
+          </p:cNvSpPr>
+          <p:nvPr>
+            <p:ph type="pic" idx="21"/>
+          </p:nvPr>
+        </p:nvSpPr>
+        <p:spPr/>
+        <p:txBody>
+          <a:bodyPr/>
+          <a:lstStyle/>
+          <a:p>
+            <a:endParaRPr lang="en-US"/>
+          </a:p>
+        </p:txBody>
+      </p:sp>
+      <p:sp>
+        <p:nvSpPr>
+          <p:cNvPr id="11" name="Picture Placeholder 10">
+            <a:extLst>
+              <a:ext uri="{FF2B5EF4-FFF2-40B4-BE49-F238E27FC236}">
+                <a16:creationId xmlns:a16="http://schemas.microsoft.com/office/drawing/2014/main" id="{AFCC7760-1FA4-01F4-9934-F059C3C5F41E}"/>
+              </a:ext>
+            </a:extLst>
+          </p:cNvPr>
+          <p:cNvSpPr>
+            <a:spLocks noGrp="1"/>
+          </p:cNvSpPr>
+          <p:nvPr>
+            <p:ph type="pic" idx="22"/>
+          </p:nvPr>
+        </p:nvSpPr>
+        <p:spPr/>
+        <p:txBody>
+          <a:bodyPr/>
+          <a:lstStyle/>
+          <a:p>
+            <a:endParaRPr lang="en-US"/>
+          </a:p>
+        </p:txBody>
+      </p:sp>
+      <p:sp>
+        <p:nvSpPr>
+          <p:cNvPr id="13" name="Text Placeholder 12">
+            <a:extLst>
+              <a:ext uri="{FF2B5EF4-FFF2-40B4-BE49-F238E27FC236}">
+                <a16:creationId xmlns:a16="http://schemas.microsoft.com/office/drawing/2014/main" id="{A5B30BF5-7937-8AF8-0413-6ED9FCB52567}"/>
+              </a:ext>
+            </a:extLst>
+          </p:cNvPr>
+          <p:cNvSpPr>
+            <a:spLocks noGrp="1"/>
+          </p:cNvSpPr>
+          <p:nvPr>
+            <p:ph type="body" sz="half" idx="24"/>
+          </p:nvPr>
+        </p:nvSpPr>
+        <p:spPr/>
+        <p:txBody>
+          <a:bodyPr/>
+          <a:lstStyle/>
+          <a:p>
+            <a:r>
+              <a:rPr lang="en-US" dirty="0"/>
+              <a:t>200 Hz</a:t>
+            </a:r>
+          </a:p>
+        </p:txBody>
+      </p:sp>
+      <p:sp>
+        <p:nvSpPr>
+          <p:cNvPr id="15" name="Footer Placeholder 14">
+            <a:extLst>
+              <a:ext uri="{FF2B5EF4-FFF2-40B4-BE49-F238E27FC236}">
+                <a16:creationId xmlns:a16="http://schemas.microsoft.com/office/drawing/2014/main" id="{5CC1F5F6-594B-5E04-FFC4-25B57B2A053A}"/>
+              </a:ext>
+            </a:extLst>
+          </p:cNvPr>
+          <p:cNvSpPr>
+            <a:spLocks noGrp="1"/>
+          </p:cNvSpPr>
+          <p:nvPr>
+            <p:ph type="ftr" sz="quarter" idx="26"/>
+          </p:nvPr>
+        </p:nvSpPr>
+        <p:spPr/>
+        <p:txBody>
+          <a:bodyPr/>
+          <a:lstStyle/>
+          <a:p>
             <a:pPr algn="r"/>
             <a:r>
               <a:rPr lang="en-US" dirty="0"/>
@@ -15336,10 +16051,165 @@
           </a:p>
         </p:txBody>
       </p:sp>
+      <p:sp>
+        <p:nvSpPr>
+          <p:cNvPr id="16" name="Text Placeholder 15">
+            <a:extLst>
+              <a:ext uri="{FF2B5EF4-FFF2-40B4-BE49-F238E27FC236}">
+                <a16:creationId xmlns:a16="http://schemas.microsoft.com/office/drawing/2014/main" id="{432BE946-F9B4-6C14-4BE4-FD0ADEC5C50F}"/>
+              </a:ext>
+            </a:extLst>
+          </p:cNvPr>
+          <p:cNvSpPr>
+            <a:spLocks noGrp="1"/>
+          </p:cNvSpPr>
+          <p:nvPr>
+            <p:ph type="body" sz="quarter" idx="11"/>
+          </p:nvPr>
+        </p:nvSpPr>
+        <p:spPr/>
+        <p:txBody>
+          <a:bodyPr/>
+          <a:lstStyle/>
+          <a:p>
+            <a:r>
+              <a:rPr lang="en-US" dirty="0"/>
+              <a:t>Devices all successfully flashed at varying rates</a:t>
+            </a:r>
+          </a:p>
+          <a:p>
+            <a:endParaRPr lang="en-US" dirty="0"/>
+          </a:p>
+        </p:txBody>
+      </p:sp>
+      <p:pic>
+        <p:nvPicPr>
+          <p:cNvPr id="19" name="Picture Placeholder 17" descr="A screenshot of a computer&#10;&#10;AI-generated content may be incorrect.">
+            <a:extLst>
+              <a:ext uri="{FF2B5EF4-FFF2-40B4-BE49-F238E27FC236}">
+                <a16:creationId xmlns:a16="http://schemas.microsoft.com/office/drawing/2014/main" id="{1D08159F-78CC-3628-AF26-06D1CCA1E423}"/>
+              </a:ext>
+            </a:extLst>
+          </p:cNvPr>
+          <p:cNvPicPr>
+            <a:picLocks noChangeAspect="1"/>
+          </p:cNvPicPr>
+          <p:nvPr/>
+        </p:nvPicPr>
+        <p:blipFill>
+          <a:blip r:embed="rId2"/>
+          <a:srcRect l="31988" r="20591"/>
+          <a:stretch>
+            <a:fillRect/>
+          </a:stretch>
+        </p:blipFill>
+        <p:spPr>
+          <a:xfrm>
+            <a:off x="3507762" y="1399791"/>
+            <a:ext cx="1693825" cy="1750458"/>
+          </a:xfrm>
+          <a:prstGeom prst="rect">
+            <a:avLst/>
+          </a:prstGeom>
+        </p:spPr>
+      </p:pic>
+      <p:pic>
+        <p:nvPicPr>
+          <p:cNvPr id="20" name="Picture Placeholder 17" descr="A screenshot of a computer&#10;&#10;AI-generated content may be incorrect.">
+            <a:extLst>
+              <a:ext uri="{FF2B5EF4-FFF2-40B4-BE49-F238E27FC236}">
+                <a16:creationId xmlns:a16="http://schemas.microsoft.com/office/drawing/2014/main" id="{114C2ED2-24D0-8F5F-9835-11D874CAF82E}"/>
+              </a:ext>
+            </a:extLst>
+          </p:cNvPr>
+          <p:cNvPicPr>
+            <a:picLocks noChangeAspect="1"/>
+          </p:cNvPicPr>
+          <p:nvPr/>
+        </p:nvPicPr>
+        <p:blipFill>
+          <a:blip r:embed="rId2"/>
+          <a:srcRect l="31987" r="8522"/>
+          <a:stretch>
+            <a:fillRect/>
+          </a:stretch>
+        </p:blipFill>
+        <p:spPr>
+          <a:xfrm>
+            <a:off x="6518128" y="1399791"/>
+            <a:ext cx="1886091" cy="1750458"/>
+          </a:xfrm>
+          <a:prstGeom prst="rect">
+            <a:avLst/>
+          </a:prstGeom>
+        </p:spPr>
+      </p:pic>
+      <p:pic>
+        <p:nvPicPr>
+          <p:cNvPr id="21" name="Picture Placeholder 17" descr="A screenshot of a computer&#10;&#10;AI-generated content may be incorrect.">
+            <a:extLst>
+              <a:ext uri="{FF2B5EF4-FFF2-40B4-BE49-F238E27FC236}">
+                <a16:creationId xmlns:a16="http://schemas.microsoft.com/office/drawing/2014/main" id="{A1ECFFDE-6966-E358-7D37-F1D037534828}"/>
+              </a:ext>
+            </a:extLst>
+          </p:cNvPr>
+          <p:cNvPicPr>
+            <a:picLocks noChangeAspect="1"/>
+          </p:cNvPicPr>
+          <p:nvPr/>
+        </p:nvPicPr>
+        <p:blipFill>
+          <a:blip r:embed="rId2"/>
+          <a:srcRect l="31988" r="9656"/>
+          <a:stretch>
+            <a:fillRect/>
+          </a:stretch>
+        </p:blipFill>
+        <p:spPr>
+          <a:xfrm>
+            <a:off x="714240" y="3799583"/>
+            <a:ext cx="1657202" cy="1750458"/>
+          </a:xfrm>
+          <a:prstGeom prst="rect">
+            <a:avLst/>
+          </a:prstGeom>
+        </p:spPr>
+      </p:pic>
+      <p:pic>
+        <p:nvPicPr>
+          <p:cNvPr id="22" name="Picture Placeholder 17" descr="A screenshot of a computer&#10;&#10;AI-generated content may be incorrect.">
+            <a:extLst>
+              <a:ext uri="{FF2B5EF4-FFF2-40B4-BE49-F238E27FC236}">
+                <a16:creationId xmlns:a16="http://schemas.microsoft.com/office/drawing/2014/main" id="{7F80EF34-A0C4-9F94-6E27-B32747092FF1}"/>
+              </a:ext>
+            </a:extLst>
+          </p:cNvPr>
+          <p:cNvPicPr>
+            <a:picLocks noChangeAspect="1"/>
+          </p:cNvPicPr>
+          <p:nvPr/>
+        </p:nvPicPr>
+        <p:blipFill>
+          <a:blip r:embed="rId2"/>
+          <a:srcRect l="31988" r="2112"/>
+          <a:stretch>
+            <a:fillRect/>
+          </a:stretch>
+        </p:blipFill>
+        <p:spPr>
+          <a:xfrm>
+            <a:off x="3743399" y="3799583"/>
+            <a:ext cx="1657202" cy="1750458"/>
+          </a:xfrm>
+          <a:prstGeom prst="rect">
+            <a:avLst/>
+          </a:prstGeom>
+        </p:spPr>
+      </p:pic>
     </p:spTree>
     <p:extLst>
       <p:ext uri="{BB962C8B-B14F-4D97-AF65-F5344CB8AC3E}">
-        <p14:creationId xmlns:p14="http://schemas.microsoft.com/office/powerpoint/2010/main" val="1379009514"/>
+        <p14:creationId xmlns:p14="http://schemas.microsoft.com/office/powerpoint/2010/main" val="2741023145"/>
       </p:ext>
     </p:extLst>
   </p:cSld>
@@ -15350,6 +16220,302 @@
 </file>
 
 <file path=ppt/slides/slide4.xml><?xml version="1.0" encoding="utf-8"?>
+<p:sld xmlns:a="http://schemas.openxmlformats.org/drawingml/2006/main" xmlns:r="http://schemas.openxmlformats.org/officeDocument/2006/relationships" xmlns:p="http://schemas.openxmlformats.org/presentationml/2006/main">
+  <p:cSld>
+    <p:spTree>
+      <p:nvGrpSpPr>
+        <p:cNvPr id="1" name=""/>
+        <p:cNvGrpSpPr/>
+        <p:nvPr/>
+      </p:nvGrpSpPr>
+      <p:grpSpPr>
+        <a:xfrm>
+          <a:off x="0" y="0"/>
+          <a:ext cx="0" cy="0"/>
+          <a:chOff x="0" y="0"/>
+          <a:chExt cx="0" cy="0"/>
+        </a:xfrm>
+      </p:grpSpPr>
+      <p:sp>
+        <p:nvSpPr>
+          <p:cNvPr id="2" name="Text Placeholder 1">
+            <a:extLst>
+              <a:ext uri="{FF2B5EF4-FFF2-40B4-BE49-F238E27FC236}">
+                <a16:creationId xmlns:a16="http://schemas.microsoft.com/office/drawing/2014/main" id="{6ADBB2A3-2FA5-AC2A-9E07-B9D9CB67DABD}"/>
+              </a:ext>
+            </a:extLst>
+          </p:cNvPr>
+          <p:cNvSpPr>
+            <a:spLocks noGrp="1"/>
+          </p:cNvSpPr>
+          <p:nvPr>
+            <p:ph type="body" sz="quarter" idx="11"/>
+          </p:nvPr>
+        </p:nvSpPr>
+        <p:spPr/>
+        <p:txBody>
+          <a:bodyPr/>
+          <a:lstStyle/>
+          <a:p>
+            <a:endParaRPr lang="en-US" dirty="0"/>
+          </a:p>
+        </p:txBody>
+      </p:sp>
+      <p:sp>
+        <p:nvSpPr>
+          <p:cNvPr id="3" name="Text Placeholder 2">
+            <a:extLst>
+              <a:ext uri="{FF2B5EF4-FFF2-40B4-BE49-F238E27FC236}">
+                <a16:creationId xmlns:a16="http://schemas.microsoft.com/office/drawing/2014/main" id="{5535B308-9A64-0BE6-B588-34372EA6AB75}"/>
+              </a:ext>
+            </a:extLst>
+          </p:cNvPr>
+          <p:cNvSpPr>
+            <a:spLocks noGrp="1"/>
+          </p:cNvSpPr>
+          <p:nvPr>
+            <p:ph type="body" sz="quarter" idx="10"/>
+          </p:nvPr>
+        </p:nvSpPr>
+        <p:spPr/>
+        <p:txBody>
+          <a:bodyPr/>
+          <a:lstStyle/>
+          <a:p>
+            <a:endParaRPr lang="en-US" dirty="0"/>
+          </a:p>
+        </p:txBody>
+      </p:sp>
+      <p:sp>
+        <p:nvSpPr>
+          <p:cNvPr id="4" name="Title 3">
+            <a:extLst>
+              <a:ext uri="{FF2B5EF4-FFF2-40B4-BE49-F238E27FC236}">
+                <a16:creationId xmlns:a16="http://schemas.microsoft.com/office/drawing/2014/main" id="{160C5BD8-345E-5369-DDC8-5DC2EAFBC987}"/>
+              </a:ext>
+            </a:extLst>
+          </p:cNvPr>
+          <p:cNvSpPr>
+            <a:spLocks noGrp="1"/>
+          </p:cNvSpPr>
+          <p:nvPr>
+            <p:ph type="title"/>
+          </p:nvPr>
+        </p:nvSpPr>
+        <p:spPr/>
+        <p:txBody>
+          <a:bodyPr/>
+          <a:lstStyle/>
+          <a:p>
+            <a:r>
+              <a:rPr lang="en-US" dirty="0"/>
+              <a:t>Sampling Rate</a:t>
+            </a:r>
+          </a:p>
+        </p:txBody>
+      </p:sp>
+      <p:sp>
+        <p:nvSpPr>
+          <p:cNvPr id="5" name="Footer Placeholder 4">
+            <a:extLst>
+              <a:ext uri="{FF2B5EF4-FFF2-40B4-BE49-F238E27FC236}">
+                <a16:creationId xmlns:a16="http://schemas.microsoft.com/office/drawing/2014/main" id="{3FFA1A16-8EC3-3B2B-14C6-6B8CAF82197C}"/>
+              </a:ext>
+            </a:extLst>
+          </p:cNvPr>
+          <p:cNvSpPr>
+            <a:spLocks noGrp="1"/>
+          </p:cNvSpPr>
+          <p:nvPr>
+            <p:ph type="ftr" sz="quarter" idx="12"/>
+          </p:nvPr>
+        </p:nvSpPr>
+        <p:spPr/>
+        <p:txBody>
+          <a:bodyPr/>
+          <a:lstStyle/>
+          <a:p>
+            <a:pPr algn="r"/>
+            <a:r>
+              <a:rPr lang="en-US"/>
+              <a:t>3/31/23            ‹#›</a:t>
+            </a:r>
+            <a:endParaRPr lang="en-US" dirty="0"/>
+          </a:p>
+        </p:txBody>
+      </p:sp>
+      <p:sp>
+        <p:nvSpPr>
+          <p:cNvPr id="6" name="Rectangle 5">
+            <a:extLst>
+              <a:ext uri="{FF2B5EF4-FFF2-40B4-BE49-F238E27FC236}">
+                <a16:creationId xmlns:a16="http://schemas.microsoft.com/office/drawing/2014/main" id="{C89064C1-FA00-C84E-3F41-0E9FFEF84E66}"/>
+              </a:ext>
+            </a:extLst>
+          </p:cNvPr>
+          <p:cNvSpPr/>
+          <p:nvPr/>
+        </p:nvSpPr>
+        <p:spPr>
+          <a:xfrm>
+            <a:off x="1723869" y="2848131"/>
+            <a:ext cx="2353456" cy="2173574"/>
+          </a:xfrm>
+          <a:prstGeom prst="rect">
+            <a:avLst/>
+          </a:prstGeom>
+        </p:spPr>
+        <p:style>
+          <a:lnRef idx="2">
+            <a:schemeClr val="dk1">
+              <a:shade val="50000"/>
+            </a:schemeClr>
+          </a:lnRef>
+          <a:fillRef idx="1">
+            <a:schemeClr val="dk1"/>
+          </a:fillRef>
+          <a:effectRef idx="0">
+            <a:schemeClr val="dk1"/>
+          </a:effectRef>
+          <a:fontRef idx="minor">
+            <a:schemeClr val="lt1"/>
+          </a:fontRef>
+        </p:style>
+        <p:txBody>
+          <a:bodyPr rtlCol="0" anchor="ctr"/>
+          <a:lstStyle/>
+          <a:p>
+            <a:pPr algn="ctr"/>
+            <a:r>
+              <a:rPr lang="en-US" dirty="0"/>
+              <a:t>Nicla</a:t>
+            </a:r>
+          </a:p>
+          <a:p>
+            <a:pPr algn="ctr"/>
+            <a:r>
+              <a:rPr lang="en-US" dirty="0"/>
+              <a:t>Adjust Sampling Rate</a:t>
+            </a:r>
+          </a:p>
+        </p:txBody>
+      </p:sp>
+      <p:cxnSp>
+        <p:nvCxnSpPr>
+          <p:cNvPr id="8" name="Straight Arrow Connector 7">
+            <a:extLst>
+              <a:ext uri="{FF2B5EF4-FFF2-40B4-BE49-F238E27FC236}">
+                <a16:creationId xmlns:a16="http://schemas.microsoft.com/office/drawing/2014/main" id="{70EF055B-1FD2-B8B7-86F1-793119452A23}"/>
+              </a:ext>
+            </a:extLst>
+          </p:cNvPr>
+          <p:cNvCxnSpPr/>
+          <p:nvPr/>
+        </p:nvCxnSpPr>
+        <p:spPr>
+          <a:xfrm>
+            <a:off x="4077325" y="3927423"/>
+            <a:ext cx="1514006" cy="0"/>
+          </a:xfrm>
+          <a:prstGeom prst="straightConnector1">
+            <a:avLst/>
+          </a:prstGeom>
+          <a:ln>
+            <a:tailEnd type="triangle"/>
+          </a:ln>
+        </p:spPr>
+        <p:style>
+          <a:lnRef idx="1">
+            <a:schemeClr val="accent1"/>
+          </a:lnRef>
+          <a:fillRef idx="0">
+            <a:schemeClr val="accent1"/>
+          </a:fillRef>
+          <a:effectRef idx="0">
+            <a:schemeClr val="accent1"/>
+          </a:effectRef>
+          <a:fontRef idx="minor">
+            <a:schemeClr val="tx1"/>
+          </a:fontRef>
+        </p:style>
+      </p:cxnSp>
+      <p:sp>
+        <p:nvSpPr>
+          <p:cNvPr id="9" name="Rectangle 8">
+            <a:extLst>
+              <a:ext uri="{FF2B5EF4-FFF2-40B4-BE49-F238E27FC236}">
+                <a16:creationId xmlns:a16="http://schemas.microsoft.com/office/drawing/2014/main" id="{8B146468-A543-7B9F-7A2C-697E1F708C08}"/>
+              </a:ext>
+            </a:extLst>
+          </p:cNvPr>
+          <p:cNvSpPr/>
+          <p:nvPr/>
+        </p:nvSpPr>
+        <p:spPr>
+          <a:xfrm>
+            <a:off x="5591331" y="2848131"/>
+            <a:ext cx="2053653" cy="2173574"/>
+          </a:xfrm>
+          <a:prstGeom prst="rect">
+            <a:avLst/>
+          </a:prstGeom>
+        </p:spPr>
+        <p:style>
+          <a:lnRef idx="2">
+            <a:schemeClr val="dk1">
+              <a:shade val="50000"/>
+            </a:schemeClr>
+          </a:lnRef>
+          <a:fillRef idx="1">
+            <a:schemeClr val="dk1"/>
+          </a:fillRef>
+          <a:effectRef idx="0">
+            <a:schemeClr val="dk1"/>
+          </a:effectRef>
+          <a:fontRef idx="minor">
+            <a:schemeClr val="lt1"/>
+          </a:fontRef>
+        </p:style>
+        <p:txBody>
+          <a:bodyPr rtlCol="0" anchor="ctr"/>
+          <a:lstStyle/>
+          <a:p>
+            <a:pPr algn="ctr"/>
+            <a:r>
+              <a:rPr lang="en-US" dirty="0"/>
+              <a:t>Web App</a:t>
+            </a:r>
+          </a:p>
+          <a:p>
+            <a:pPr algn="ctr"/>
+            <a:r>
+              <a:rPr lang="en-US" dirty="0"/>
+              <a:t>Limit </a:t>
+            </a:r>
+          </a:p>
+          <a:p>
+            <a:pPr algn="ctr"/>
+            <a:r>
+              <a:rPr lang="en-US" dirty="0"/>
+              <a:t>(Ensure there is no overlap/repetitive data)</a:t>
+            </a:r>
+          </a:p>
+        </p:txBody>
+      </p:sp>
+    </p:spTree>
+    <p:extLst>
+      <p:ext uri="{BB962C8B-B14F-4D97-AF65-F5344CB8AC3E}">
+        <p14:creationId xmlns:p14="http://schemas.microsoft.com/office/powerpoint/2010/main" val="2328325736"/>
+      </p:ext>
+    </p:extLst>
+  </p:cSld>
+  <p:clrMapOvr>
+    <a:masterClrMapping/>
+  </p:clrMapOvr>
+</p:sld>
+</file>
+
+<file path=ppt/slides/slide5.xml><?xml version="1.0" encoding="utf-8"?>
 <p:sld xmlns:a="http://schemas.openxmlformats.org/drawingml/2006/main" xmlns:r="http://schemas.openxmlformats.org/officeDocument/2006/relationships" xmlns:p="http://schemas.openxmlformats.org/presentationml/2006/main">
   <p:cSld>
     <p:spTree>
@@ -15427,7 +16593,37 @@
             </a:pPr>
             <a:r>
               <a:rPr lang="en-US" dirty="0"/>
-              <a:t>[Sampling Rate Dropdown on Website (with manual mode)]</a:t>
+              <a:t>Sampling Rate can now be adjusted before collecting data</a:t>
+            </a:r>
+          </a:p>
+          <a:p>
+            <a:pPr marL="628650" lvl="1" indent="-285750">
+              <a:buFont typeface="Arial" panose="020B0604020202020204" pitchFamily="34" charset="0"/>
+              <a:buChar char="•"/>
+            </a:pPr>
+            <a:r>
+              <a:rPr lang="en-US" dirty="0"/>
+              <a:t>In addition to changing sampling rate in firmware</a:t>
+            </a:r>
+          </a:p>
+          <a:p>
+            <a:pPr marL="628650" lvl="1" indent="-285750">
+              <a:buFont typeface="Arial" panose="020B0604020202020204" pitchFamily="34" charset="0"/>
+              <a:buChar char="•"/>
+            </a:pPr>
+            <a:r>
+              <a:rPr lang="en-US" dirty="0"/>
+              <a:t>Adds additional layer of verification</a:t>
+            </a:r>
+          </a:p>
+          <a:p>
+            <a:pPr marL="285750" indent="-285750">
+              <a:buFont typeface="Arial" panose="020B0604020202020204" pitchFamily="34" charset="0"/>
+              <a:buChar char="•"/>
+            </a:pPr>
+            <a:r>
+              <a:rPr lang="en-US" dirty="0"/>
+              <a:t>Easy and interactive for Agriculture department to use:</a:t>
             </a:r>
           </a:p>
         </p:txBody>
@@ -15489,6 +16685,66 @@
           </a:p>
         </p:txBody>
       </p:sp>
+      <p:pic>
+        <p:nvPicPr>
+          <p:cNvPr id="6" name="Picture 5">
+            <a:extLst>
+              <a:ext uri="{FF2B5EF4-FFF2-40B4-BE49-F238E27FC236}">
+                <a16:creationId xmlns:a16="http://schemas.microsoft.com/office/drawing/2014/main" id="{97CCEB35-85F5-D396-ABA7-6F1DD6347382}"/>
+              </a:ext>
+            </a:extLst>
+          </p:cNvPr>
+          <p:cNvPicPr>
+            <a:picLocks noChangeAspect="1"/>
+          </p:cNvPicPr>
+          <p:nvPr/>
+        </p:nvPicPr>
+        <p:blipFill>
+          <a:blip r:embed="rId3"/>
+          <a:stretch>
+            <a:fillRect/>
+          </a:stretch>
+        </p:blipFill>
+        <p:spPr>
+          <a:xfrm>
+            <a:off x="4809505" y="3230085"/>
+            <a:ext cx="3897911" cy="2329239"/>
+          </a:xfrm>
+          <a:prstGeom prst="rect">
+            <a:avLst/>
+          </a:prstGeom>
+        </p:spPr>
+      </p:pic>
+      <p:pic>
+        <p:nvPicPr>
+          <p:cNvPr id="8" name="Picture 7" descr="A screenshot of a computer&#10;&#10;AI-generated content may be incorrect.">
+            <a:extLst>
+              <a:ext uri="{FF2B5EF4-FFF2-40B4-BE49-F238E27FC236}">
+                <a16:creationId xmlns:a16="http://schemas.microsoft.com/office/drawing/2014/main" id="{7EBA7915-ABF6-4DF0-9445-37BC4419D391}"/>
+              </a:ext>
+            </a:extLst>
+          </p:cNvPr>
+          <p:cNvPicPr>
+            <a:picLocks noChangeAspect="1"/>
+          </p:cNvPicPr>
+          <p:nvPr/>
+        </p:nvPicPr>
+        <p:blipFill>
+          <a:blip r:embed="rId4"/>
+          <a:stretch>
+            <a:fillRect/>
+          </a:stretch>
+        </p:blipFill>
+        <p:spPr>
+          <a:xfrm>
+            <a:off x="395056" y="3230085"/>
+            <a:ext cx="4181026" cy="2084591"/>
+          </a:xfrm>
+          <a:prstGeom prst="rect">
+            <a:avLst/>
+          </a:prstGeom>
+        </p:spPr>
+      </p:pic>
     </p:spTree>
     <p:extLst>
       <p:ext uri="{BB962C8B-B14F-4D97-AF65-F5344CB8AC3E}">
@@ -15502,7 +16758,7 @@
 </p:sld>
 </file>
 
-<file path=ppt/slides/slide5.xml><?xml version="1.0" encoding="utf-8"?>
+<file path=ppt/slides/slide6.xml><?xml version="1.0" encoding="utf-8"?>
 <p:sld xmlns:a="http://schemas.openxmlformats.org/drawingml/2006/main" xmlns:r="http://schemas.openxmlformats.org/officeDocument/2006/relationships" xmlns:p="http://schemas.openxmlformats.org/presentationml/2006/main">
   <p:cSld>
     <p:spTree>
@@ -15590,7 +16846,7 @@
             </a:pPr>
             <a:r>
               <a:rPr lang="en-US" dirty="0"/>
-              <a:t>No apparent adverse effects as of now</a:t>
+              <a:t>No apparent adverse effects</a:t>
             </a:r>
           </a:p>
           <a:p>
@@ -15600,8 +16856,15 @@
             </a:pPr>
             <a:r>
               <a:rPr lang="en-US" dirty="0"/>
-              <a:t>[Image of longer data spread]</a:t>
-            </a:r>
+              <a:t>Longer image spread:</a:t>
+            </a:r>
+          </a:p>
+          <a:p>
+            <a:pPr marL="285750" indent="-285750">
+              <a:buFont typeface="Arial" panose="020B0604020202020204" pitchFamily="34" charset="0"/>
+              <a:buChar char="•"/>
+            </a:pPr>
+            <a:endParaRPr lang="en-US" dirty="0"/>
           </a:p>
         </p:txBody>
       </p:sp>
@@ -15662,6 +16925,36 @@
           </a:p>
         </p:txBody>
       </p:sp>
+      <p:pic>
+        <p:nvPicPr>
+          <p:cNvPr id="7" name="Picture 6" descr="A screenshot of a computer&#10;&#10;AI-generated content may be incorrect.">
+            <a:extLst>
+              <a:ext uri="{FF2B5EF4-FFF2-40B4-BE49-F238E27FC236}">
+                <a16:creationId xmlns:a16="http://schemas.microsoft.com/office/drawing/2014/main" id="{397BF086-291E-A74E-0680-3E28425824FD}"/>
+              </a:ext>
+            </a:extLst>
+          </p:cNvPr>
+          <p:cNvPicPr>
+            <a:picLocks noChangeAspect="1"/>
+          </p:cNvPicPr>
+          <p:nvPr/>
+        </p:nvPicPr>
+        <p:blipFill>
+          <a:blip r:embed="rId3"/>
+          <a:stretch>
+            <a:fillRect/>
+          </a:stretch>
+        </p:blipFill>
+        <p:spPr>
+          <a:xfrm>
+            <a:off x="1424667" y="2634343"/>
+            <a:ext cx="6286500" cy="3314700"/>
+          </a:xfrm>
+          <a:prstGeom prst="rect">
+            <a:avLst/>
+          </a:prstGeom>
+        </p:spPr>
+      </p:pic>
     </p:spTree>
     <p:extLst>
       <p:ext uri="{BB962C8B-B14F-4D97-AF65-F5344CB8AC3E}">
@@ -15675,7 +16968,7 @@
 </p:sld>
 </file>
 
-<file path=ppt/slides/slide6.xml><?xml version="1.0" encoding="utf-8"?>
+<file path=ppt/slides/slide7.xml><?xml version="1.0" encoding="utf-8"?>
 <p:sld xmlns:a="http://schemas.openxmlformats.org/drawingml/2006/main" xmlns:r="http://schemas.openxmlformats.org/officeDocument/2006/relationships" xmlns:p="http://schemas.openxmlformats.org/presentationml/2006/main">
   <p:cSld>
     <p:spTree>
@@ -15753,7 +17046,17 @@
             </a:pPr>
             <a:r>
               <a:rPr lang="en-US" dirty="0"/>
-              <a:t>[Image of Data from Alarm System]</a:t>
+              <a:t>Slight perturbations from IMU visible from alarm vibrations</a:t>
+            </a:r>
+          </a:p>
+          <a:p>
+            <a:pPr marL="285750" indent="-285750">
+              <a:buFont typeface="Arial" panose="020B0604020202020204" pitchFamily="34" charset="0"/>
+              <a:buChar char="•"/>
+            </a:pPr>
+            <a:r>
+              <a:rPr lang="en-US" dirty="0"/>
+              <a:t>Test run and averaged over all 5 sampling rates</a:t>
             </a:r>
           </a:p>
         </p:txBody>
@@ -15815,6 +17118,36 @@
           </a:p>
         </p:txBody>
       </p:sp>
+      <p:pic>
+        <p:nvPicPr>
+          <p:cNvPr id="7" name="Picture 6" descr="A screenshot of a computer screen&#10;&#10;AI-generated content may be incorrect.">
+            <a:extLst>
+              <a:ext uri="{FF2B5EF4-FFF2-40B4-BE49-F238E27FC236}">
+                <a16:creationId xmlns:a16="http://schemas.microsoft.com/office/drawing/2014/main" id="{F5C73CAA-EF13-7102-6357-545E797A04A5}"/>
+              </a:ext>
+            </a:extLst>
+          </p:cNvPr>
+          <p:cNvPicPr>
+            <a:picLocks noChangeAspect="1"/>
+          </p:cNvPicPr>
+          <p:nvPr/>
+        </p:nvPicPr>
+        <p:blipFill>
+          <a:blip r:embed="rId3"/>
+          <a:stretch>
+            <a:fillRect/>
+          </a:stretch>
+        </p:blipFill>
+        <p:spPr>
+          <a:xfrm>
+            <a:off x="1234149" y="2524116"/>
+            <a:ext cx="6667536" cy="3379593"/>
+          </a:xfrm>
+          <a:prstGeom prst="rect">
+            <a:avLst/>
+          </a:prstGeom>
+        </p:spPr>
+      </p:pic>
     </p:spTree>
     <p:extLst>
       <p:ext uri="{BB962C8B-B14F-4D97-AF65-F5344CB8AC3E}">
@@ -15828,7 +17161,7 @@
 </p:sld>
 </file>
 
-<file path=ppt/slides/slide7.xml><?xml version="1.0" encoding="utf-8"?>
+<file path=ppt/slides/slide8.xml><?xml version="1.0" encoding="utf-8"?>
 <p:sld xmlns:a="http://schemas.openxmlformats.org/drawingml/2006/main" xmlns:r="http://schemas.openxmlformats.org/officeDocument/2006/relationships" xmlns:p="http://schemas.openxmlformats.org/presentationml/2006/main">
   <p:cSld>
     <p:spTree>
@@ -15853,28 +17186,35 @@
       </p:grpSpPr>
       <p:sp>
         <p:nvSpPr>
-          <p:cNvPr id="2" name="Text Placeholder 1">
-            <a:extLst>
-              <a:ext uri="{FF2B5EF4-FFF2-40B4-BE49-F238E27FC236}">
-                <a16:creationId xmlns:a16="http://schemas.microsoft.com/office/drawing/2014/main" id="{6A098540-1E0B-08F3-D5FA-241CC52533EE}"/>
-              </a:ext>
-            </a:extLst>
-          </p:cNvPr>
-          <p:cNvSpPr>
-            <a:spLocks noGrp="1"/>
-          </p:cNvSpPr>
-          <p:nvPr>
-            <p:ph type="body" sz="quarter" idx="11"/>
-          </p:nvPr>
-        </p:nvSpPr>
-        <p:spPr/>
-        <p:txBody>
-          <a:bodyPr/>
+          <p:cNvPr id="4" name="Title 3">
+            <a:extLst>
+              <a:ext uri="{FF2B5EF4-FFF2-40B4-BE49-F238E27FC236}">
+                <a16:creationId xmlns:a16="http://schemas.microsoft.com/office/drawing/2014/main" id="{D766EB78-8B9E-AC18-AE2F-1AD64B611878}"/>
+              </a:ext>
+            </a:extLst>
+          </p:cNvPr>
+          <p:cNvSpPr>
+            <a:spLocks noGrp="1"/>
+          </p:cNvSpPr>
+          <p:nvPr>
+            <p:ph type="title"/>
+          </p:nvPr>
+        </p:nvSpPr>
+        <p:spPr>
+          <a:xfrm>
+            <a:off x="351064" y="385004"/>
+            <a:ext cx="8450036" cy="589032"/>
+          </a:xfrm>
+        </p:spPr>
+        <p:txBody>
+          <a:bodyPr anchor="ctr">
+            <a:normAutofit/>
+          </a:bodyPr>
           <a:lstStyle/>
           <a:p>
             <a:r>
               <a:rPr lang="en-US" dirty="0"/>
-              <a:t>Analysis of data</a:t>
+              <a:t>Sample Data Collected</a:t>
             </a:r>
           </a:p>
         </p:txBody>
@@ -15892,13 +17232,70 @@
             <a:spLocks noGrp="1"/>
           </p:cNvSpPr>
           <p:nvPr>
-            <p:ph type="body" sz="quarter" idx="10"/>
-          </p:nvPr>
-        </p:nvSpPr>
-        <p:spPr/>
-        <p:txBody>
-          <a:bodyPr/>
+            <p:ph idx="12"/>
+          </p:nvPr>
+        </p:nvSpPr>
+        <p:spPr>
+          <a:xfrm>
+            <a:off x="351065" y="1543324"/>
+            <a:ext cx="4059877" cy="4390338"/>
+          </a:xfrm>
+        </p:spPr>
+        <p:txBody>
+          <a:bodyPr>
+            <a:normAutofit/>
+          </a:bodyPr>
           <a:lstStyle/>
+          <a:p>
+            <a:pPr marL="285750" indent="-285750">
+              <a:buFont typeface="Arial" panose="020B0604020202020204" pitchFamily="34" charset="0"/>
+              <a:buChar char="•"/>
+            </a:pPr>
+            <a:r>
+              <a:rPr lang="en-US" dirty="0"/>
+              <a:t>Python script to analyze if the small perturbations are correct</a:t>
+            </a:r>
+          </a:p>
+          <a:p>
+            <a:pPr marL="285750" indent="-285750">
+              <a:buFont typeface="Arial" panose="020B0604020202020204" pitchFamily="34" charset="0"/>
+              <a:buChar char="•"/>
+            </a:pPr>
+            <a:r>
+              <a:rPr lang="en-US" dirty="0"/>
+              <a:t>Seems initial vibration causes a major initial spike</a:t>
+            </a:r>
+          </a:p>
+          <a:p>
+            <a:pPr marL="628650" lvl="1" indent="-285750">
+              <a:buFont typeface="Arial" panose="020B0604020202020204" pitchFamily="34" charset="0"/>
+              <a:buChar char="•"/>
+            </a:pPr>
+            <a:r>
+              <a:rPr lang="en-US" sz="1800" dirty="0"/>
+              <a:t>9.8 -&gt; 10.8 m/s^2</a:t>
+            </a:r>
+          </a:p>
+          <a:p>
+            <a:pPr marL="285750" indent="-285750">
+              <a:buFont typeface="Arial" panose="020B0604020202020204" pitchFamily="34" charset="0"/>
+              <a:buChar char="•"/>
+            </a:pPr>
+            <a:r>
+              <a:rPr lang="en-US" dirty="0"/>
+              <a:t>Conversion rate: 1g ~ 4096 LSB</a:t>
+            </a:r>
+          </a:p>
+          <a:p>
+            <a:pPr marL="628650" lvl="1" indent="-285750">
+              <a:buFont typeface="Arial" panose="020B0604020202020204" pitchFamily="34" charset="0"/>
+              <a:buChar char="•"/>
+            </a:pPr>
+            <a:r>
+              <a:rPr lang="en-US" sz="1800" dirty="0"/>
+              <a:t>Bit notation of the senso gets converted to raw acceleration</a:t>
+            </a:r>
+          </a:p>
           <a:p>
             <a:pPr marL="285750" indent="-285750">
               <a:buFont typeface="Arial" panose="020B0604020202020204" pitchFamily="34" charset="0"/>
@@ -15906,32 +17303,77 @@
             </a:pPr>
             <a:endParaRPr lang="en-US" dirty="0"/>
           </a:p>
-        </p:txBody>
-      </p:sp>
-      <p:sp>
-        <p:nvSpPr>
-          <p:cNvPr id="4" name="Title 3">
-            <a:extLst>
-              <a:ext uri="{FF2B5EF4-FFF2-40B4-BE49-F238E27FC236}">
-                <a16:creationId xmlns:a16="http://schemas.microsoft.com/office/drawing/2014/main" id="{D766EB78-8B9E-AC18-AE2F-1AD64B611878}"/>
-              </a:ext>
-            </a:extLst>
-          </p:cNvPr>
-          <p:cNvSpPr>
-            <a:spLocks noGrp="1"/>
-          </p:cNvSpPr>
-          <p:nvPr>
-            <p:ph type="title"/>
-          </p:nvPr>
-        </p:nvSpPr>
-        <p:spPr/>
-        <p:txBody>
-          <a:bodyPr/>
+          <a:p>
+            <a:pPr marL="628650" lvl="1" indent="-285750">
+              <a:buFont typeface="Arial" panose="020B0604020202020204" pitchFamily="34" charset="0"/>
+              <a:buChar char="•"/>
+            </a:pPr>
+            <a:endParaRPr lang="en-US" sz="1800" dirty="0"/>
+          </a:p>
+        </p:txBody>
+      </p:sp>
+      <p:pic>
+        <p:nvPicPr>
+          <p:cNvPr id="7" name="Picture 6" descr="A graph of a graph of a graph of a graph of a graph of a graph of a graph of a graph of a graph of a graph of a graph of a graph of a graph of&#10;&#10;AI-generated content may be incorrect.">
+            <a:extLst>
+              <a:ext uri="{FF2B5EF4-FFF2-40B4-BE49-F238E27FC236}">
+                <a16:creationId xmlns:a16="http://schemas.microsoft.com/office/drawing/2014/main" id="{7CD6A8C9-6B90-0A60-2649-B6AC603C196B}"/>
+              </a:ext>
+            </a:extLst>
+          </p:cNvPr>
+          <p:cNvPicPr>
+            <a:picLocks noChangeAspect="1"/>
+          </p:cNvPicPr>
+          <p:nvPr/>
+        </p:nvPicPr>
+        <p:blipFill>
+          <a:blip r:embed="rId3"/>
+          <a:stretch>
+            <a:fillRect/>
+          </a:stretch>
+        </p:blipFill>
+        <p:spPr>
+          <a:xfrm>
+            <a:off x="4731868" y="2431252"/>
+            <a:ext cx="4069232" cy="2614481"/>
+          </a:xfrm>
+          <a:prstGeom prst="rect">
+            <a:avLst/>
+          </a:prstGeom>
+          <a:noFill/>
+        </p:spPr>
+      </p:pic>
+      <p:sp>
+        <p:nvSpPr>
+          <p:cNvPr id="2" name="Text Placeholder 1">
+            <a:extLst>
+              <a:ext uri="{FF2B5EF4-FFF2-40B4-BE49-F238E27FC236}">
+                <a16:creationId xmlns:a16="http://schemas.microsoft.com/office/drawing/2014/main" id="{6A098540-1E0B-08F3-D5FA-241CC52533EE}"/>
+              </a:ext>
+            </a:extLst>
+          </p:cNvPr>
+          <p:cNvSpPr>
+            <a:spLocks noGrp="1"/>
+          </p:cNvSpPr>
+          <p:nvPr>
+            <p:ph type="body" sz="quarter" idx="11"/>
+          </p:nvPr>
+        </p:nvSpPr>
+        <p:spPr>
+          <a:xfrm>
+            <a:off x="342900" y="954291"/>
+            <a:ext cx="8458200" cy="365760"/>
+          </a:xfrm>
+        </p:spPr>
+        <p:txBody>
+          <a:bodyPr>
+            <a:normAutofit lnSpcReduction="10000"/>
+          </a:bodyPr>
           <a:lstStyle/>
           <a:p>
             <a:r>
               <a:rPr lang="en-US" dirty="0"/>
-              <a:t>Sample Data Collected</a:t>
+              <a:t>Analysis of data</a:t>
             </a:r>
           </a:p>
         </p:txBody>
@@ -15949,19 +17391,31 @@
             <a:spLocks noGrp="1"/>
           </p:cNvSpPr>
           <p:nvPr>
-            <p:ph type="ftr" sz="quarter" idx="12"/>
-          </p:nvPr>
-        </p:nvSpPr>
-        <p:spPr/>
-        <p:txBody>
-          <a:bodyPr/>
+            <p:ph type="ftr" sz="quarter" idx="14"/>
+          </p:nvPr>
+        </p:nvSpPr>
+        <p:spPr>
+          <a:xfrm>
+            <a:off x="7461174" y="6295058"/>
+            <a:ext cx="1339925" cy="323970"/>
+          </a:xfrm>
+        </p:spPr>
+        <p:txBody>
+          <a:bodyPr anchor="ctr">
+            <a:normAutofit/>
+          </a:bodyPr>
           <a:lstStyle/>
           <a:p>
-            <a:pPr algn="r"/>
+            <a:pPr algn="r">
+              <a:spcAft>
+                <a:spcPts val="600"/>
+              </a:spcAft>
+            </a:pPr>
             <a:r>
               <a:rPr lang="en-US" dirty="0"/>
               <a:t>7/11</a:t>
             </a:r>
+            <a:endParaRPr lang="en-US"/>
           </a:p>
         </p:txBody>
       </p:sp>
@@ -15969,156 +17423,6 @@
     <p:extLst>
       <p:ext uri="{BB962C8B-B14F-4D97-AF65-F5344CB8AC3E}">
         <p14:creationId xmlns:p14="http://schemas.microsoft.com/office/powerpoint/2010/main" val="4143227696"/>
-      </p:ext>
-    </p:extLst>
-  </p:cSld>
-  <p:clrMapOvr>
-    <a:masterClrMapping/>
-  </p:clrMapOvr>
-</p:sld>
-</file>
-
-<file path=ppt/slides/slide8.xml><?xml version="1.0" encoding="utf-8"?>
-<p:sld xmlns:a="http://schemas.openxmlformats.org/drawingml/2006/main" xmlns:r="http://schemas.openxmlformats.org/officeDocument/2006/relationships" xmlns:p="http://schemas.openxmlformats.org/presentationml/2006/main">
-  <p:cSld>
-    <p:spTree>
-      <p:nvGrpSpPr>
-        <p:cNvPr id="1" name="">
-          <a:extLst>
-            <a:ext uri="{FF2B5EF4-FFF2-40B4-BE49-F238E27FC236}">
-              <a16:creationId xmlns:a16="http://schemas.microsoft.com/office/drawing/2014/main" id="{0F9A802B-6069-FC86-8CDE-6BE49EF688AE}"/>
-            </a:ext>
-          </a:extLst>
-        </p:cNvPr>
-        <p:cNvGrpSpPr/>
-        <p:nvPr/>
-      </p:nvGrpSpPr>
-      <p:grpSpPr>
-        <a:xfrm>
-          <a:off x="0" y="0"/>
-          <a:ext cx="0" cy="0"/>
-          <a:chOff x="0" y="0"/>
-          <a:chExt cx="0" cy="0"/>
-        </a:xfrm>
-      </p:grpSpPr>
-      <p:sp>
-        <p:nvSpPr>
-          <p:cNvPr id="2" name="Text Placeholder 1">
-            <a:extLst>
-              <a:ext uri="{FF2B5EF4-FFF2-40B4-BE49-F238E27FC236}">
-                <a16:creationId xmlns:a16="http://schemas.microsoft.com/office/drawing/2014/main" id="{9A255753-C073-0BEF-F44D-2C7D209C06B7}"/>
-              </a:ext>
-            </a:extLst>
-          </p:cNvPr>
-          <p:cNvSpPr>
-            <a:spLocks noGrp="1"/>
-          </p:cNvSpPr>
-          <p:nvPr>
-            <p:ph type="body" sz="quarter" idx="11"/>
-          </p:nvPr>
-        </p:nvSpPr>
-        <p:spPr/>
-        <p:txBody>
-          <a:bodyPr/>
-          <a:lstStyle/>
-          <a:p>
-            <a:r>
-              <a:rPr lang="en-US" dirty="0"/>
-              <a:t>Sensor form 12(s)</a:t>
-            </a:r>
-          </a:p>
-        </p:txBody>
-      </p:sp>
-      <p:sp>
-        <p:nvSpPr>
-          <p:cNvPr id="3" name="Text Placeholder 2">
-            <a:extLst>
-              <a:ext uri="{FF2B5EF4-FFF2-40B4-BE49-F238E27FC236}">
-                <a16:creationId xmlns:a16="http://schemas.microsoft.com/office/drawing/2014/main" id="{D13E376A-9921-8AE3-E671-2A614CCE7863}"/>
-              </a:ext>
-            </a:extLst>
-          </p:cNvPr>
-          <p:cNvSpPr>
-            <a:spLocks noGrp="1"/>
-          </p:cNvSpPr>
-          <p:nvPr>
-            <p:ph type="body" sz="quarter" idx="10"/>
-          </p:nvPr>
-        </p:nvSpPr>
-        <p:spPr/>
-        <p:txBody>
-          <a:bodyPr/>
-          <a:lstStyle/>
-          <a:p>
-            <a:pPr marL="285750" indent="-285750">
-              <a:buFont typeface="Arial" panose="020B0604020202020204" pitchFamily="34" charset="0"/>
-              <a:buChar char="•"/>
-            </a:pPr>
-            <a:endParaRPr lang="en-US" dirty="0"/>
-          </a:p>
-        </p:txBody>
-      </p:sp>
-      <p:sp>
-        <p:nvSpPr>
-          <p:cNvPr id="4" name="Title 3">
-            <a:extLst>
-              <a:ext uri="{FF2B5EF4-FFF2-40B4-BE49-F238E27FC236}">
-                <a16:creationId xmlns:a16="http://schemas.microsoft.com/office/drawing/2014/main" id="{3D014B7D-6644-711A-3443-C61B809B35E2}"/>
-              </a:ext>
-            </a:extLst>
-          </p:cNvPr>
-          <p:cNvSpPr>
-            <a:spLocks noGrp="1"/>
-          </p:cNvSpPr>
-          <p:nvPr>
-            <p:ph type="title"/>
-          </p:nvPr>
-        </p:nvSpPr>
-        <p:spPr/>
-        <p:txBody>
-          <a:bodyPr/>
-          <a:lstStyle/>
-          <a:p>
-            <a:r>
-              <a:rPr lang="en-US" dirty="0"/>
-              <a:t>Purchase Reports</a:t>
-            </a:r>
-          </a:p>
-        </p:txBody>
-      </p:sp>
-      <p:sp>
-        <p:nvSpPr>
-          <p:cNvPr id="5" name="Footer Placeholder 4">
-            <a:extLst>
-              <a:ext uri="{FF2B5EF4-FFF2-40B4-BE49-F238E27FC236}">
-                <a16:creationId xmlns:a16="http://schemas.microsoft.com/office/drawing/2014/main" id="{235C4917-5D37-9A22-B309-4FC307FCFCAC}"/>
-              </a:ext>
-            </a:extLst>
-          </p:cNvPr>
-          <p:cNvSpPr>
-            <a:spLocks noGrp="1"/>
-          </p:cNvSpPr>
-          <p:nvPr>
-            <p:ph type="ftr" sz="quarter" idx="12"/>
-          </p:nvPr>
-        </p:nvSpPr>
-        <p:spPr/>
-        <p:txBody>
-          <a:bodyPr/>
-          <a:lstStyle/>
-          <a:p>
-            <a:pPr algn="r"/>
-            <a:r>
-              <a:rPr lang="en-US" dirty="0"/>
-              <a:t>8/11</a:t>
-            </a:r>
-          </a:p>
-        </p:txBody>
-      </p:sp>
-    </p:spTree>
-    <p:extLst>
-      <p:ext uri="{BB962C8B-B14F-4D97-AF65-F5344CB8AC3E}">
-        <p14:creationId xmlns:p14="http://schemas.microsoft.com/office/powerpoint/2010/main" val="1932811717"/>
       </p:ext>
     </p:extLst>
   </p:cSld>
@@ -16136,7 +17440,7 @@
         <p:cNvPr id="1" name="">
           <a:extLst>
             <a:ext uri="{FF2B5EF4-FFF2-40B4-BE49-F238E27FC236}">
-              <a16:creationId xmlns:a16="http://schemas.microsoft.com/office/drawing/2014/main" id="{04776F36-879E-6BF4-4677-6E9C9FBCA377}"/>
+              <a16:creationId xmlns:a16="http://schemas.microsoft.com/office/drawing/2014/main" id="{9B099474-FBA8-B52C-AD4C-CE6D43909128}"/>
             </a:ext>
           </a:extLst>
         </p:cNvPr>
@@ -16151,12 +17455,77 @@
           <a:chExt cx="0" cy="0"/>
         </a:xfrm>
       </p:grpSpPr>
+      <p:pic>
+        <p:nvPicPr>
+          <p:cNvPr id="10" name="Content Placeholder 9" descr="A screen shot of a computer code&#10;&#10;AI-generated content may be incorrect.">
+            <a:extLst>
+              <a:ext uri="{FF2B5EF4-FFF2-40B4-BE49-F238E27FC236}">
+                <a16:creationId xmlns:a16="http://schemas.microsoft.com/office/drawing/2014/main" id="{894B532E-CDF2-1BCD-651A-9E8532627A08}"/>
+              </a:ext>
+            </a:extLst>
+          </p:cNvPr>
+          <p:cNvPicPr>
+            <a:picLocks noGrp="1" noChangeAspect="1"/>
+          </p:cNvPicPr>
+          <p:nvPr>
+            <p:ph idx="14"/>
+          </p:nvPr>
+        </p:nvPicPr>
+        <p:blipFill>
+          <a:blip r:embed="rId3"/>
+          <a:stretch>
+            <a:fillRect/>
+          </a:stretch>
+        </p:blipFill>
+        <p:spPr>
+          <a:xfrm>
+            <a:off x="1947937" y="1543324"/>
+            <a:ext cx="5256290" cy="4454706"/>
+          </a:xfrm>
+          <a:noFill/>
+        </p:spPr>
+      </p:pic>
+      <p:sp>
+        <p:nvSpPr>
+          <p:cNvPr id="4" name="Title 3">
+            <a:extLst>
+              <a:ext uri="{FF2B5EF4-FFF2-40B4-BE49-F238E27FC236}">
+                <a16:creationId xmlns:a16="http://schemas.microsoft.com/office/drawing/2014/main" id="{7C72A887-8E8C-CBD8-727E-A873BA660528}"/>
+              </a:ext>
+            </a:extLst>
+          </p:cNvPr>
+          <p:cNvSpPr>
+            <a:spLocks noGrp="1"/>
+          </p:cNvSpPr>
+          <p:nvPr>
+            <p:ph type="title"/>
+          </p:nvPr>
+        </p:nvSpPr>
+        <p:spPr>
+          <a:xfrm>
+            <a:off x="351064" y="385004"/>
+            <a:ext cx="8450036" cy="589032"/>
+          </a:xfrm>
+        </p:spPr>
+        <p:txBody>
+          <a:bodyPr anchor="ctr">
+            <a:normAutofit/>
+          </a:bodyPr>
+          <a:lstStyle/>
+          <a:p>
+            <a:r>
+              <a:rPr lang="en-US" dirty="0"/>
+              <a:t>Sample Data Collected</a:t>
+            </a:r>
+          </a:p>
+        </p:txBody>
+      </p:sp>
       <p:sp>
         <p:nvSpPr>
           <p:cNvPr id="2" name="Text Placeholder 1">
             <a:extLst>
               <a:ext uri="{FF2B5EF4-FFF2-40B4-BE49-F238E27FC236}">
-                <a16:creationId xmlns:a16="http://schemas.microsoft.com/office/drawing/2014/main" id="{D06FE3C5-89AD-E3D0-CD5E-FD7333DD4FB2}"/>
+                <a16:creationId xmlns:a16="http://schemas.microsoft.com/office/drawing/2014/main" id="{E523DF63-1486-52C0-8409-11171CB049F6}"/>
               </a:ext>
             </a:extLst>
           </p:cNvPr>
@@ -16167,112 +17536,70 @@
             <p:ph type="body" sz="quarter" idx="11"/>
           </p:nvPr>
         </p:nvSpPr>
-        <p:spPr/>
-        <p:txBody>
-          <a:bodyPr/>
+        <p:spPr>
+          <a:xfrm>
+            <a:off x="342900" y="954291"/>
+            <a:ext cx="8458200" cy="365760"/>
+          </a:xfrm>
+        </p:spPr>
+        <p:txBody>
+          <a:bodyPr>
+            <a:normAutofit lnSpcReduction="10000"/>
+          </a:bodyPr>
           <a:lstStyle/>
           <a:p>
             <a:r>
-              <a:rPr lang="en-US" dirty="0" err="1"/>
-              <a:t>DigiKey</a:t>
-            </a:r>
-            <a:r>
-              <a:rPr lang="en-US" dirty="0"/>
-              <a:t>/Mouser/Vendor purchase orders</a:t>
-            </a:r>
-          </a:p>
-        </p:txBody>
-      </p:sp>
-      <p:sp>
-        <p:nvSpPr>
-          <p:cNvPr id="3" name="Text Placeholder 2">
-            <a:extLst>
-              <a:ext uri="{FF2B5EF4-FFF2-40B4-BE49-F238E27FC236}">
-                <a16:creationId xmlns:a16="http://schemas.microsoft.com/office/drawing/2014/main" id="{711699F4-B212-0FDC-0F24-02EDFC33389C}"/>
-              </a:ext>
-            </a:extLst>
-          </p:cNvPr>
-          <p:cNvSpPr>
-            <a:spLocks noGrp="1"/>
-          </p:cNvSpPr>
-          <p:nvPr>
-            <p:ph type="body" sz="quarter" idx="10"/>
-          </p:nvPr>
-        </p:nvSpPr>
-        <p:spPr/>
-        <p:txBody>
-          <a:bodyPr/>
+              <a:rPr lang="en-US" dirty="0"/>
+              <a:t>Program used for data capture</a:t>
+            </a:r>
+          </a:p>
+        </p:txBody>
+      </p:sp>
+      <p:sp>
+        <p:nvSpPr>
+          <p:cNvPr id="5" name="Footer Placeholder 4">
+            <a:extLst>
+              <a:ext uri="{FF2B5EF4-FFF2-40B4-BE49-F238E27FC236}">
+                <a16:creationId xmlns:a16="http://schemas.microsoft.com/office/drawing/2014/main" id="{485C930C-352E-4188-B6B1-D68285583202}"/>
+              </a:ext>
+            </a:extLst>
+          </p:cNvPr>
+          <p:cNvSpPr>
+            <a:spLocks noGrp="1"/>
+          </p:cNvSpPr>
+          <p:nvPr>
+            <p:ph type="ftr" sz="quarter" idx="15"/>
+          </p:nvPr>
+        </p:nvSpPr>
+        <p:spPr>
+          <a:xfrm>
+            <a:off x="7461174" y="6295058"/>
+            <a:ext cx="1339925" cy="323970"/>
+          </a:xfrm>
+        </p:spPr>
+        <p:txBody>
+          <a:bodyPr anchor="ctr">
+            <a:normAutofit/>
+          </a:bodyPr>
           <a:lstStyle/>
           <a:p>
-            <a:pPr marL="285750" indent="-285750">
-              <a:buFont typeface="Arial" panose="020B0604020202020204" pitchFamily="34" charset="0"/>
-              <a:buChar char="•"/>
+            <a:pPr algn="r">
+              <a:spcAft>
+                <a:spcPts val="600"/>
+              </a:spcAft>
             </a:pPr>
-            <a:endParaRPr lang="en-US" dirty="0"/>
-          </a:p>
-        </p:txBody>
-      </p:sp>
-      <p:sp>
-        <p:nvSpPr>
-          <p:cNvPr id="4" name="Title 3">
-            <a:extLst>
-              <a:ext uri="{FF2B5EF4-FFF2-40B4-BE49-F238E27FC236}">
-                <a16:creationId xmlns:a16="http://schemas.microsoft.com/office/drawing/2014/main" id="{4BE6A22C-BF1C-6392-CDC8-D15D5D07648E}"/>
-              </a:ext>
-            </a:extLst>
-          </p:cNvPr>
-          <p:cNvSpPr>
-            <a:spLocks noGrp="1"/>
-          </p:cNvSpPr>
-          <p:nvPr>
-            <p:ph type="title"/>
-          </p:nvPr>
-        </p:nvSpPr>
-        <p:spPr/>
-        <p:txBody>
-          <a:bodyPr/>
-          <a:lstStyle/>
-          <a:p>
-            <a:r>
-              <a:rPr lang="en-US" dirty="0"/>
-              <a:t>Purchase Reports</a:t>
-            </a:r>
-          </a:p>
-        </p:txBody>
-      </p:sp>
-      <p:sp>
-        <p:nvSpPr>
-          <p:cNvPr id="5" name="Footer Placeholder 4">
-            <a:extLst>
-              <a:ext uri="{FF2B5EF4-FFF2-40B4-BE49-F238E27FC236}">
-                <a16:creationId xmlns:a16="http://schemas.microsoft.com/office/drawing/2014/main" id="{E21E4B51-8C00-7CF9-B170-99CA359E2846}"/>
-              </a:ext>
-            </a:extLst>
-          </p:cNvPr>
-          <p:cNvSpPr>
-            <a:spLocks noGrp="1"/>
-          </p:cNvSpPr>
-          <p:nvPr>
-            <p:ph type="ftr" sz="quarter" idx="12"/>
-          </p:nvPr>
-        </p:nvSpPr>
-        <p:spPr/>
-        <p:txBody>
-          <a:bodyPr/>
-          <a:lstStyle/>
-          <a:p>
-            <a:pPr algn="r"/>
-            <a:r>
-              <a:rPr lang="en-US" dirty="0"/>
-              <a:t>9/11</a:t>
-            </a:r>
+            <a:r>
+              <a:rPr lang="en-US" dirty="0"/>
+              <a:t>7/11</a:t>
+            </a:r>
+            <a:endParaRPr lang="en-US"/>
           </a:p>
         </p:txBody>
       </p:sp>
     </p:spTree>
     <p:extLst>
       <p:ext uri="{BB962C8B-B14F-4D97-AF65-F5344CB8AC3E}">
-        <p14:creationId xmlns:p14="http://schemas.microsoft.com/office/powerpoint/2010/main" val="1106423586"/>
+        <p14:creationId xmlns:p14="http://schemas.microsoft.com/office/powerpoint/2010/main" val="1795818811"/>
       </p:ext>
     </p:extLst>
   </p:cSld>
@@ -16865,6 +18192,49 @@
 </file>
 
 <file path=customXml/item1.xml><?xml version="1.0" encoding="utf-8"?>
+<p:properties xmlns:p="http://schemas.microsoft.com/office/2006/metadata/properties" xmlns:xsi="http://www.w3.org/2001/XMLSchema-instance" xmlns:pc="http://schemas.microsoft.com/office/infopath/2007/PartnerControls">
+  <documentManagement>
+    <SharedWithUsers xmlns="d6656b4d-3fa0-4709-acfb-d5e813445d1e">
+      <UserInfo>
+        <DisplayName>Schott, Thomas H.</DisplayName>
+        <AccountId>17</AccountId>
+        <AccountType/>
+      </UserInfo>
+      <UserInfo>
+        <DisplayName>Sarault, Olivia M</DisplayName>
+        <AccountId>29</AccountId>
+        <AccountType/>
+      </UserInfo>
+      <UserInfo>
+        <DisplayName>Hiller, Kelly R</DisplayName>
+        <AccountId>98</AccountId>
+        <AccountType/>
+      </UserInfo>
+      <UserInfo>
+        <DisplayName>Eddy, Abigail Ellen</DisplayName>
+        <AccountId>46</AccountId>
+        <AccountType/>
+      </UserInfo>
+      <UserInfo>
+        <DisplayName>Gu, Yu Rain</DisplayName>
+        <AccountId>77</AccountId>
+        <AccountType/>
+      </UserInfo>
+      <UserInfo>
+        <DisplayName>Reese, Kristy S</DisplayName>
+        <AccountId>26</AccountId>
+        <AccountType/>
+      </UserInfo>
+    </SharedWithUsers>
+    <lcf76f155ced4ddcb4097134ff3c332f xmlns="37af3f4b-4b66-46f9-8456-831d9bc3e737">
+      <Terms xmlns="http://schemas.microsoft.com/office/infopath/2007/PartnerControls"/>
+    </lcf76f155ced4ddcb4097134ff3c332f>
+    <TaxCatchAll xmlns="d6656b4d-3fa0-4709-acfb-d5e813445d1e" xsi:nil="true"/>
+  </documentManagement>
+</p:properties>
+</file>
+
+<file path=customXml/item2.xml><?xml version="1.0" encoding="utf-8"?>
 <ct:contentTypeSchema xmlns:ct="http://schemas.microsoft.com/office/2006/metadata/contentType" xmlns:ma="http://schemas.microsoft.com/office/2006/metadata/properties/metaAttributes" ct:_="" ma:_="" ma:contentTypeName="Document" ma:contentTypeID="0x01010054E202481DC1CB46AA011D949D311478" ma:contentTypeVersion="13" ma:contentTypeDescription="Create a new document." ma:contentTypeScope="" ma:versionID="309c718596e4092f54ce9aa93358bb8d">
   <xsd:schema xmlns:xsd="http://www.w3.org/2001/XMLSchema" xmlns:xs="http://www.w3.org/2001/XMLSchema" xmlns:p="http://schemas.microsoft.com/office/2006/metadata/properties" xmlns:ns2="37af3f4b-4b66-46f9-8456-831d9bc3e737" xmlns:ns3="d6656b4d-3fa0-4709-acfb-d5e813445d1e" targetNamespace="http://schemas.microsoft.com/office/2006/metadata/properties" ma:root="true" ma:fieldsID="0c34f3e70276db9d2471c2526b8de3df" ns2:_="" ns3:_="">
     <xsd:import namespace="37af3f4b-4b66-46f9-8456-831d9bc3e737"/>
@@ -17087,49 +18457,6 @@
 </ct:contentTypeSchema>
 </file>
 
-<file path=customXml/item2.xml><?xml version="1.0" encoding="utf-8"?>
-<p:properties xmlns:p="http://schemas.microsoft.com/office/2006/metadata/properties" xmlns:xsi="http://www.w3.org/2001/XMLSchema-instance" xmlns:pc="http://schemas.microsoft.com/office/infopath/2007/PartnerControls">
-  <documentManagement>
-    <SharedWithUsers xmlns="d6656b4d-3fa0-4709-acfb-d5e813445d1e">
-      <UserInfo>
-        <DisplayName>Schott, Thomas H.</DisplayName>
-        <AccountId>17</AccountId>
-        <AccountType/>
-      </UserInfo>
-      <UserInfo>
-        <DisplayName>Sarault, Olivia M</DisplayName>
-        <AccountId>29</AccountId>
-        <AccountType/>
-      </UserInfo>
-      <UserInfo>
-        <DisplayName>Hiller, Kelly R</DisplayName>
-        <AccountId>98</AccountId>
-        <AccountType/>
-      </UserInfo>
-      <UserInfo>
-        <DisplayName>Eddy, Abigail Ellen</DisplayName>
-        <AccountId>46</AccountId>
-        <AccountType/>
-      </UserInfo>
-      <UserInfo>
-        <DisplayName>Gu, Yu Rain</DisplayName>
-        <AccountId>77</AccountId>
-        <AccountType/>
-      </UserInfo>
-      <UserInfo>
-        <DisplayName>Reese, Kristy S</DisplayName>
-        <AccountId>26</AccountId>
-        <AccountType/>
-      </UserInfo>
-    </SharedWithUsers>
-    <lcf76f155ced4ddcb4097134ff3c332f xmlns="37af3f4b-4b66-46f9-8456-831d9bc3e737">
-      <Terms xmlns="http://schemas.microsoft.com/office/infopath/2007/PartnerControls"/>
-    </lcf76f155ced4ddcb4097134ff3c332f>
-    <TaxCatchAll xmlns="d6656b4d-3fa0-4709-acfb-d5e813445d1e" xsi:nil="true"/>
-  </documentManagement>
-</p:properties>
-</file>
-
 <file path=customXml/item3.xml><?xml version="1.0" encoding="utf-8"?>
 <?mso-contentType ?>
 <FormTemplates xmlns="http://schemas.microsoft.com/sharepoint/v3/contenttype/forms">
@@ -17140,6 +18467,23 @@
 </file>
 
 <file path=customXml/itemProps1.xml><?xml version="1.0" encoding="utf-8"?>
+<ds:datastoreItem xmlns:ds="http://schemas.openxmlformats.org/officeDocument/2006/customXml" ds:itemID="{21DE0D6C-581B-4814-98E7-EF172D5D46A1}">
+  <ds:schemaRefs>
+    <ds:schemaRef ds:uri="http://purl.org/dc/elements/1.1/"/>
+    <ds:schemaRef ds:uri="http://schemas.microsoft.com/office/2006/documentManagement/types"/>
+    <ds:schemaRef ds:uri="d6656b4d-3fa0-4709-acfb-d5e813445d1e"/>
+    <ds:schemaRef ds:uri="http://purl.org/dc/terms/"/>
+    <ds:schemaRef ds:uri="http://schemas.microsoft.com/office/infopath/2007/PartnerControls"/>
+    <ds:schemaRef ds:uri="37af3f4b-4b66-46f9-8456-831d9bc3e737"/>
+    <ds:schemaRef ds:uri="http://schemas.openxmlformats.org/package/2006/metadata/core-properties"/>
+    <ds:schemaRef ds:uri="http://schemas.microsoft.com/office/2006/metadata/properties"/>
+    <ds:schemaRef ds:uri="http://www.w3.org/XML/1998/namespace"/>
+    <ds:schemaRef ds:uri="http://purl.org/dc/dcmitype/"/>
+  </ds:schemaRefs>
+</ds:datastoreItem>
+</file>
+
+<file path=customXml/itemProps2.xml><?xml version="1.0" encoding="utf-8"?>
 <ds:datastoreItem xmlns:ds="http://schemas.openxmlformats.org/officeDocument/2006/customXml" ds:itemID="{64D795B0-FAA0-424A-9B96-7691ED1EF26B}">
   <ds:schemaRefs>
     <ds:schemaRef ds:uri="http://schemas.microsoft.com/office/2006/metadata/contentType"/>
@@ -17158,23 +18502,6 @@
 </ds:datastoreItem>
 </file>
 
-<file path=customXml/itemProps2.xml><?xml version="1.0" encoding="utf-8"?>
-<ds:datastoreItem xmlns:ds="http://schemas.openxmlformats.org/officeDocument/2006/customXml" ds:itemID="{21DE0D6C-581B-4814-98E7-EF172D5D46A1}">
-  <ds:schemaRefs>
-    <ds:schemaRef ds:uri="http://purl.org/dc/elements/1.1/"/>
-    <ds:schemaRef ds:uri="http://schemas.microsoft.com/office/2006/documentManagement/types"/>
-    <ds:schemaRef ds:uri="d6656b4d-3fa0-4709-acfb-d5e813445d1e"/>
-    <ds:schemaRef ds:uri="http://purl.org/dc/terms/"/>
-    <ds:schemaRef ds:uri="http://schemas.microsoft.com/office/infopath/2007/PartnerControls"/>
-    <ds:schemaRef ds:uri="37af3f4b-4b66-46f9-8456-831d9bc3e737"/>
-    <ds:schemaRef ds:uri="http://schemas.openxmlformats.org/package/2006/metadata/core-properties"/>
-    <ds:schemaRef ds:uri="http://schemas.microsoft.com/office/2006/metadata/properties"/>
-    <ds:schemaRef ds:uri="http://www.w3.org/XML/1998/namespace"/>
-    <ds:schemaRef ds:uri="http://purl.org/dc/dcmitype/"/>
-  </ds:schemaRefs>
-</ds:datastoreItem>
-</file>
-
 <file path=customXml/itemProps3.xml><?xml version="1.0" encoding="utf-8"?>
 <ds:datastoreItem xmlns:ds="http://schemas.openxmlformats.org/officeDocument/2006/customXml" ds:itemID="{F5B64EEB-1B4A-4920-AA44-E234D7D487D1}">
   <ds:schemaRefs>

--- a/Documentation/Slides/Week_20.pptx
+++ b/Documentation/Slides/Week_20.pptx
@@ -5,51 +5,50 @@
     <p:sldMasterId id="2147483648" r:id="rId4"/>
   </p:sldMasterIdLst>
   <p:notesMasterIdLst>
-    <p:notesMasterId r:id="rId18"/>
+    <p:notesMasterId r:id="rId17"/>
   </p:notesMasterIdLst>
   <p:sldIdLst>
     <p:sldId id="267" r:id="rId5"/>
     <p:sldId id="279" r:id="rId6"/>
     <p:sldId id="306" r:id="rId7"/>
-    <p:sldId id="309" r:id="rId8"/>
-    <p:sldId id="300" r:id="rId9"/>
-    <p:sldId id="301" r:id="rId10"/>
-    <p:sldId id="302" r:id="rId11"/>
-    <p:sldId id="303" r:id="rId12"/>
-    <p:sldId id="307" r:id="rId13"/>
-    <p:sldId id="304" r:id="rId14"/>
-    <p:sldId id="305" r:id="rId15"/>
-    <p:sldId id="299" r:id="rId16"/>
-    <p:sldId id="277" r:id="rId17"/>
+    <p:sldId id="300" r:id="rId8"/>
+    <p:sldId id="301" r:id="rId9"/>
+    <p:sldId id="302" r:id="rId10"/>
+    <p:sldId id="303" r:id="rId11"/>
+    <p:sldId id="307" r:id="rId12"/>
+    <p:sldId id="304" r:id="rId13"/>
+    <p:sldId id="305" r:id="rId14"/>
+    <p:sldId id="299" r:id="rId15"/>
+    <p:sldId id="277" r:id="rId16"/>
   </p:sldIdLst>
   <p:sldSz cx="9144000" cy="6858000" type="screen4x3"/>
   <p:notesSz cx="6858000" cy="9144000"/>
   <p:embeddedFontLst>
     <p:embeddedFont>
-      <p:font typeface="Acumin Pro Condensed Semibold" panose="020B0706020202020204"/>
-      <p:regular r:id="rId19"/>
-      <p:bold r:id="rId20"/>
-      <p:italic r:id="rId21"/>
-      <p:boldItalic r:id="rId22"/>
+      <p:font typeface="Acumin Pro Condensed Semibold" panose="020B0706020202020204" pitchFamily="34" charset="77"/>
+      <p:regular r:id="rId18"/>
+      <p:bold r:id="rId19"/>
+      <p:italic r:id="rId20"/>
+      <p:boldItalic r:id="rId21"/>
     </p:embeddedFont>
     <p:embeddedFont>
       <p:font typeface="Acumin Pro Medium" panose="020B0604020202020204" pitchFamily="34" charset="77"/>
-      <p:regular r:id="rId23"/>
-      <p:italic r:id="rId24"/>
+      <p:regular r:id="rId22"/>
+      <p:italic r:id="rId23"/>
     </p:embeddedFont>
     <p:embeddedFont>
       <p:font typeface="Franklin Gothic Book" panose="020B0503020102020204" pitchFamily="34" charset="0"/>
-      <p:regular r:id="rId25"/>
-      <p:italic r:id="rId26"/>
+      <p:regular r:id="rId24"/>
+      <p:italic r:id="rId25"/>
     </p:embeddedFont>
     <p:embeddedFont>
       <p:font typeface="Franklin Gothic Medium" panose="020B0603020102020204" pitchFamily="34" charset="0"/>
-      <p:regular r:id="rId27"/>
-      <p:italic r:id="rId28"/>
+      <p:regular r:id="rId26"/>
+      <p:italic r:id="rId27"/>
     </p:embeddedFont>
     <p:embeddedFont>
       <p:font typeface="Franklin Gothic Medium Cond" panose="020B0606030402020204" pitchFamily="34" charset="0"/>
-      <p:regular r:id="rId29"/>
+      <p:regular r:id="rId28"/>
     </p:embeddedFont>
   </p:embeddedFontLst>
   <p:defaultTextStyle>
@@ -254,7 +253,7 @@
           <a:p>
             <a:fld id="{01926CF7-48D8-2F46-AFC8-8A5D2298DFDD}" type="datetimeFigureOut">
               <a:rPr lang="en-US" smtClean="0"/>
-              <a:t>2/2/26</a:t>
+              <a:t>2/6/26</a:t>
             </a:fld>
             <a:endParaRPr lang="en-US"/>
           </a:p>
@@ -718,7 +717,7 @@
           <a:p>
             <a:fld id="{237BF745-0557-B241-863F-056113C7032A}" type="slidenum">
               <a:rPr lang="en-US" smtClean="0"/>
-              <a:t>12</a:t>
+              <a:t>11</a:t>
             </a:fld>
             <a:endParaRPr lang="en-US"/>
           </a:p>
@@ -929,7 +928,7 @@
           <a:p>
             <a:fld id="{237BF745-0557-B241-863F-056113C7032A}" type="slidenum">
               <a:rPr lang="en-US" smtClean="0"/>
-              <a:t>5</a:t>
+              <a:t>4</a:t>
             </a:fld>
             <a:endParaRPr lang="en-US"/>
           </a:p>
@@ -1056,7 +1055,7 @@
           <a:p>
             <a:fld id="{237BF745-0557-B241-863F-056113C7032A}" type="slidenum">
               <a:rPr lang="en-US" smtClean="0"/>
-              <a:t>6</a:t>
+              <a:t>5</a:t>
             </a:fld>
             <a:endParaRPr lang="en-US"/>
           </a:p>
@@ -1183,7 +1182,7 @@
           <a:p>
             <a:fld id="{237BF745-0557-B241-863F-056113C7032A}" type="slidenum">
               <a:rPr lang="en-US" smtClean="0"/>
-              <a:t>7</a:t>
+              <a:t>6</a:t>
             </a:fld>
             <a:endParaRPr lang="en-US"/>
           </a:p>
@@ -1310,7 +1309,7 @@
           <a:p>
             <a:fld id="{237BF745-0557-B241-863F-056113C7032A}" type="slidenum">
               <a:rPr lang="en-US" smtClean="0"/>
-              <a:t>8</a:t>
+              <a:t>7</a:t>
             </a:fld>
             <a:endParaRPr lang="en-US"/>
           </a:p>
@@ -1437,7 +1436,7 @@
           <a:p>
             <a:fld id="{237BF745-0557-B241-863F-056113C7032A}" type="slidenum">
               <a:rPr lang="en-US" smtClean="0"/>
-              <a:t>9</a:t>
+              <a:t>8</a:t>
             </a:fld>
             <a:endParaRPr lang="en-US"/>
           </a:p>
@@ -1564,7 +1563,7 @@
           <a:p>
             <a:fld id="{237BF745-0557-B241-863F-056113C7032A}" type="slidenum">
               <a:rPr lang="en-US" smtClean="0"/>
-              <a:t>10</a:t>
+              <a:t>9</a:t>
             </a:fld>
             <a:endParaRPr lang="en-US"/>
           </a:p>
@@ -1691,7 +1690,7 @@
           <a:p>
             <a:fld id="{237BF745-0557-B241-863F-056113C7032A}" type="slidenum">
               <a:rPr lang="en-US" smtClean="0"/>
-              <a:t>11</a:t>
+              <a:t>10</a:t>
             </a:fld>
             <a:endParaRPr lang="en-US"/>
           </a:p>
@@ -14700,283 +14699,6 @@
         <p:cNvPr id="1" name="">
           <a:extLst>
             <a:ext uri="{FF2B5EF4-FFF2-40B4-BE49-F238E27FC236}">
-              <a16:creationId xmlns:a16="http://schemas.microsoft.com/office/drawing/2014/main" id="{0F9A802B-6069-FC86-8CDE-6BE49EF688AE}"/>
-            </a:ext>
-          </a:extLst>
-        </p:cNvPr>
-        <p:cNvGrpSpPr/>
-        <p:nvPr/>
-      </p:nvGrpSpPr>
-      <p:grpSpPr>
-        <a:xfrm>
-          <a:off x="0" y="0"/>
-          <a:ext cx="0" cy="0"/>
-          <a:chOff x="0" y="0"/>
-          <a:chExt cx="0" cy="0"/>
-        </a:xfrm>
-      </p:grpSpPr>
-      <p:sp>
-        <p:nvSpPr>
-          <p:cNvPr id="2" name="Text Placeholder 1">
-            <a:extLst>
-              <a:ext uri="{FF2B5EF4-FFF2-40B4-BE49-F238E27FC236}">
-                <a16:creationId xmlns:a16="http://schemas.microsoft.com/office/drawing/2014/main" id="{9A255753-C073-0BEF-F44D-2C7D209C06B7}"/>
-              </a:ext>
-            </a:extLst>
-          </p:cNvPr>
-          <p:cNvSpPr>
-            <a:spLocks noGrp="1"/>
-          </p:cNvSpPr>
-          <p:nvPr>
-            <p:ph type="body" sz="quarter" idx="11"/>
-          </p:nvPr>
-        </p:nvSpPr>
-        <p:spPr>
-          <a:xfrm>
-            <a:off x="342900" y="954291"/>
-            <a:ext cx="8458200" cy="365760"/>
-          </a:xfrm>
-        </p:spPr>
-        <p:txBody>
-          <a:bodyPr>
-            <a:normAutofit lnSpcReduction="10000"/>
-          </a:bodyPr>
-          <a:lstStyle/>
-          <a:p>
-            <a:r>
-              <a:rPr lang="en-US" dirty="0"/>
-              <a:t>Sensor form 12(s)</a:t>
-            </a:r>
-          </a:p>
-        </p:txBody>
-      </p:sp>
-      <p:sp>
-        <p:nvSpPr>
-          <p:cNvPr id="14" name="Text Placeholder 2">
-            <a:extLst>
-              <a:ext uri="{FF2B5EF4-FFF2-40B4-BE49-F238E27FC236}">
-                <a16:creationId xmlns:a16="http://schemas.microsoft.com/office/drawing/2014/main" id="{2AD3CEDE-45B1-B6B8-36DF-F4F0AC0D4286}"/>
-              </a:ext>
-            </a:extLst>
-          </p:cNvPr>
-          <p:cNvSpPr>
-            <a:spLocks noGrp="1"/>
-          </p:cNvSpPr>
-          <p:nvPr>
-            <p:ph type="body" sz="quarter" idx="10"/>
-          </p:nvPr>
-        </p:nvSpPr>
-        <p:spPr>
-          <a:xfrm>
-            <a:off x="334735" y="3652273"/>
-            <a:ext cx="4102307" cy="2345757"/>
-          </a:xfrm>
-        </p:spPr>
-        <p:txBody>
-          <a:bodyPr/>
-          <a:lstStyle/>
-          <a:p>
-            <a:r>
-              <a:rPr lang="en-US" dirty="0"/>
-              <a:t>Form 12 for strain gauge</a:t>
-            </a:r>
-          </a:p>
-        </p:txBody>
-      </p:sp>
-      <p:sp>
-        <p:nvSpPr>
-          <p:cNvPr id="4" name="Title 3">
-            <a:extLst>
-              <a:ext uri="{FF2B5EF4-FFF2-40B4-BE49-F238E27FC236}">
-                <a16:creationId xmlns:a16="http://schemas.microsoft.com/office/drawing/2014/main" id="{3D014B7D-6644-711A-3443-C61B809B35E2}"/>
-              </a:ext>
-            </a:extLst>
-          </p:cNvPr>
-          <p:cNvSpPr>
-            <a:spLocks noGrp="1"/>
-          </p:cNvSpPr>
-          <p:nvPr>
-            <p:ph type="title"/>
-          </p:nvPr>
-        </p:nvSpPr>
-        <p:spPr>
-          <a:xfrm>
-            <a:off x="351064" y="385004"/>
-            <a:ext cx="8450036" cy="589032"/>
-          </a:xfrm>
-        </p:spPr>
-        <p:txBody>
-          <a:bodyPr anchor="ctr">
-            <a:normAutofit/>
-          </a:bodyPr>
-          <a:lstStyle/>
-          <a:p>
-            <a:r>
-              <a:rPr lang="en-US" dirty="0"/>
-              <a:t>Purchase Reports</a:t>
-            </a:r>
-          </a:p>
-        </p:txBody>
-      </p:sp>
-      <p:pic>
-        <p:nvPicPr>
-          <p:cNvPr id="7" name="Picture 6" descr="A screenshot of a document&#10;&#10;AI-generated content may be incorrect.">
-            <a:extLst>
-              <a:ext uri="{FF2B5EF4-FFF2-40B4-BE49-F238E27FC236}">
-                <a16:creationId xmlns:a16="http://schemas.microsoft.com/office/drawing/2014/main" id="{973F3AE1-7004-9405-078A-2080ED0E6177}"/>
-              </a:ext>
-            </a:extLst>
-          </p:cNvPr>
-          <p:cNvPicPr>
-            <a:picLocks noChangeAspect="1"/>
-          </p:cNvPicPr>
-          <p:nvPr/>
-        </p:nvPicPr>
-        <p:blipFill>
-          <a:blip r:embed="rId3"/>
-          <a:srcRect r="2" b="12447"/>
-          <a:stretch>
-            <a:fillRect/>
-          </a:stretch>
-        </p:blipFill>
-        <p:spPr>
-          <a:xfrm>
-            <a:off x="334734" y="1543324"/>
-            <a:ext cx="4102309" cy="1885677"/>
-          </a:xfrm>
-          <a:prstGeom prst="rect">
-            <a:avLst/>
-          </a:prstGeom>
-          <a:noFill/>
-        </p:spPr>
-      </p:pic>
-      <p:pic>
-        <p:nvPicPr>
-          <p:cNvPr id="9" name="Picture 8" descr="A close-up of a blank form&#10;&#10;AI-generated content may be incorrect.">
-            <a:extLst>
-              <a:ext uri="{FF2B5EF4-FFF2-40B4-BE49-F238E27FC236}">
-                <a16:creationId xmlns:a16="http://schemas.microsoft.com/office/drawing/2014/main" id="{B5AD7235-FA73-252D-28A9-F69C4E9B5F36}"/>
-              </a:ext>
-            </a:extLst>
-          </p:cNvPr>
-          <p:cNvPicPr>
-            <a:picLocks noChangeAspect="1"/>
-          </p:cNvPicPr>
-          <p:nvPr/>
-        </p:nvPicPr>
-        <p:blipFill>
-          <a:blip r:embed="rId4"/>
-          <a:srcRect l="20211" r="2" b="2"/>
-          <a:stretch>
-            <a:fillRect/>
-          </a:stretch>
-        </p:blipFill>
-        <p:spPr>
-          <a:xfrm>
-            <a:off x="4706959" y="1543324"/>
-            <a:ext cx="4094045" cy="1885677"/>
-          </a:xfrm>
-          <a:prstGeom prst="rect">
-            <a:avLst/>
-          </a:prstGeom>
-          <a:noFill/>
-        </p:spPr>
-      </p:pic>
-      <p:sp>
-        <p:nvSpPr>
-          <p:cNvPr id="16" name="Text Placeholder 6">
-            <a:extLst>
-              <a:ext uri="{FF2B5EF4-FFF2-40B4-BE49-F238E27FC236}">
-                <a16:creationId xmlns:a16="http://schemas.microsoft.com/office/drawing/2014/main" id="{E5010B8D-BB83-7836-3324-C976CA3285BC}"/>
-              </a:ext>
-            </a:extLst>
-          </p:cNvPr>
-          <p:cNvSpPr>
-            <a:spLocks noGrp="1"/>
-          </p:cNvSpPr>
-          <p:nvPr>
-            <p:ph type="body" sz="quarter" idx="15"/>
-          </p:nvPr>
-        </p:nvSpPr>
-        <p:spPr>
-          <a:xfrm>
-            <a:off x="4698697" y="3652272"/>
-            <a:ext cx="4102307" cy="2345757"/>
-          </a:xfrm>
-        </p:spPr>
-        <p:txBody>
-          <a:bodyPr/>
-          <a:lstStyle/>
-          <a:p>
-            <a:r>
-              <a:rPr lang="en-US" dirty="0"/>
-              <a:t>Form 12 for force sensor</a:t>
-            </a:r>
-          </a:p>
-        </p:txBody>
-      </p:sp>
-      <p:sp>
-        <p:nvSpPr>
-          <p:cNvPr id="5" name="Footer Placeholder 4">
-            <a:extLst>
-              <a:ext uri="{FF2B5EF4-FFF2-40B4-BE49-F238E27FC236}">
-                <a16:creationId xmlns:a16="http://schemas.microsoft.com/office/drawing/2014/main" id="{235C4917-5D37-9A22-B309-4FC307FCFCAC}"/>
-              </a:ext>
-            </a:extLst>
-          </p:cNvPr>
-          <p:cNvSpPr>
-            <a:spLocks noGrp="1"/>
-          </p:cNvSpPr>
-          <p:nvPr>
-            <p:ph type="ftr" sz="quarter" idx="16"/>
-          </p:nvPr>
-        </p:nvSpPr>
-        <p:spPr>
-          <a:xfrm>
-            <a:off x="7461174" y="6295058"/>
-            <a:ext cx="1339925" cy="323970"/>
-          </a:xfrm>
-        </p:spPr>
-        <p:txBody>
-          <a:bodyPr anchor="ctr">
-            <a:normAutofit/>
-          </a:bodyPr>
-          <a:lstStyle/>
-          <a:p>
-            <a:pPr algn="r">
-              <a:spcAft>
-                <a:spcPts val="600"/>
-              </a:spcAft>
-            </a:pPr>
-            <a:r>
-              <a:rPr lang="en-US" dirty="0"/>
-              <a:t>8/11</a:t>
-            </a:r>
-            <a:endParaRPr lang="en-US"/>
-          </a:p>
-        </p:txBody>
-      </p:sp>
-    </p:spTree>
-    <p:extLst>
-      <p:ext uri="{BB962C8B-B14F-4D97-AF65-F5344CB8AC3E}">
-        <p14:creationId xmlns:p14="http://schemas.microsoft.com/office/powerpoint/2010/main" val="1932811717"/>
-      </p:ext>
-    </p:extLst>
-  </p:cSld>
-  <p:clrMapOvr>
-    <a:masterClrMapping/>
-  </p:clrMapOvr>
-</p:sld>
-</file>
-
-<file path=ppt/slides/slide11.xml><?xml version="1.0" encoding="utf-8"?>
-<p:sld xmlns:a="http://schemas.openxmlformats.org/drawingml/2006/main" xmlns:r="http://schemas.openxmlformats.org/officeDocument/2006/relationships" xmlns:p="http://schemas.openxmlformats.org/presentationml/2006/main">
-  <p:cSld>
-    <p:spTree>
-      <p:nvGrpSpPr>
-        <p:cNvPr id="1" name="">
-          <a:extLst>
-            <a:ext uri="{FF2B5EF4-FFF2-40B4-BE49-F238E27FC236}">
               <a16:creationId xmlns:a16="http://schemas.microsoft.com/office/drawing/2014/main" id="{04776F36-879E-6BF4-4677-6E9C9FBCA377}"/>
             </a:ext>
           </a:extLst>
@@ -14992,6 +14714,154 @@
           <a:chExt cx="0" cy="0"/>
         </a:xfrm>
       </p:grpSpPr>
+      <p:pic>
+        <p:nvPicPr>
+          <p:cNvPr id="1026" name="Picture 2" descr="Powerharvester RF-to-DC Chipset now for Space-Constrained Designs - News">
+            <a:extLst>
+              <a:ext uri="{FF2B5EF4-FFF2-40B4-BE49-F238E27FC236}">
+                <a16:creationId xmlns:a16="http://schemas.microsoft.com/office/drawing/2014/main" id="{AD02F3CD-F6AD-D53C-AD4E-6589E95AA0D7}"/>
+              </a:ext>
+            </a:extLst>
+          </p:cNvPr>
+          <p:cNvPicPr>
+            <a:picLocks noChangeAspect="1" noChangeArrowheads="1"/>
+          </p:cNvPicPr>
+          <p:nvPr/>
+        </p:nvPicPr>
+        <p:blipFill rotWithShape="1">
+          <a:blip r:embed="rId3">
+            <a:extLst>
+              <a:ext uri="{28A0092B-C50C-407E-A947-70E740481C1C}">
+                <a14:useLocalDpi xmlns:a14="http://schemas.microsoft.com/office/drawing/2010/main" val="0"/>
+              </a:ext>
+            </a:extLst>
+          </a:blip>
+          <a:srcRect b="9348"/>
+          <a:stretch>
+            <a:fillRect/>
+          </a:stretch>
+        </p:blipFill>
+        <p:spPr bwMode="auto">
+          <a:xfrm>
+            <a:off x="4891392" y="1191418"/>
+            <a:ext cx="3909610" cy="2055591"/>
+          </a:xfrm>
+          <a:prstGeom prst="rect">
+            <a:avLst/>
+          </a:prstGeom>
+          <a:solidFill>
+            <a:srgbClr val="FFFFFF"/>
+          </a:solidFill>
+          <a:extLst>
+            <a:ext uri="{909E8E84-426E-40DD-AFC4-6F175D3DCCD1}">
+              <a14:hiddenFill xmlns:a14="http://schemas.microsoft.com/office/drawing/2010/main">
+                <a:solidFill>
+                  <a:srgbClr val="FFFFFF"/>
+                </a:solidFill>
+              </a14:hiddenFill>
+            </a:ext>
+          </a:extLst>
+        </p:spPr>
+      </p:pic>
+      <p:sp>
+        <p:nvSpPr>
+          <p:cNvPr id="4" name="Title 3">
+            <a:extLst>
+              <a:ext uri="{FF2B5EF4-FFF2-40B4-BE49-F238E27FC236}">
+                <a16:creationId xmlns:a16="http://schemas.microsoft.com/office/drawing/2014/main" id="{4BE6A22C-BF1C-6392-CDC8-D15D5D07648E}"/>
+              </a:ext>
+            </a:extLst>
+          </p:cNvPr>
+          <p:cNvSpPr>
+            <a:spLocks noGrp="1"/>
+          </p:cNvSpPr>
+          <p:nvPr>
+            <p:ph type="title"/>
+          </p:nvPr>
+        </p:nvSpPr>
+        <p:spPr>
+          <a:xfrm>
+            <a:off x="351064" y="385004"/>
+            <a:ext cx="8450036" cy="589032"/>
+          </a:xfrm>
+        </p:spPr>
+        <p:txBody>
+          <a:bodyPr anchor="ctr">
+            <a:normAutofit/>
+          </a:bodyPr>
+          <a:lstStyle/>
+          <a:p>
+            <a:r>
+              <a:rPr lang="en-US" dirty="0"/>
+              <a:t>Transmitter Circuits</a:t>
+            </a:r>
+          </a:p>
+        </p:txBody>
+      </p:sp>
+      <p:pic>
+        <p:nvPicPr>
+          <p:cNvPr id="9" name="Picture 8" descr="A green circuit board with yellow circles and black dots&#10;&#10;AI-generated content may be incorrect.">
+            <a:extLst>
+              <a:ext uri="{FF2B5EF4-FFF2-40B4-BE49-F238E27FC236}">
+                <a16:creationId xmlns:a16="http://schemas.microsoft.com/office/drawing/2014/main" id="{4DAB0BBA-25B8-0782-608F-AD9F4B7BF07C}"/>
+              </a:ext>
+            </a:extLst>
+          </p:cNvPr>
+          <p:cNvPicPr>
+            <a:picLocks noChangeAspect="1"/>
+          </p:cNvPicPr>
+          <p:nvPr/>
+        </p:nvPicPr>
+        <p:blipFill>
+          <a:blip r:embed="rId4"/>
+          <a:srcRect r="999" b="15"/>
+          <a:stretch>
+            <a:fillRect/>
+          </a:stretch>
+        </p:blipFill>
+        <p:spPr>
+          <a:xfrm>
+            <a:off x="6965414" y="3884038"/>
+            <a:ext cx="1835685" cy="2055591"/>
+          </a:xfrm>
+          <a:prstGeom prst="rect">
+            <a:avLst/>
+          </a:prstGeom>
+          <a:noFill/>
+        </p:spPr>
+      </p:pic>
+      <p:pic>
+        <p:nvPicPr>
+          <p:cNvPr id="7" name="Picture 6" descr="A screenshot of a computer&#10;&#10;AI-generated content may be incorrect.">
+            <a:extLst>
+              <a:ext uri="{FF2B5EF4-FFF2-40B4-BE49-F238E27FC236}">
+                <a16:creationId xmlns:a16="http://schemas.microsoft.com/office/drawing/2014/main" id="{D63B07DE-88B8-3385-4424-4CC28A3093F7}"/>
+              </a:ext>
+            </a:extLst>
+          </p:cNvPr>
+          <p:cNvPicPr>
+            <a:picLocks noChangeAspect="1"/>
+          </p:cNvPicPr>
+          <p:nvPr/>
+        </p:nvPicPr>
+        <p:blipFill>
+          <a:blip r:embed="rId5"/>
+          <a:srcRect l="51418" r="6369" b="2"/>
+          <a:stretch>
+            <a:fillRect/>
+          </a:stretch>
+        </p:blipFill>
+        <p:spPr>
+          <a:xfrm>
+            <a:off x="4891490" y="3879120"/>
+            <a:ext cx="1896687" cy="2055592"/>
+          </a:xfrm>
+          <a:prstGeom prst="rect">
+            <a:avLst/>
+          </a:prstGeom>
+          <a:noFill/>
+        </p:spPr>
+      </p:pic>
       <p:sp>
         <p:nvSpPr>
           <p:cNvPr id="2" name="Text Placeholder 1">
@@ -15005,21 +14875,28 @@
             <a:spLocks noGrp="1"/>
           </p:cNvSpPr>
           <p:nvPr>
-            <p:ph type="body" sz="quarter" idx="11"/>
-          </p:nvPr>
-        </p:nvSpPr>
-        <p:spPr/>
-        <p:txBody>
-          <a:bodyPr/>
+            <p:ph type="body" sz="quarter" idx="15"/>
+          </p:nvPr>
+        </p:nvSpPr>
+        <p:spPr>
+          <a:xfrm>
+            <a:off x="342900" y="954291"/>
+            <a:ext cx="8458200" cy="365760"/>
+          </a:xfrm>
+        </p:spPr>
+        <p:txBody>
+          <a:bodyPr>
+            <a:normAutofit lnSpcReduction="10000"/>
+          </a:bodyPr>
           <a:lstStyle/>
           <a:p>
             <a:r>
               <a:rPr lang="en-US" dirty="0" err="1"/>
-              <a:t>DigiKey</a:t>
-            </a:r>
-            <a:r>
-              <a:rPr lang="en-US" dirty="0"/>
-              <a:t>/Mouser/Vendor purchase orders</a:t>
+              <a:t>KiCAD</a:t>
+            </a:r>
+            <a:r>
+              <a:rPr lang="en-US" dirty="0"/>
+              <a:t> Transmitter PCB and Circuits</a:t>
             </a:r>
           </a:p>
         </p:txBody>
@@ -15037,12 +14914,19 @@
             <a:spLocks noGrp="1"/>
           </p:cNvSpPr>
           <p:nvPr>
-            <p:ph type="body" sz="quarter" idx="10"/>
-          </p:nvPr>
-        </p:nvSpPr>
-        <p:spPr/>
-        <p:txBody>
-          <a:bodyPr/>
+            <p:ph idx="18"/>
+          </p:nvPr>
+        </p:nvSpPr>
+        <p:spPr>
+          <a:xfrm>
+            <a:off x="334737" y="1643074"/>
+            <a:ext cx="4308874" cy="4307571"/>
+          </a:xfrm>
+        </p:spPr>
+        <p:txBody>
+          <a:bodyPr>
+            <a:normAutofit/>
+          </a:bodyPr>
           <a:lstStyle/>
           <a:p>
             <a:pPr marL="285750" indent="-285750">
@@ -15051,13 +14935,28 @@
             </a:pPr>
             <a:r>
               <a:rPr lang="en-US" dirty="0"/>
-              <a:t>According to purchasing office, common vendors can be ordered from </a:t>
-            </a:r>
-            <a:r>
-              <a:rPr lang="en-US" dirty="0" err="1"/>
-              <a:t>one.purdue.edu</a:t>
-            </a:r>
-            <a:endParaRPr lang="en-US" dirty="0"/>
+              <a:t>Created custom footprint for PCC110</a:t>
+            </a:r>
+          </a:p>
+          <a:p>
+            <a:pPr marL="628650" lvl="1" indent="-285750">
+              <a:buFont typeface="Arial" panose="020B0604020202020204" pitchFamily="34" charset="0"/>
+              <a:buChar char="•"/>
+            </a:pPr>
+            <a:r>
+              <a:rPr lang="en-US" sz="1800" dirty="0"/>
+              <a:t>Changed footprints and circuit</a:t>
+            </a:r>
+          </a:p>
+          <a:p>
+            <a:pPr marL="628650" lvl="1" indent="-285750">
+              <a:buFont typeface="Arial" panose="020B0604020202020204" pitchFamily="34" charset="0"/>
+              <a:buChar char="•"/>
+            </a:pPr>
+            <a:r>
+              <a:rPr lang="en-US" sz="1800" dirty="0"/>
+              <a:t>Updated PCB location and wiring</a:t>
+            </a:r>
           </a:p>
           <a:p>
             <a:pPr marL="285750" indent="-285750">
@@ -15066,73 +14965,173 @@
             </a:pPr>
             <a:r>
               <a:rPr lang="en-US" dirty="0"/>
-              <a:t>Will try to put in requests for common vendors (</a:t>
+              <a:t>Found suitable Antenna for PCC110 Harvester</a:t>
+            </a:r>
+          </a:p>
+          <a:p>
+            <a:pPr marL="285750" indent="-285750">
+              <a:buFont typeface="Arial" panose="020B0604020202020204" pitchFamily="34" charset="0"/>
+              <a:buChar char="•"/>
+            </a:pPr>
+            <a:r>
+              <a:rPr lang="en-US" dirty="0"/>
+              <a:t>Verified with </a:t>
             </a:r>
             <a:r>
               <a:rPr lang="en-US" dirty="0" err="1"/>
-              <a:t>DigiKey</a:t>
-            </a:r>
-            <a:r>
-              <a:rPr lang="en-US" dirty="0"/>
-              <a:t>) to get components without having to get a Form 12</a:t>
-            </a:r>
-          </a:p>
-        </p:txBody>
-      </p:sp>
-      <p:sp>
-        <p:nvSpPr>
-          <p:cNvPr id="4" name="Title 3">
-            <a:extLst>
-              <a:ext uri="{FF2B5EF4-FFF2-40B4-BE49-F238E27FC236}">
-                <a16:creationId xmlns:a16="http://schemas.microsoft.com/office/drawing/2014/main" id="{4BE6A22C-BF1C-6392-CDC8-D15D5D07648E}"/>
-              </a:ext>
-            </a:extLst>
-          </p:cNvPr>
-          <p:cNvSpPr>
-            <a:spLocks noGrp="1"/>
-          </p:cNvSpPr>
-          <p:nvPr>
-            <p:ph type="title"/>
-          </p:nvPr>
-        </p:nvSpPr>
-        <p:spPr/>
+              <a:t>Powercast</a:t>
+            </a:r>
+            <a:r>
+              <a:rPr lang="en-US" dirty="0"/>
+              <a:t> support</a:t>
+            </a:r>
+          </a:p>
+          <a:p>
+            <a:pPr marL="285750" indent="-285750">
+              <a:buFont typeface="Arial" panose="020B0604020202020204" pitchFamily="34" charset="0"/>
+              <a:buChar char="•"/>
+            </a:pPr>
+            <a:endParaRPr lang="en-US" dirty="0"/>
+          </a:p>
+        </p:txBody>
+      </p:sp>
+      <p:sp>
+        <p:nvSpPr>
+          <p:cNvPr id="1031" name="Text Placeholder 7">
+            <a:extLst>
+              <a:ext uri="{FF2B5EF4-FFF2-40B4-BE49-F238E27FC236}">
+                <a16:creationId xmlns:a16="http://schemas.microsoft.com/office/drawing/2014/main" id="{64B9D285-9092-F7C0-040D-4A25921BE06D}"/>
+              </a:ext>
+            </a:extLst>
+          </p:cNvPr>
+          <p:cNvSpPr>
+            <a:spLocks noGrp="1"/>
+          </p:cNvSpPr>
+          <p:nvPr>
+            <p:ph type="body" sz="half" idx="2"/>
+          </p:nvPr>
+        </p:nvSpPr>
+        <p:spPr>
+          <a:xfrm>
+            <a:off x="4928867" y="3395950"/>
+            <a:ext cx="3872135" cy="302715"/>
+          </a:xfrm>
+        </p:spPr>
         <p:txBody>
           <a:bodyPr/>
           <a:lstStyle/>
           <a:p>
             <a:r>
               <a:rPr lang="en-US" dirty="0"/>
-              <a:t>Purchase Reports</a:t>
-            </a:r>
-          </a:p>
-        </p:txBody>
-      </p:sp>
-      <p:sp>
-        <p:nvSpPr>
-          <p:cNvPr id="5" name="Footer Placeholder 4">
-            <a:extLst>
-              <a:ext uri="{FF2B5EF4-FFF2-40B4-BE49-F238E27FC236}">
-                <a16:creationId xmlns:a16="http://schemas.microsoft.com/office/drawing/2014/main" id="{E21E4B51-8C00-7CF9-B170-99CA359E2846}"/>
-              </a:ext>
-            </a:extLst>
-          </p:cNvPr>
-          <p:cNvSpPr>
-            <a:spLocks noGrp="1"/>
-          </p:cNvSpPr>
-          <p:nvPr>
-            <p:ph type="ftr" sz="quarter" idx="12"/>
-          </p:nvPr>
-        </p:nvSpPr>
-        <p:spPr/>
+              <a:t>PCC110 Sizing</a:t>
+            </a:r>
+          </a:p>
+        </p:txBody>
+      </p:sp>
+      <p:sp>
+        <p:nvSpPr>
+          <p:cNvPr id="1033" name="Text Placeholder 8">
+            <a:extLst>
+              <a:ext uri="{FF2B5EF4-FFF2-40B4-BE49-F238E27FC236}">
+                <a16:creationId xmlns:a16="http://schemas.microsoft.com/office/drawing/2014/main" id="{98AD0471-403A-0C98-88DE-2A2DEF8A6B56}"/>
+              </a:ext>
+            </a:extLst>
+          </p:cNvPr>
+          <p:cNvSpPr>
+            <a:spLocks noGrp="1"/>
+          </p:cNvSpPr>
+          <p:nvPr>
+            <p:ph type="body" sz="half" idx="19"/>
+          </p:nvPr>
+        </p:nvSpPr>
+        <p:spPr>
+          <a:xfrm>
+            <a:off x="4906740" y="5997176"/>
+            <a:ext cx="1866186" cy="302715"/>
+          </a:xfrm>
+        </p:spPr>
         <p:txBody>
           <a:bodyPr/>
           <a:lstStyle/>
           <a:p>
-            <a:pPr algn="r"/>
+            <a:r>
+              <a:rPr lang="en-US" dirty="0"/>
+              <a:t>PCC110 RFID Circuit</a:t>
+            </a:r>
+          </a:p>
+        </p:txBody>
+      </p:sp>
+      <p:sp>
+        <p:nvSpPr>
+          <p:cNvPr id="1035" name="Text Placeholder 9">
+            <a:extLst>
+              <a:ext uri="{FF2B5EF4-FFF2-40B4-BE49-F238E27FC236}">
+                <a16:creationId xmlns:a16="http://schemas.microsoft.com/office/drawing/2014/main" id="{77906FDF-C860-521F-BEB8-50E5DC808297}"/>
+              </a:ext>
+            </a:extLst>
+          </p:cNvPr>
+          <p:cNvSpPr>
+            <a:spLocks noGrp="1"/>
+          </p:cNvSpPr>
+          <p:nvPr>
+            <p:ph type="body" sz="half" idx="20"/>
+          </p:nvPr>
+        </p:nvSpPr>
+        <p:spPr>
+          <a:xfrm>
+            <a:off x="6994529" y="5997176"/>
+            <a:ext cx="1806473" cy="302715"/>
+          </a:xfrm>
+        </p:spPr>
+        <p:txBody>
+          <a:bodyPr/>
+          <a:lstStyle/>
+          <a:p>
+            <a:r>
+              <a:rPr lang="en-US" dirty="0"/>
+              <a:t>PCC110 RFID PCB</a:t>
+            </a:r>
+          </a:p>
+        </p:txBody>
+      </p:sp>
+      <p:sp>
+        <p:nvSpPr>
+          <p:cNvPr id="5" name="Footer Placeholder 4">
+            <a:extLst>
+              <a:ext uri="{FF2B5EF4-FFF2-40B4-BE49-F238E27FC236}">
+                <a16:creationId xmlns:a16="http://schemas.microsoft.com/office/drawing/2014/main" id="{E21E4B51-8C00-7CF9-B170-99CA359E2846}"/>
+              </a:ext>
+            </a:extLst>
+          </p:cNvPr>
+          <p:cNvSpPr>
+            <a:spLocks noGrp="1"/>
+          </p:cNvSpPr>
+          <p:nvPr>
+            <p:ph type="ftr" sz="quarter" idx="21"/>
+          </p:nvPr>
+        </p:nvSpPr>
+        <p:spPr>
+          <a:xfrm>
+            <a:off x="7461174" y="6295058"/>
+            <a:ext cx="1339925" cy="323970"/>
+          </a:xfrm>
+        </p:spPr>
+        <p:txBody>
+          <a:bodyPr anchor="ctr">
+            <a:normAutofit/>
+          </a:bodyPr>
+          <a:lstStyle/>
+          <a:p>
+            <a:pPr algn="r">
+              <a:spcAft>
+                <a:spcPts val="600"/>
+              </a:spcAft>
+            </a:pPr>
             <a:r>
               <a:rPr lang="en-US" dirty="0"/>
               <a:t>9/11</a:t>
             </a:r>
+            <a:endParaRPr lang="en-US"/>
           </a:p>
         </p:txBody>
       </p:sp>
@@ -15149,7 +15148,7 @@
 </p:sld>
 </file>
 
-<file path=ppt/slides/slide12.xml><?xml version="1.0" encoding="utf-8"?>
+<file path=ppt/slides/slide11.xml><?xml version="1.0" encoding="utf-8"?>
 <p:sld xmlns:a="http://schemas.openxmlformats.org/drawingml/2006/main" xmlns:r="http://schemas.openxmlformats.org/officeDocument/2006/relationships" xmlns:p="http://schemas.openxmlformats.org/presentationml/2006/main">
   <p:cSld>
     <p:spTree>
@@ -15255,7 +15254,15 @@
             </a:pPr>
             <a:r>
               <a:rPr lang="en-US" dirty="0"/>
-              <a:t>Play around with circuits on breadboard</a:t>
+              <a:t>Verify </a:t>
+            </a:r>
+            <a:r>
+              <a:rPr lang="en-US" dirty="0" err="1"/>
+              <a:t>Powercast</a:t>
+            </a:r>
+            <a:r>
+              <a:rPr lang="en-US" dirty="0"/>
+              <a:t> RFID circuits on breadboard</a:t>
             </a:r>
           </a:p>
         </p:txBody>
@@ -15330,7 +15337,7 @@
 </p:sld>
 </file>
 
-<file path=ppt/slides/slide13.xml><?xml version="1.0" encoding="utf-8"?>
+<file path=ppt/slides/slide12.xml><?xml version="1.0" encoding="utf-8"?>
 <p:sld xmlns:a="http://schemas.openxmlformats.org/drawingml/2006/main" xmlns:r="http://schemas.openxmlformats.org/officeDocument/2006/relationships" xmlns:p="http://schemas.openxmlformats.org/presentationml/2006/main">
   <p:cSld>
     <p:spTree>
@@ -15584,27 +15591,23 @@
             </a:r>
           </a:p>
           <a:p>
+            <a:pPr marL="285750" indent="-285750">
+              <a:buFont typeface="Arial" panose="020B0604020202020204" pitchFamily="34" charset="0"/>
+              <a:buChar char="•"/>
+            </a:pPr>
+            <a:r>
+              <a:rPr lang="en-US" dirty="0"/>
+              <a:t>Transmitter Circuit</a:t>
+            </a:r>
+          </a:p>
+          <a:p>
             <a:pPr marL="628650" lvl="1" indent="-285750">
               <a:buFont typeface="Arial" panose="020B0604020202020204" pitchFamily="34" charset="0"/>
               <a:buChar char="•"/>
             </a:pPr>
             <a:r>
-              <a:rPr lang="en-US" dirty="0" err="1"/>
-              <a:t>DigiKey</a:t>
-            </a:r>
-            <a:r>
-              <a:rPr lang="en-US" dirty="0"/>
-              <a:t>/Mouser/Vendor purchase orders</a:t>
-            </a:r>
-          </a:p>
-          <a:p>
-            <a:pPr marL="285750" indent="-285750">
-              <a:buFont typeface="Arial" panose="020B0604020202020204" pitchFamily="34" charset="0"/>
-              <a:buChar char="•"/>
-            </a:pPr>
-            <a:r>
-              <a:rPr lang="en-US" dirty="0"/>
-              <a:t>Next Week:</a:t>
+              <a:rPr lang="en-US" dirty="0"/>
+              <a:t>Creation of circuit and PCB</a:t>
             </a:r>
           </a:p>
           <a:p>
@@ -16224,302 +16227,6 @@
   <p:cSld>
     <p:spTree>
       <p:nvGrpSpPr>
-        <p:cNvPr id="1" name=""/>
-        <p:cNvGrpSpPr/>
-        <p:nvPr/>
-      </p:nvGrpSpPr>
-      <p:grpSpPr>
-        <a:xfrm>
-          <a:off x="0" y="0"/>
-          <a:ext cx="0" cy="0"/>
-          <a:chOff x="0" y="0"/>
-          <a:chExt cx="0" cy="0"/>
-        </a:xfrm>
-      </p:grpSpPr>
-      <p:sp>
-        <p:nvSpPr>
-          <p:cNvPr id="2" name="Text Placeholder 1">
-            <a:extLst>
-              <a:ext uri="{FF2B5EF4-FFF2-40B4-BE49-F238E27FC236}">
-                <a16:creationId xmlns:a16="http://schemas.microsoft.com/office/drawing/2014/main" id="{6ADBB2A3-2FA5-AC2A-9E07-B9D9CB67DABD}"/>
-              </a:ext>
-            </a:extLst>
-          </p:cNvPr>
-          <p:cNvSpPr>
-            <a:spLocks noGrp="1"/>
-          </p:cNvSpPr>
-          <p:nvPr>
-            <p:ph type="body" sz="quarter" idx="11"/>
-          </p:nvPr>
-        </p:nvSpPr>
-        <p:spPr/>
-        <p:txBody>
-          <a:bodyPr/>
-          <a:lstStyle/>
-          <a:p>
-            <a:endParaRPr lang="en-US" dirty="0"/>
-          </a:p>
-        </p:txBody>
-      </p:sp>
-      <p:sp>
-        <p:nvSpPr>
-          <p:cNvPr id="3" name="Text Placeholder 2">
-            <a:extLst>
-              <a:ext uri="{FF2B5EF4-FFF2-40B4-BE49-F238E27FC236}">
-                <a16:creationId xmlns:a16="http://schemas.microsoft.com/office/drawing/2014/main" id="{5535B308-9A64-0BE6-B588-34372EA6AB75}"/>
-              </a:ext>
-            </a:extLst>
-          </p:cNvPr>
-          <p:cNvSpPr>
-            <a:spLocks noGrp="1"/>
-          </p:cNvSpPr>
-          <p:nvPr>
-            <p:ph type="body" sz="quarter" idx="10"/>
-          </p:nvPr>
-        </p:nvSpPr>
-        <p:spPr/>
-        <p:txBody>
-          <a:bodyPr/>
-          <a:lstStyle/>
-          <a:p>
-            <a:endParaRPr lang="en-US" dirty="0"/>
-          </a:p>
-        </p:txBody>
-      </p:sp>
-      <p:sp>
-        <p:nvSpPr>
-          <p:cNvPr id="4" name="Title 3">
-            <a:extLst>
-              <a:ext uri="{FF2B5EF4-FFF2-40B4-BE49-F238E27FC236}">
-                <a16:creationId xmlns:a16="http://schemas.microsoft.com/office/drawing/2014/main" id="{160C5BD8-345E-5369-DDC8-5DC2EAFBC987}"/>
-              </a:ext>
-            </a:extLst>
-          </p:cNvPr>
-          <p:cNvSpPr>
-            <a:spLocks noGrp="1"/>
-          </p:cNvSpPr>
-          <p:nvPr>
-            <p:ph type="title"/>
-          </p:nvPr>
-        </p:nvSpPr>
-        <p:spPr/>
-        <p:txBody>
-          <a:bodyPr/>
-          <a:lstStyle/>
-          <a:p>
-            <a:r>
-              <a:rPr lang="en-US" dirty="0"/>
-              <a:t>Sampling Rate</a:t>
-            </a:r>
-          </a:p>
-        </p:txBody>
-      </p:sp>
-      <p:sp>
-        <p:nvSpPr>
-          <p:cNvPr id="5" name="Footer Placeholder 4">
-            <a:extLst>
-              <a:ext uri="{FF2B5EF4-FFF2-40B4-BE49-F238E27FC236}">
-                <a16:creationId xmlns:a16="http://schemas.microsoft.com/office/drawing/2014/main" id="{3FFA1A16-8EC3-3B2B-14C6-6B8CAF82197C}"/>
-              </a:ext>
-            </a:extLst>
-          </p:cNvPr>
-          <p:cNvSpPr>
-            <a:spLocks noGrp="1"/>
-          </p:cNvSpPr>
-          <p:nvPr>
-            <p:ph type="ftr" sz="quarter" idx="12"/>
-          </p:nvPr>
-        </p:nvSpPr>
-        <p:spPr/>
-        <p:txBody>
-          <a:bodyPr/>
-          <a:lstStyle/>
-          <a:p>
-            <a:pPr algn="r"/>
-            <a:r>
-              <a:rPr lang="en-US"/>
-              <a:t>3/31/23            ‹#›</a:t>
-            </a:r>
-            <a:endParaRPr lang="en-US" dirty="0"/>
-          </a:p>
-        </p:txBody>
-      </p:sp>
-      <p:sp>
-        <p:nvSpPr>
-          <p:cNvPr id="6" name="Rectangle 5">
-            <a:extLst>
-              <a:ext uri="{FF2B5EF4-FFF2-40B4-BE49-F238E27FC236}">
-                <a16:creationId xmlns:a16="http://schemas.microsoft.com/office/drawing/2014/main" id="{C89064C1-FA00-C84E-3F41-0E9FFEF84E66}"/>
-              </a:ext>
-            </a:extLst>
-          </p:cNvPr>
-          <p:cNvSpPr/>
-          <p:nvPr/>
-        </p:nvSpPr>
-        <p:spPr>
-          <a:xfrm>
-            <a:off x="1723869" y="2848131"/>
-            <a:ext cx="2353456" cy="2173574"/>
-          </a:xfrm>
-          <a:prstGeom prst="rect">
-            <a:avLst/>
-          </a:prstGeom>
-        </p:spPr>
-        <p:style>
-          <a:lnRef idx="2">
-            <a:schemeClr val="dk1">
-              <a:shade val="50000"/>
-            </a:schemeClr>
-          </a:lnRef>
-          <a:fillRef idx="1">
-            <a:schemeClr val="dk1"/>
-          </a:fillRef>
-          <a:effectRef idx="0">
-            <a:schemeClr val="dk1"/>
-          </a:effectRef>
-          <a:fontRef idx="minor">
-            <a:schemeClr val="lt1"/>
-          </a:fontRef>
-        </p:style>
-        <p:txBody>
-          <a:bodyPr rtlCol="0" anchor="ctr"/>
-          <a:lstStyle/>
-          <a:p>
-            <a:pPr algn="ctr"/>
-            <a:r>
-              <a:rPr lang="en-US" dirty="0"/>
-              <a:t>Nicla</a:t>
-            </a:r>
-          </a:p>
-          <a:p>
-            <a:pPr algn="ctr"/>
-            <a:r>
-              <a:rPr lang="en-US" dirty="0"/>
-              <a:t>Adjust Sampling Rate</a:t>
-            </a:r>
-          </a:p>
-        </p:txBody>
-      </p:sp>
-      <p:cxnSp>
-        <p:nvCxnSpPr>
-          <p:cNvPr id="8" name="Straight Arrow Connector 7">
-            <a:extLst>
-              <a:ext uri="{FF2B5EF4-FFF2-40B4-BE49-F238E27FC236}">
-                <a16:creationId xmlns:a16="http://schemas.microsoft.com/office/drawing/2014/main" id="{70EF055B-1FD2-B8B7-86F1-793119452A23}"/>
-              </a:ext>
-            </a:extLst>
-          </p:cNvPr>
-          <p:cNvCxnSpPr/>
-          <p:nvPr/>
-        </p:nvCxnSpPr>
-        <p:spPr>
-          <a:xfrm>
-            <a:off x="4077325" y="3927423"/>
-            <a:ext cx="1514006" cy="0"/>
-          </a:xfrm>
-          <a:prstGeom prst="straightConnector1">
-            <a:avLst/>
-          </a:prstGeom>
-          <a:ln>
-            <a:tailEnd type="triangle"/>
-          </a:ln>
-        </p:spPr>
-        <p:style>
-          <a:lnRef idx="1">
-            <a:schemeClr val="accent1"/>
-          </a:lnRef>
-          <a:fillRef idx="0">
-            <a:schemeClr val="accent1"/>
-          </a:fillRef>
-          <a:effectRef idx="0">
-            <a:schemeClr val="accent1"/>
-          </a:effectRef>
-          <a:fontRef idx="minor">
-            <a:schemeClr val="tx1"/>
-          </a:fontRef>
-        </p:style>
-      </p:cxnSp>
-      <p:sp>
-        <p:nvSpPr>
-          <p:cNvPr id="9" name="Rectangle 8">
-            <a:extLst>
-              <a:ext uri="{FF2B5EF4-FFF2-40B4-BE49-F238E27FC236}">
-                <a16:creationId xmlns:a16="http://schemas.microsoft.com/office/drawing/2014/main" id="{8B146468-A543-7B9F-7A2C-697E1F708C08}"/>
-              </a:ext>
-            </a:extLst>
-          </p:cNvPr>
-          <p:cNvSpPr/>
-          <p:nvPr/>
-        </p:nvSpPr>
-        <p:spPr>
-          <a:xfrm>
-            <a:off x="5591331" y="2848131"/>
-            <a:ext cx="2053653" cy="2173574"/>
-          </a:xfrm>
-          <a:prstGeom prst="rect">
-            <a:avLst/>
-          </a:prstGeom>
-        </p:spPr>
-        <p:style>
-          <a:lnRef idx="2">
-            <a:schemeClr val="dk1">
-              <a:shade val="50000"/>
-            </a:schemeClr>
-          </a:lnRef>
-          <a:fillRef idx="1">
-            <a:schemeClr val="dk1"/>
-          </a:fillRef>
-          <a:effectRef idx="0">
-            <a:schemeClr val="dk1"/>
-          </a:effectRef>
-          <a:fontRef idx="minor">
-            <a:schemeClr val="lt1"/>
-          </a:fontRef>
-        </p:style>
-        <p:txBody>
-          <a:bodyPr rtlCol="0" anchor="ctr"/>
-          <a:lstStyle/>
-          <a:p>
-            <a:pPr algn="ctr"/>
-            <a:r>
-              <a:rPr lang="en-US" dirty="0"/>
-              <a:t>Web App</a:t>
-            </a:r>
-          </a:p>
-          <a:p>
-            <a:pPr algn="ctr"/>
-            <a:r>
-              <a:rPr lang="en-US" dirty="0"/>
-              <a:t>Limit </a:t>
-            </a:r>
-          </a:p>
-          <a:p>
-            <a:pPr algn="ctr"/>
-            <a:r>
-              <a:rPr lang="en-US" dirty="0"/>
-              <a:t>(Ensure there is no overlap/repetitive data)</a:t>
-            </a:r>
-          </a:p>
-        </p:txBody>
-      </p:sp>
-    </p:spTree>
-    <p:extLst>
-      <p:ext uri="{BB962C8B-B14F-4D97-AF65-F5344CB8AC3E}">
-        <p14:creationId xmlns:p14="http://schemas.microsoft.com/office/powerpoint/2010/main" val="2328325736"/>
-      </p:ext>
-    </p:extLst>
-  </p:cSld>
-  <p:clrMapOvr>
-    <a:masterClrMapping/>
-  </p:clrMapOvr>
-</p:sld>
-</file>
-
-<file path=ppt/slides/slide5.xml><?xml version="1.0" encoding="utf-8"?>
-<p:sld xmlns:a="http://schemas.openxmlformats.org/drawingml/2006/main" xmlns:r="http://schemas.openxmlformats.org/officeDocument/2006/relationships" xmlns:p="http://schemas.openxmlformats.org/presentationml/2006/main">
-  <p:cSld>
-    <p:spTree>
-      <p:nvGrpSpPr>
         <p:cNvPr id="1" name="">
           <a:extLst>
             <a:ext uri="{FF2B5EF4-FFF2-40B4-BE49-F238E27FC236}">
@@ -16758,7 +16465,7 @@
 </p:sld>
 </file>
 
-<file path=ppt/slides/slide6.xml><?xml version="1.0" encoding="utf-8"?>
+<file path=ppt/slides/slide5.xml><?xml version="1.0" encoding="utf-8"?>
 <p:sld xmlns:a="http://schemas.openxmlformats.org/drawingml/2006/main" xmlns:r="http://schemas.openxmlformats.org/officeDocument/2006/relationships" xmlns:p="http://schemas.openxmlformats.org/presentationml/2006/main">
   <p:cSld>
     <p:spTree>
@@ -16968,7 +16675,7 @@
 </p:sld>
 </file>
 
-<file path=ppt/slides/slide7.xml><?xml version="1.0" encoding="utf-8"?>
+<file path=ppt/slides/slide6.xml><?xml version="1.0" encoding="utf-8"?>
 <p:sld xmlns:a="http://schemas.openxmlformats.org/drawingml/2006/main" xmlns:r="http://schemas.openxmlformats.org/officeDocument/2006/relationships" xmlns:p="http://schemas.openxmlformats.org/presentationml/2006/main">
   <p:cSld>
     <p:spTree>
@@ -17161,7 +16868,7 @@
 </p:sld>
 </file>
 
-<file path=ppt/slides/slide8.xml><?xml version="1.0" encoding="utf-8"?>
+<file path=ppt/slides/slide7.xml><?xml version="1.0" encoding="utf-8"?>
 <p:sld xmlns:a="http://schemas.openxmlformats.org/drawingml/2006/main" xmlns:r="http://schemas.openxmlformats.org/officeDocument/2006/relationships" xmlns:p="http://schemas.openxmlformats.org/presentationml/2006/main">
   <p:cSld>
     <p:spTree>
@@ -17432,7 +17139,7 @@
 </p:sld>
 </file>
 
-<file path=ppt/slides/slide9.xml><?xml version="1.0" encoding="utf-8"?>
+<file path=ppt/slides/slide8.xml><?xml version="1.0" encoding="utf-8"?>
 <p:sld xmlns:a="http://schemas.openxmlformats.org/drawingml/2006/main" xmlns:r="http://schemas.openxmlformats.org/officeDocument/2006/relationships" xmlns:p="http://schemas.openxmlformats.org/presentationml/2006/main">
   <p:cSld>
     <p:spTree>
@@ -17600,6 +17307,283 @@
     <p:extLst>
       <p:ext uri="{BB962C8B-B14F-4D97-AF65-F5344CB8AC3E}">
         <p14:creationId xmlns:p14="http://schemas.microsoft.com/office/powerpoint/2010/main" val="1795818811"/>
+      </p:ext>
+    </p:extLst>
+  </p:cSld>
+  <p:clrMapOvr>
+    <a:masterClrMapping/>
+  </p:clrMapOvr>
+</p:sld>
+</file>
+
+<file path=ppt/slides/slide9.xml><?xml version="1.0" encoding="utf-8"?>
+<p:sld xmlns:a="http://schemas.openxmlformats.org/drawingml/2006/main" xmlns:r="http://schemas.openxmlformats.org/officeDocument/2006/relationships" xmlns:p="http://schemas.openxmlformats.org/presentationml/2006/main">
+  <p:cSld>
+    <p:spTree>
+      <p:nvGrpSpPr>
+        <p:cNvPr id="1" name="">
+          <a:extLst>
+            <a:ext uri="{FF2B5EF4-FFF2-40B4-BE49-F238E27FC236}">
+              <a16:creationId xmlns:a16="http://schemas.microsoft.com/office/drawing/2014/main" id="{0F9A802B-6069-FC86-8CDE-6BE49EF688AE}"/>
+            </a:ext>
+          </a:extLst>
+        </p:cNvPr>
+        <p:cNvGrpSpPr/>
+        <p:nvPr/>
+      </p:nvGrpSpPr>
+      <p:grpSpPr>
+        <a:xfrm>
+          <a:off x="0" y="0"/>
+          <a:ext cx="0" cy="0"/>
+          <a:chOff x="0" y="0"/>
+          <a:chExt cx="0" cy="0"/>
+        </a:xfrm>
+      </p:grpSpPr>
+      <p:sp>
+        <p:nvSpPr>
+          <p:cNvPr id="2" name="Text Placeholder 1">
+            <a:extLst>
+              <a:ext uri="{FF2B5EF4-FFF2-40B4-BE49-F238E27FC236}">
+                <a16:creationId xmlns:a16="http://schemas.microsoft.com/office/drawing/2014/main" id="{9A255753-C073-0BEF-F44D-2C7D209C06B7}"/>
+              </a:ext>
+            </a:extLst>
+          </p:cNvPr>
+          <p:cNvSpPr>
+            <a:spLocks noGrp="1"/>
+          </p:cNvSpPr>
+          <p:nvPr>
+            <p:ph type="body" sz="quarter" idx="11"/>
+          </p:nvPr>
+        </p:nvSpPr>
+        <p:spPr>
+          <a:xfrm>
+            <a:off x="342900" y="954291"/>
+            <a:ext cx="8458200" cy="365760"/>
+          </a:xfrm>
+        </p:spPr>
+        <p:txBody>
+          <a:bodyPr>
+            <a:normAutofit lnSpcReduction="10000"/>
+          </a:bodyPr>
+          <a:lstStyle/>
+          <a:p>
+            <a:r>
+              <a:rPr lang="en-US" dirty="0"/>
+              <a:t>Sensor form 12(s)</a:t>
+            </a:r>
+          </a:p>
+        </p:txBody>
+      </p:sp>
+      <p:sp>
+        <p:nvSpPr>
+          <p:cNvPr id="14" name="Text Placeholder 2">
+            <a:extLst>
+              <a:ext uri="{FF2B5EF4-FFF2-40B4-BE49-F238E27FC236}">
+                <a16:creationId xmlns:a16="http://schemas.microsoft.com/office/drawing/2014/main" id="{2AD3CEDE-45B1-B6B8-36DF-F4F0AC0D4286}"/>
+              </a:ext>
+            </a:extLst>
+          </p:cNvPr>
+          <p:cNvSpPr>
+            <a:spLocks noGrp="1"/>
+          </p:cNvSpPr>
+          <p:nvPr>
+            <p:ph type="body" sz="quarter" idx="10"/>
+          </p:nvPr>
+        </p:nvSpPr>
+        <p:spPr>
+          <a:xfrm>
+            <a:off x="334735" y="3652273"/>
+            <a:ext cx="4102307" cy="2345757"/>
+          </a:xfrm>
+        </p:spPr>
+        <p:txBody>
+          <a:bodyPr/>
+          <a:lstStyle/>
+          <a:p>
+            <a:r>
+              <a:rPr lang="en-US" dirty="0"/>
+              <a:t>Form 12 for strain gauge</a:t>
+            </a:r>
+          </a:p>
+        </p:txBody>
+      </p:sp>
+      <p:sp>
+        <p:nvSpPr>
+          <p:cNvPr id="4" name="Title 3">
+            <a:extLst>
+              <a:ext uri="{FF2B5EF4-FFF2-40B4-BE49-F238E27FC236}">
+                <a16:creationId xmlns:a16="http://schemas.microsoft.com/office/drawing/2014/main" id="{3D014B7D-6644-711A-3443-C61B809B35E2}"/>
+              </a:ext>
+            </a:extLst>
+          </p:cNvPr>
+          <p:cNvSpPr>
+            <a:spLocks noGrp="1"/>
+          </p:cNvSpPr>
+          <p:nvPr>
+            <p:ph type="title"/>
+          </p:nvPr>
+        </p:nvSpPr>
+        <p:spPr>
+          <a:xfrm>
+            <a:off x="351064" y="385004"/>
+            <a:ext cx="8450036" cy="589032"/>
+          </a:xfrm>
+        </p:spPr>
+        <p:txBody>
+          <a:bodyPr anchor="ctr">
+            <a:normAutofit/>
+          </a:bodyPr>
+          <a:lstStyle/>
+          <a:p>
+            <a:r>
+              <a:rPr lang="en-US" dirty="0"/>
+              <a:t>Purchase Reports</a:t>
+            </a:r>
+          </a:p>
+        </p:txBody>
+      </p:sp>
+      <p:pic>
+        <p:nvPicPr>
+          <p:cNvPr id="7" name="Picture 6" descr="A screenshot of a document&#10;&#10;AI-generated content may be incorrect.">
+            <a:extLst>
+              <a:ext uri="{FF2B5EF4-FFF2-40B4-BE49-F238E27FC236}">
+                <a16:creationId xmlns:a16="http://schemas.microsoft.com/office/drawing/2014/main" id="{973F3AE1-7004-9405-078A-2080ED0E6177}"/>
+              </a:ext>
+            </a:extLst>
+          </p:cNvPr>
+          <p:cNvPicPr>
+            <a:picLocks noChangeAspect="1"/>
+          </p:cNvPicPr>
+          <p:nvPr/>
+        </p:nvPicPr>
+        <p:blipFill>
+          <a:blip r:embed="rId3"/>
+          <a:srcRect r="2" b="12447"/>
+          <a:stretch>
+            <a:fillRect/>
+          </a:stretch>
+        </p:blipFill>
+        <p:spPr>
+          <a:xfrm>
+            <a:off x="334734" y="1543324"/>
+            <a:ext cx="4102309" cy="1885677"/>
+          </a:xfrm>
+          <a:prstGeom prst="rect">
+            <a:avLst/>
+          </a:prstGeom>
+          <a:noFill/>
+        </p:spPr>
+      </p:pic>
+      <p:pic>
+        <p:nvPicPr>
+          <p:cNvPr id="9" name="Picture 8" descr="A close-up of a blank form&#10;&#10;AI-generated content may be incorrect.">
+            <a:extLst>
+              <a:ext uri="{FF2B5EF4-FFF2-40B4-BE49-F238E27FC236}">
+                <a16:creationId xmlns:a16="http://schemas.microsoft.com/office/drawing/2014/main" id="{B5AD7235-FA73-252D-28A9-F69C4E9B5F36}"/>
+              </a:ext>
+            </a:extLst>
+          </p:cNvPr>
+          <p:cNvPicPr>
+            <a:picLocks noChangeAspect="1"/>
+          </p:cNvPicPr>
+          <p:nvPr/>
+        </p:nvPicPr>
+        <p:blipFill>
+          <a:blip r:embed="rId4"/>
+          <a:srcRect l="20211" r="2" b="2"/>
+          <a:stretch>
+            <a:fillRect/>
+          </a:stretch>
+        </p:blipFill>
+        <p:spPr>
+          <a:xfrm>
+            <a:off x="4706959" y="1543324"/>
+            <a:ext cx="4094045" cy="1885677"/>
+          </a:xfrm>
+          <a:prstGeom prst="rect">
+            <a:avLst/>
+          </a:prstGeom>
+          <a:noFill/>
+        </p:spPr>
+      </p:pic>
+      <p:sp>
+        <p:nvSpPr>
+          <p:cNvPr id="16" name="Text Placeholder 6">
+            <a:extLst>
+              <a:ext uri="{FF2B5EF4-FFF2-40B4-BE49-F238E27FC236}">
+                <a16:creationId xmlns:a16="http://schemas.microsoft.com/office/drawing/2014/main" id="{E5010B8D-BB83-7836-3324-C976CA3285BC}"/>
+              </a:ext>
+            </a:extLst>
+          </p:cNvPr>
+          <p:cNvSpPr>
+            <a:spLocks noGrp="1"/>
+          </p:cNvSpPr>
+          <p:nvPr>
+            <p:ph type="body" sz="quarter" idx="15"/>
+          </p:nvPr>
+        </p:nvSpPr>
+        <p:spPr>
+          <a:xfrm>
+            <a:off x="4698697" y="3652272"/>
+            <a:ext cx="4102307" cy="2345757"/>
+          </a:xfrm>
+        </p:spPr>
+        <p:txBody>
+          <a:bodyPr/>
+          <a:lstStyle/>
+          <a:p>
+            <a:r>
+              <a:rPr lang="en-US" dirty="0"/>
+              <a:t>Form 12 for force sensor</a:t>
+            </a:r>
+          </a:p>
+        </p:txBody>
+      </p:sp>
+      <p:sp>
+        <p:nvSpPr>
+          <p:cNvPr id="5" name="Footer Placeholder 4">
+            <a:extLst>
+              <a:ext uri="{FF2B5EF4-FFF2-40B4-BE49-F238E27FC236}">
+                <a16:creationId xmlns:a16="http://schemas.microsoft.com/office/drawing/2014/main" id="{235C4917-5D37-9A22-B309-4FC307FCFCAC}"/>
+              </a:ext>
+            </a:extLst>
+          </p:cNvPr>
+          <p:cNvSpPr>
+            <a:spLocks noGrp="1"/>
+          </p:cNvSpPr>
+          <p:nvPr>
+            <p:ph type="ftr" sz="quarter" idx="16"/>
+          </p:nvPr>
+        </p:nvSpPr>
+        <p:spPr>
+          <a:xfrm>
+            <a:off x="7461174" y="6295058"/>
+            <a:ext cx="1339925" cy="323970"/>
+          </a:xfrm>
+        </p:spPr>
+        <p:txBody>
+          <a:bodyPr anchor="ctr">
+            <a:normAutofit/>
+          </a:bodyPr>
+          <a:lstStyle/>
+          <a:p>
+            <a:pPr algn="r">
+              <a:spcAft>
+                <a:spcPts val="600"/>
+              </a:spcAft>
+            </a:pPr>
+            <a:r>
+              <a:rPr lang="en-US" dirty="0"/>
+              <a:t>8/11</a:t>
+            </a:r>
+            <a:endParaRPr lang="en-US"/>
+          </a:p>
+        </p:txBody>
+      </p:sp>
+    </p:spTree>
+    <p:extLst>
+      <p:ext uri="{BB962C8B-B14F-4D97-AF65-F5344CB8AC3E}">
+        <p14:creationId xmlns:p14="http://schemas.microsoft.com/office/powerpoint/2010/main" val="1932811717"/>
       </p:ext>
     </p:extLst>
   </p:cSld>
@@ -18192,49 +18176,6 @@
 </file>
 
 <file path=customXml/item1.xml><?xml version="1.0" encoding="utf-8"?>
-<p:properties xmlns:p="http://schemas.microsoft.com/office/2006/metadata/properties" xmlns:xsi="http://www.w3.org/2001/XMLSchema-instance" xmlns:pc="http://schemas.microsoft.com/office/infopath/2007/PartnerControls">
-  <documentManagement>
-    <SharedWithUsers xmlns="d6656b4d-3fa0-4709-acfb-d5e813445d1e">
-      <UserInfo>
-        <DisplayName>Schott, Thomas H.</DisplayName>
-        <AccountId>17</AccountId>
-        <AccountType/>
-      </UserInfo>
-      <UserInfo>
-        <DisplayName>Sarault, Olivia M</DisplayName>
-        <AccountId>29</AccountId>
-        <AccountType/>
-      </UserInfo>
-      <UserInfo>
-        <DisplayName>Hiller, Kelly R</DisplayName>
-        <AccountId>98</AccountId>
-        <AccountType/>
-      </UserInfo>
-      <UserInfo>
-        <DisplayName>Eddy, Abigail Ellen</DisplayName>
-        <AccountId>46</AccountId>
-        <AccountType/>
-      </UserInfo>
-      <UserInfo>
-        <DisplayName>Gu, Yu Rain</DisplayName>
-        <AccountId>77</AccountId>
-        <AccountType/>
-      </UserInfo>
-      <UserInfo>
-        <DisplayName>Reese, Kristy S</DisplayName>
-        <AccountId>26</AccountId>
-        <AccountType/>
-      </UserInfo>
-    </SharedWithUsers>
-    <lcf76f155ced4ddcb4097134ff3c332f xmlns="37af3f4b-4b66-46f9-8456-831d9bc3e737">
-      <Terms xmlns="http://schemas.microsoft.com/office/infopath/2007/PartnerControls"/>
-    </lcf76f155ced4ddcb4097134ff3c332f>
-    <TaxCatchAll xmlns="d6656b4d-3fa0-4709-acfb-d5e813445d1e" xsi:nil="true"/>
-  </documentManagement>
-</p:properties>
-</file>
-
-<file path=customXml/item2.xml><?xml version="1.0" encoding="utf-8"?>
 <ct:contentTypeSchema xmlns:ct="http://schemas.microsoft.com/office/2006/metadata/contentType" xmlns:ma="http://schemas.microsoft.com/office/2006/metadata/properties/metaAttributes" ct:_="" ma:_="" ma:contentTypeName="Document" ma:contentTypeID="0x01010054E202481DC1CB46AA011D949D311478" ma:contentTypeVersion="13" ma:contentTypeDescription="Create a new document." ma:contentTypeScope="" ma:versionID="309c718596e4092f54ce9aa93358bb8d">
   <xsd:schema xmlns:xsd="http://www.w3.org/2001/XMLSchema" xmlns:xs="http://www.w3.org/2001/XMLSchema" xmlns:p="http://schemas.microsoft.com/office/2006/metadata/properties" xmlns:ns2="37af3f4b-4b66-46f9-8456-831d9bc3e737" xmlns:ns3="d6656b4d-3fa0-4709-acfb-d5e813445d1e" targetNamespace="http://schemas.microsoft.com/office/2006/metadata/properties" ma:root="true" ma:fieldsID="0c34f3e70276db9d2471c2526b8de3df" ns2:_="" ns3:_="">
     <xsd:import namespace="37af3f4b-4b66-46f9-8456-831d9bc3e737"/>
@@ -18457,6 +18398,49 @@
 </ct:contentTypeSchema>
 </file>
 
+<file path=customXml/item2.xml><?xml version="1.0" encoding="utf-8"?>
+<p:properties xmlns:p="http://schemas.microsoft.com/office/2006/metadata/properties" xmlns:xsi="http://www.w3.org/2001/XMLSchema-instance" xmlns:pc="http://schemas.microsoft.com/office/infopath/2007/PartnerControls">
+  <documentManagement>
+    <SharedWithUsers xmlns="d6656b4d-3fa0-4709-acfb-d5e813445d1e">
+      <UserInfo>
+        <DisplayName>Schott, Thomas H.</DisplayName>
+        <AccountId>17</AccountId>
+        <AccountType/>
+      </UserInfo>
+      <UserInfo>
+        <DisplayName>Sarault, Olivia M</DisplayName>
+        <AccountId>29</AccountId>
+        <AccountType/>
+      </UserInfo>
+      <UserInfo>
+        <DisplayName>Hiller, Kelly R</DisplayName>
+        <AccountId>98</AccountId>
+        <AccountType/>
+      </UserInfo>
+      <UserInfo>
+        <DisplayName>Eddy, Abigail Ellen</DisplayName>
+        <AccountId>46</AccountId>
+        <AccountType/>
+      </UserInfo>
+      <UserInfo>
+        <DisplayName>Gu, Yu Rain</DisplayName>
+        <AccountId>77</AccountId>
+        <AccountType/>
+      </UserInfo>
+      <UserInfo>
+        <DisplayName>Reese, Kristy S</DisplayName>
+        <AccountId>26</AccountId>
+        <AccountType/>
+      </UserInfo>
+    </SharedWithUsers>
+    <lcf76f155ced4ddcb4097134ff3c332f xmlns="37af3f4b-4b66-46f9-8456-831d9bc3e737">
+      <Terms xmlns="http://schemas.microsoft.com/office/infopath/2007/PartnerControls"/>
+    </lcf76f155ced4ddcb4097134ff3c332f>
+    <TaxCatchAll xmlns="d6656b4d-3fa0-4709-acfb-d5e813445d1e" xsi:nil="true"/>
+  </documentManagement>
+</p:properties>
+</file>
+
 <file path=customXml/item3.xml><?xml version="1.0" encoding="utf-8"?>
 <?mso-contentType ?>
 <FormTemplates xmlns="http://schemas.microsoft.com/sharepoint/v3/contenttype/forms">
@@ -18467,23 +18451,6 @@
 </file>
 
 <file path=customXml/itemProps1.xml><?xml version="1.0" encoding="utf-8"?>
-<ds:datastoreItem xmlns:ds="http://schemas.openxmlformats.org/officeDocument/2006/customXml" ds:itemID="{21DE0D6C-581B-4814-98E7-EF172D5D46A1}">
-  <ds:schemaRefs>
-    <ds:schemaRef ds:uri="http://purl.org/dc/elements/1.1/"/>
-    <ds:schemaRef ds:uri="http://schemas.microsoft.com/office/2006/documentManagement/types"/>
-    <ds:schemaRef ds:uri="d6656b4d-3fa0-4709-acfb-d5e813445d1e"/>
-    <ds:schemaRef ds:uri="http://purl.org/dc/terms/"/>
-    <ds:schemaRef ds:uri="http://schemas.microsoft.com/office/infopath/2007/PartnerControls"/>
-    <ds:schemaRef ds:uri="37af3f4b-4b66-46f9-8456-831d9bc3e737"/>
-    <ds:schemaRef ds:uri="http://schemas.openxmlformats.org/package/2006/metadata/core-properties"/>
-    <ds:schemaRef ds:uri="http://schemas.microsoft.com/office/2006/metadata/properties"/>
-    <ds:schemaRef ds:uri="http://www.w3.org/XML/1998/namespace"/>
-    <ds:schemaRef ds:uri="http://purl.org/dc/dcmitype/"/>
-  </ds:schemaRefs>
-</ds:datastoreItem>
-</file>
-
-<file path=customXml/itemProps2.xml><?xml version="1.0" encoding="utf-8"?>
 <ds:datastoreItem xmlns:ds="http://schemas.openxmlformats.org/officeDocument/2006/customXml" ds:itemID="{64D795B0-FAA0-424A-9B96-7691ED1EF26B}">
   <ds:schemaRefs>
     <ds:schemaRef ds:uri="http://schemas.microsoft.com/office/2006/metadata/contentType"/>
@@ -18502,6 +18469,23 @@
 </ds:datastoreItem>
 </file>
 
+<file path=customXml/itemProps2.xml><?xml version="1.0" encoding="utf-8"?>
+<ds:datastoreItem xmlns:ds="http://schemas.openxmlformats.org/officeDocument/2006/customXml" ds:itemID="{21DE0D6C-581B-4814-98E7-EF172D5D46A1}">
+  <ds:schemaRefs>
+    <ds:schemaRef ds:uri="http://purl.org/dc/elements/1.1/"/>
+    <ds:schemaRef ds:uri="http://schemas.microsoft.com/office/2006/documentManagement/types"/>
+    <ds:schemaRef ds:uri="d6656b4d-3fa0-4709-acfb-d5e813445d1e"/>
+    <ds:schemaRef ds:uri="http://purl.org/dc/terms/"/>
+    <ds:schemaRef ds:uri="http://schemas.microsoft.com/office/infopath/2007/PartnerControls"/>
+    <ds:schemaRef ds:uri="37af3f4b-4b66-46f9-8456-831d9bc3e737"/>
+    <ds:schemaRef ds:uri="http://schemas.openxmlformats.org/package/2006/metadata/core-properties"/>
+    <ds:schemaRef ds:uri="http://schemas.microsoft.com/office/2006/metadata/properties"/>
+    <ds:schemaRef ds:uri="http://www.w3.org/XML/1998/namespace"/>
+    <ds:schemaRef ds:uri="http://purl.org/dc/dcmitype/"/>
+  </ds:schemaRefs>
+</ds:datastoreItem>
+</file>
+
 <file path=customXml/itemProps3.xml><?xml version="1.0" encoding="utf-8"?>
 <ds:datastoreItem xmlns:ds="http://schemas.openxmlformats.org/officeDocument/2006/customXml" ds:itemID="{F5B64EEB-1B4A-4920-AA44-E234D7D487D1}">
   <ds:schemaRefs>

--- a/Documentation/Slides/Week_20.pptx
+++ b/Documentation/Slides/Week_20.pptx
@@ -25,7 +25,7 @@
   <p:notesSz cx="6858000" cy="9144000"/>
   <p:embeddedFontLst>
     <p:embeddedFont>
-      <p:font typeface="Acumin Pro Condensed Semibold" panose="020B0706020202020204" pitchFamily="34" charset="77"/>
+      <p:font typeface="Acumin Pro Condensed Semibold" panose="020B0706020202020204"/>
       <p:regular r:id="rId18"/>
       <p:bold r:id="rId19"/>
       <p:italic r:id="rId20"/>
@@ -14673,7 +14673,7 @@
           <a:p>
             <a:r>
               <a:rPr lang="en-US" dirty="0"/>
-              <a:t>02/02/26</a:t>
+              <a:t>02/06/26</a:t>
             </a:r>
           </a:p>
         </p:txBody>
@@ -14752,15 +14752,6 @@
           <a:solidFill>
             <a:srgbClr val="FFFFFF"/>
           </a:solidFill>
-          <a:extLst>
-            <a:ext uri="{909E8E84-426E-40DD-AFC4-6F175D3DCCD1}">
-              <a14:hiddenFill xmlns:a14="http://schemas.microsoft.com/office/drawing/2010/main">
-                <a:solidFill>
-                  <a:srgbClr val="FFFFFF"/>
-                </a:solidFill>
-              </a14:hiddenFill>
-            </a:ext>
-          </a:extLst>
         </p:spPr>
       </p:pic>
       <p:sp>
@@ -15264,6 +15255,87 @@
               <a:rPr lang="en-US" dirty="0"/>
               <a:t> RFID circuits on breadboard</a:t>
             </a:r>
+          </a:p>
+          <a:p>
+            <a:pPr marL="285750" indent="-285750">
+              <a:buFont typeface="Arial" panose="020B0604020202020204" pitchFamily="34" charset="0"/>
+              <a:buChar char="•"/>
+            </a:pPr>
+            <a:r>
+              <a:rPr lang="en-US" dirty="0"/>
+              <a:t>Research Papers:</a:t>
+            </a:r>
+          </a:p>
+          <a:p>
+            <a:pPr marL="628650" lvl="1" indent="-285750">
+              <a:buFont typeface="Arial" panose="020B0604020202020204" pitchFamily="34" charset="0"/>
+              <a:buChar char="•"/>
+            </a:pPr>
+            <a:r>
+              <a:rPr lang="en-US" dirty="0"/>
+              <a:t>IEEE</a:t>
+            </a:r>
+          </a:p>
+          <a:p>
+            <a:pPr marL="628650" lvl="1" indent="-285750">
+              <a:buFont typeface="Arial" panose="020B0604020202020204" pitchFamily="34" charset="0"/>
+              <a:buChar char="•"/>
+            </a:pPr>
+            <a:r>
+              <a:rPr lang="en-US" dirty="0"/>
+              <a:t>Transactions on Electronics Circuits and Systems</a:t>
+            </a:r>
+          </a:p>
+          <a:p>
+            <a:pPr marL="971550" lvl="2" indent="-285750">
+              <a:buFont typeface="Arial" panose="020B0604020202020204" pitchFamily="34" charset="0"/>
+              <a:buChar char="•"/>
+            </a:pPr>
+            <a:r>
+              <a:rPr lang="en-US" dirty="0"/>
+              <a:t>2 – 5 pages</a:t>
+            </a:r>
+          </a:p>
+          <a:p>
+            <a:pPr marL="971550" lvl="2" indent="-285750">
+              <a:buFont typeface="Arial" panose="020B0604020202020204" pitchFamily="34" charset="0"/>
+              <a:buChar char="•"/>
+            </a:pPr>
+            <a:r>
+              <a:rPr lang="en-US" dirty="0"/>
+              <a:t>1 – Long Journal</a:t>
+            </a:r>
+          </a:p>
+          <a:p>
+            <a:pPr marL="628650" lvl="1" indent="-285750">
+              <a:buFont typeface="Arial" panose="020B0604020202020204" pitchFamily="34" charset="0"/>
+              <a:buChar char="•"/>
+            </a:pPr>
+            <a:r>
+              <a:rPr lang="en-US" dirty="0"/>
+              <a:t>IoT Journal &lt;-</a:t>
+            </a:r>
+          </a:p>
+          <a:p>
+            <a:pPr marL="628650" lvl="1" indent="-285750">
+              <a:buFont typeface="Arial" panose="020B0604020202020204" pitchFamily="34" charset="0"/>
+              <a:buChar char="•"/>
+            </a:pPr>
+            <a:r>
+              <a:rPr lang="en-US" dirty="0"/>
+              <a:t>Transactions on Industrial Electronics</a:t>
+            </a:r>
+          </a:p>
+          <a:p>
+            <a:pPr marL="628650" lvl="1" indent="-285750">
+              <a:buFont typeface="Arial" panose="020B0604020202020204" pitchFamily="34" charset="0"/>
+              <a:buChar char="•"/>
+            </a:pPr>
+            <a:r>
+              <a:rPr lang="en-US"/>
+              <a:t>Electronics DPI</a:t>
+            </a:r>
+            <a:endParaRPr lang="en-US" dirty="0"/>
           </a:p>
         </p:txBody>
       </p:sp>
@@ -18176,6 +18248,49 @@
 </file>
 
 <file path=customXml/item1.xml><?xml version="1.0" encoding="utf-8"?>
+<p:properties xmlns:p="http://schemas.microsoft.com/office/2006/metadata/properties" xmlns:xsi="http://www.w3.org/2001/XMLSchema-instance" xmlns:pc="http://schemas.microsoft.com/office/infopath/2007/PartnerControls">
+  <documentManagement>
+    <SharedWithUsers xmlns="d6656b4d-3fa0-4709-acfb-d5e813445d1e">
+      <UserInfo>
+        <DisplayName>Schott, Thomas H.</DisplayName>
+        <AccountId>17</AccountId>
+        <AccountType/>
+      </UserInfo>
+      <UserInfo>
+        <DisplayName>Sarault, Olivia M</DisplayName>
+        <AccountId>29</AccountId>
+        <AccountType/>
+      </UserInfo>
+      <UserInfo>
+        <DisplayName>Hiller, Kelly R</DisplayName>
+        <AccountId>98</AccountId>
+        <AccountType/>
+      </UserInfo>
+      <UserInfo>
+        <DisplayName>Eddy, Abigail Ellen</DisplayName>
+        <AccountId>46</AccountId>
+        <AccountType/>
+      </UserInfo>
+      <UserInfo>
+        <DisplayName>Gu, Yu Rain</DisplayName>
+        <AccountId>77</AccountId>
+        <AccountType/>
+      </UserInfo>
+      <UserInfo>
+        <DisplayName>Reese, Kristy S</DisplayName>
+        <AccountId>26</AccountId>
+        <AccountType/>
+      </UserInfo>
+    </SharedWithUsers>
+    <lcf76f155ced4ddcb4097134ff3c332f xmlns="37af3f4b-4b66-46f9-8456-831d9bc3e737">
+      <Terms xmlns="http://schemas.microsoft.com/office/infopath/2007/PartnerControls"/>
+    </lcf76f155ced4ddcb4097134ff3c332f>
+    <TaxCatchAll xmlns="d6656b4d-3fa0-4709-acfb-d5e813445d1e" xsi:nil="true"/>
+  </documentManagement>
+</p:properties>
+</file>
+
+<file path=customXml/item2.xml><?xml version="1.0" encoding="utf-8"?>
 <ct:contentTypeSchema xmlns:ct="http://schemas.microsoft.com/office/2006/metadata/contentType" xmlns:ma="http://schemas.microsoft.com/office/2006/metadata/properties/metaAttributes" ct:_="" ma:_="" ma:contentTypeName="Document" ma:contentTypeID="0x01010054E202481DC1CB46AA011D949D311478" ma:contentTypeVersion="13" ma:contentTypeDescription="Create a new document." ma:contentTypeScope="" ma:versionID="309c718596e4092f54ce9aa93358bb8d">
   <xsd:schema xmlns:xsd="http://www.w3.org/2001/XMLSchema" xmlns:xs="http://www.w3.org/2001/XMLSchema" xmlns:p="http://schemas.microsoft.com/office/2006/metadata/properties" xmlns:ns2="37af3f4b-4b66-46f9-8456-831d9bc3e737" xmlns:ns3="d6656b4d-3fa0-4709-acfb-d5e813445d1e" targetNamespace="http://schemas.microsoft.com/office/2006/metadata/properties" ma:root="true" ma:fieldsID="0c34f3e70276db9d2471c2526b8de3df" ns2:_="" ns3:_="">
     <xsd:import namespace="37af3f4b-4b66-46f9-8456-831d9bc3e737"/>
@@ -18398,49 +18513,6 @@
 </ct:contentTypeSchema>
 </file>
 
-<file path=customXml/item2.xml><?xml version="1.0" encoding="utf-8"?>
-<p:properties xmlns:p="http://schemas.microsoft.com/office/2006/metadata/properties" xmlns:xsi="http://www.w3.org/2001/XMLSchema-instance" xmlns:pc="http://schemas.microsoft.com/office/infopath/2007/PartnerControls">
-  <documentManagement>
-    <SharedWithUsers xmlns="d6656b4d-3fa0-4709-acfb-d5e813445d1e">
-      <UserInfo>
-        <DisplayName>Schott, Thomas H.</DisplayName>
-        <AccountId>17</AccountId>
-        <AccountType/>
-      </UserInfo>
-      <UserInfo>
-        <DisplayName>Sarault, Olivia M</DisplayName>
-        <AccountId>29</AccountId>
-        <AccountType/>
-      </UserInfo>
-      <UserInfo>
-        <DisplayName>Hiller, Kelly R</DisplayName>
-        <AccountId>98</AccountId>
-        <AccountType/>
-      </UserInfo>
-      <UserInfo>
-        <DisplayName>Eddy, Abigail Ellen</DisplayName>
-        <AccountId>46</AccountId>
-        <AccountType/>
-      </UserInfo>
-      <UserInfo>
-        <DisplayName>Gu, Yu Rain</DisplayName>
-        <AccountId>77</AccountId>
-        <AccountType/>
-      </UserInfo>
-      <UserInfo>
-        <DisplayName>Reese, Kristy S</DisplayName>
-        <AccountId>26</AccountId>
-        <AccountType/>
-      </UserInfo>
-    </SharedWithUsers>
-    <lcf76f155ced4ddcb4097134ff3c332f xmlns="37af3f4b-4b66-46f9-8456-831d9bc3e737">
-      <Terms xmlns="http://schemas.microsoft.com/office/infopath/2007/PartnerControls"/>
-    </lcf76f155ced4ddcb4097134ff3c332f>
-    <TaxCatchAll xmlns="d6656b4d-3fa0-4709-acfb-d5e813445d1e" xsi:nil="true"/>
-  </documentManagement>
-</p:properties>
-</file>
-
 <file path=customXml/item3.xml><?xml version="1.0" encoding="utf-8"?>
 <?mso-contentType ?>
 <FormTemplates xmlns="http://schemas.microsoft.com/sharepoint/v3/contenttype/forms">
@@ -18451,6 +18523,23 @@
 </file>
 
 <file path=customXml/itemProps1.xml><?xml version="1.0" encoding="utf-8"?>
+<ds:datastoreItem xmlns:ds="http://schemas.openxmlformats.org/officeDocument/2006/customXml" ds:itemID="{21DE0D6C-581B-4814-98E7-EF172D5D46A1}">
+  <ds:schemaRefs>
+    <ds:schemaRef ds:uri="http://purl.org/dc/elements/1.1/"/>
+    <ds:schemaRef ds:uri="http://schemas.microsoft.com/office/2006/documentManagement/types"/>
+    <ds:schemaRef ds:uri="d6656b4d-3fa0-4709-acfb-d5e813445d1e"/>
+    <ds:schemaRef ds:uri="http://purl.org/dc/terms/"/>
+    <ds:schemaRef ds:uri="http://schemas.microsoft.com/office/infopath/2007/PartnerControls"/>
+    <ds:schemaRef ds:uri="37af3f4b-4b66-46f9-8456-831d9bc3e737"/>
+    <ds:schemaRef ds:uri="http://schemas.openxmlformats.org/package/2006/metadata/core-properties"/>
+    <ds:schemaRef ds:uri="http://schemas.microsoft.com/office/2006/metadata/properties"/>
+    <ds:schemaRef ds:uri="http://www.w3.org/XML/1998/namespace"/>
+    <ds:schemaRef ds:uri="http://purl.org/dc/dcmitype/"/>
+  </ds:schemaRefs>
+</ds:datastoreItem>
+</file>
+
+<file path=customXml/itemProps2.xml><?xml version="1.0" encoding="utf-8"?>
 <ds:datastoreItem xmlns:ds="http://schemas.openxmlformats.org/officeDocument/2006/customXml" ds:itemID="{64D795B0-FAA0-424A-9B96-7691ED1EF26B}">
   <ds:schemaRefs>
     <ds:schemaRef ds:uri="http://schemas.microsoft.com/office/2006/metadata/contentType"/>
@@ -18469,23 +18558,6 @@
 </ds:datastoreItem>
 </file>
 
-<file path=customXml/itemProps2.xml><?xml version="1.0" encoding="utf-8"?>
-<ds:datastoreItem xmlns:ds="http://schemas.openxmlformats.org/officeDocument/2006/customXml" ds:itemID="{21DE0D6C-581B-4814-98E7-EF172D5D46A1}">
-  <ds:schemaRefs>
-    <ds:schemaRef ds:uri="http://purl.org/dc/elements/1.1/"/>
-    <ds:schemaRef ds:uri="http://schemas.microsoft.com/office/2006/documentManagement/types"/>
-    <ds:schemaRef ds:uri="d6656b4d-3fa0-4709-acfb-d5e813445d1e"/>
-    <ds:schemaRef ds:uri="http://purl.org/dc/terms/"/>
-    <ds:schemaRef ds:uri="http://schemas.microsoft.com/office/infopath/2007/PartnerControls"/>
-    <ds:schemaRef ds:uri="37af3f4b-4b66-46f9-8456-831d9bc3e737"/>
-    <ds:schemaRef ds:uri="http://schemas.openxmlformats.org/package/2006/metadata/core-properties"/>
-    <ds:schemaRef ds:uri="http://schemas.microsoft.com/office/2006/metadata/properties"/>
-    <ds:schemaRef ds:uri="http://www.w3.org/XML/1998/namespace"/>
-    <ds:schemaRef ds:uri="http://purl.org/dc/dcmitype/"/>
-  </ds:schemaRefs>
-</ds:datastoreItem>
-</file>
-
 <file path=customXml/itemProps3.xml><?xml version="1.0" encoding="utf-8"?>
 <ds:datastoreItem xmlns:ds="http://schemas.openxmlformats.org/officeDocument/2006/customXml" ds:itemID="{F5B64EEB-1B4A-4920-AA44-E234D7D487D1}">
   <ds:schemaRefs>

--- a/Documentation/Slides/Week_20.pptx
+++ b/Documentation/Slides/Week_20.pptx
@@ -25,7 +25,7 @@
   <p:notesSz cx="6858000" cy="9144000"/>
   <p:embeddedFontLst>
     <p:embeddedFont>
-      <p:font typeface="Acumin Pro Condensed Semibold" panose="020B0706020202020204"/>
+      <p:font typeface="Acumin Pro Condensed Semibold" panose="020B0706020202020204" pitchFamily="34" charset="77"/>
       <p:regular r:id="rId18"/>
       <p:bold r:id="rId19"/>
       <p:italic r:id="rId20"/>
@@ -253,7 +253,7 @@
           <a:p>
             <a:fld id="{01926CF7-48D8-2F46-AFC8-8A5D2298DFDD}" type="datetimeFigureOut">
               <a:rPr lang="en-US" smtClean="0"/>
-              <a:t>2/6/26</a:t>
+              <a:t>2/9/26</a:t>
             </a:fld>
             <a:endParaRPr lang="en-US"/>
           </a:p>
@@ -15332,10 +15332,9 @@
               <a:buChar char="•"/>
             </a:pPr>
             <a:r>
-              <a:rPr lang="en-US"/>
+              <a:rPr lang="en-US" dirty="0"/>
               <a:t>Electronics DPI</a:t>
             </a:r>
-            <a:endParaRPr lang="en-US" dirty="0"/>
           </a:p>
         </p:txBody>
       </p:sp>
@@ -18291,6 +18290,15 @@
 </file>
 
 <file path=customXml/item2.xml><?xml version="1.0" encoding="utf-8"?>
+<?mso-contentType ?>
+<FormTemplates xmlns="http://schemas.microsoft.com/sharepoint/v3/contenttype/forms">
+  <Display>DocumentLibraryForm</Display>
+  <Edit>DocumentLibraryForm</Edit>
+  <New>DocumentLibraryForm</New>
+</FormTemplates>
+</file>
+
+<file path=customXml/item3.xml><?xml version="1.0" encoding="utf-8"?>
 <ct:contentTypeSchema xmlns:ct="http://schemas.microsoft.com/office/2006/metadata/contentType" xmlns:ma="http://schemas.microsoft.com/office/2006/metadata/properties/metaAttributes" ct:_="" ma:_="" ma:contentTypeName="Document" ma:contentTypeID="0x01010054E202481DC1CB46AA011D949D311478" ma:contentTypeVersion="13" ma:contentTypeDescription="Create a new document." ma:contentTypeScope="" ma:versionID="309c718596e4092f54ce9aa93358bb8d">
   <xsd:schema xmlns:xsd="http://www.w3.org/2001/XMLSchema" xmlns:xs="http://www.w3.org/2001/XMLSchema" xmlns:p="http://schemas.microsoft.com/office/2006/metadata/properties" xmlns:ns2="37af3f4b-4b66-46f9-8456-831d9bc3e737" xmlns:ns3="d6656b4d-3fa0-4709-acfb-d5e813445d1e" targetNamespace="http://schemas.microsoft.com/office/2006/metadata/properties" ma:root="true" ma:fieldsID="0c34f3e70276db9d2471c2526b8de3df" ns2:_="" ns3:_="">
     <xsd:import namespace="37af3f4b-4b66-46f9-8456-831d9bc3e737"/>
@@ -18513,15 +18521,6 @@
 </ct:contentTypeSchema>
 </file>
 
-<file path=customXml/item3.xml><?xml version="1.0" encoding="utf-8"?>
-<?mso-contentType ?>
-<FormTemplates xmlns="http://schemas.microsoft.com/sharepoint/v3/contenttype/forms">
-  <Display>DocumentLibraryForm</Display>
-  <Edit>DocumentLibraryForm</Edit>
-  <New>DocumentLibraryForm</New>
-</FormTemplates>
-</file>
-
 <file path=customXml/itemProps1.xml><?xml version="1.0" encoding="utf-8"?>
 <ds:datastoreItem xmlns:ds="http://schemas.openxmlformats.org/officeDocument/2006/customXml" ds:itemID="{21DE0D6C-581B-4814-98E7-EF172D5D46A1}">
   <ds:schemaRefs>
@@ -18540,6 +18539,14 @@
 </file>
 
 <file path=customXml/itemProps2.xml><?xml version="1.0" encoding="utf-8"?>
+<ds:datastoreItem xmlns:ds="http://schemas.openxmlformats.org/officeDocument/2006/customXml" ds:itemID="{F5B64EEB-1B4A-4920-AA44-E234D7D487D1}">
+  <ds:schemaRefs>
+    <ds:schemaRef ds:uri="http://schemas.microsoft.com/sharepoint/v3/contenttype/forms"/>
+  </ds:schemaRefs>
+</ds:datastoreItem>
+</file>
+
+<file path=customXml/itemProps3.xml><?xml version="1.0" encoding="utf-8"?>
 <ds:datastoreItem xmlns:ds="http://schemas.openxmlformats.org/officeDocument/2006/customXml" ds:itemID="{64D795B0-FAA0-424A-9B96-7691ED1EF26B}">
   <ds:schemaRefs>
     <ds:schemaRef ds:uri="http://schemas.microsoft.com/office/2006/metadata/contentType"/>
@@ -18556,12 +18563,4 @@
     <ds:schemaRef ds:uri="http://schemas.microsoft.com/internal/obd"/>
   </ds:schemaRefs>
 </ds:datastoreItem>
-</file>
-
-<file path=customXml/itemProps3.xml><?xml version="1.0" encoding="utf-8"?>
-<ds:datastoreItem xmlns:ds="http://schemas.openxmlformats.org/officeDocument/2006/customXml" ds:itemID="{F5B64EEB-1B4A-4920-AA44-E234D7D487D1}">
-  <ds:schemaRefs>
-    <ds:schemaRef ds:uri="http://schemas.microsoft.com/sharepoint/v3/contenttype/forms"/>
-  </ds:schemaRefs>
-</ds:datastoreItem>
 </file>